--- a/assets/figures-editable/c1-c2/c1-e19.pptx
+++ b/assets/figures-editable/c1-c2/c1-e19.pptx
@@ -7,7 +7,7 @@
   <p:sldIdLst>
     <p:sldId id="256" r:id="rId7"/>
   </p:sldIdLst>
-  <p:sldSz cx="11948160" cy="7924799" type="screen4x3"/>
+  <p:sldSz cx="12191695" cy="6858000" type="screen4x3"/>
   <p:notesSz cx="6858000" cy="9144000"/>
   <p:defaultTextStyle>
     <a:defPPr>
@@ -3098,14 +3098,14 @@
       <p:grpSpPr/>
       <p:sp>
         <p:nvSpPr>
-          <p:cNvPr id="2" name="text1" descr="sci-ppt:C1-E19-001"/>
+          <p:cNvPr id="2" name="C1-E19 text 0" descr="sci-ppt:o000"/>
           <p:cNvSpPr txBox="1"/>
           <p:nvPr/>
         </p:nvSpPr>
         <p:spPr>
           <a:xfrm>
-            <a:off x="316992" y="268224"/>
-            <a:ext cx="11277600" cy="359054"/>
+            <a:off x="274320" y="118872"/>
+            <a:ext cx="11612880" cy="340105"/>
           </a:xfrm>
           <a:prstGeom prst="rect">
             <a:avLst/>
@@ -3114,7 +3114,7 @@
           <a:effectLst/>
         </p:spPr>
         <p:txBody>
-          <a:bodyPr wrap="none" lIns="27432" rIns="27432" tIns="18288" bIns="18288" anchor="ctr">
+          <a:bodyPr wrap="none" lIns="18288" rIns="18288" tIns="18288" bIns="18288" anchor="t">
             <a:spAutoFit/>
           </a:bodyPr>
           <a:lstStyle/>
@@ -3125,83 +3125,115 @@
               </a:spcAft>
             </a:pPr>
             <a:r>
-              <a:rPr sz="1823" b="0" i="0">
+              <a:rPr sz="1900" b="1" i="0">
                 <a:solidFill>
                   <a:srgbClr val="8EDBD4"/>
                 </a:solidFill>
                 <a:latin typeface="Arial"/>
               </a:rPr>
-              <a:t>C1-E19 | Physical-variable diagram</a:t>
-            </a:r>
-          </a:p>
-        </p:txBody>
-      </p:sp>
-      <p:sp>
-        <p:nvSpPr>
-          <p:cNvPr id="3" name="ellipse2" descr="sci-ppt:C1-E19-002"/>
-          <p:cNvSpPr/>
-          <p:nvPr/>
-        </p:nvSpPr>
-        <p:spPr>
-          <a:xfrm>
-            <a:off x="2072640" y="1402080"/>
-            <a:ext cx="2438400" cy="2438400"/>
-          </a:xfrm>
-          <a:prstGeom prst="ellipse">
-            <a:avLst/>
-          </a:prstGeom>
-          <a:solidFill>
-            <a:srgbClr val="213E4B"/>
-          </a:solidFill>
-          <a:ln w="21590">
+              <a:t>C1-E19 · Declared teaching calculation</a:t>
+            </a:r>
+          </a:p>
+        </p:txBody>
+      </p:sp>
+      <p:cxnSp>
+        <p:nvCxnSpPr>
+          <p:cNvPr id="3" name="C1-E19 line 1" descr="sci-ppt:o001"/>
+          <p:cNvCxnSpPr/>
+          <p:nvPr/>
+        </p:nvCxnSpPr>
+        <p:spPr>
+          <a:xfrm>
+            <a:off x="914400" y="3108960"/>
+            <a:ext cx="5760720" cy="0"/>
+          </a:xfrm>
+          <a:prstGeom prst="line">
+            <a:avLst/>
+          </a:prstGeom>
+          <a:ln w="19050">
             <a:solidFill>
               <a:srgbClr val="B4C7D2"/>
             </a:solidFill>
           </a:ln>
           <a:effectLst/>
         </p:spPr>
-        <p:txBody>
-          <a:bodyPr rtlCol="0" anchor="ctr"/>
-          <a:lstStyle/>
-          <a:p>
-            <a:pPr algn="ctr"/>
-          </a:p>
-        </p:txBody>
-      </p:sp>
+      </p:cxnSp>
       <p:cxnSp>
         <p:nvCxnSpPr>
-          <p:cNvPr id="4" name="arrow3" descr="sci-ppt:C1-E19-003"/>
+          <p:cNvPr id="4" name="C1-E19 line 2" descr="sci-ppt:o002"/>
           <p:cNvCxnSpPr/>
           <p:nvPr/>
         </p:nvCxnSpPr>
         <p:spPr>
           <a:xfrm>
-            <a:off x="3291840" y="2621280"/>
-            <a:ext cx="1219200" cy="0"/>
+            <a:off x="914400" y="1280160"/>
+            <a:ext cx="0" cy="1828800"/>
           </a:xfrm>
           <a:prstGeom prst="line">
             <a:avLst/>
           </a:prstGeom>
-          <a:ln w="25400">
+          <a:ln w="19050">
             <a:solidFill>
-              <a:srgbClr val="8EDBD4"/>
+              <a:srgbClr val="B4C7D2"/>
             </a:solidFill>
-            <a:headEnd type="none" w="med" len="med"/>
-            <a:tailEnd type="triangle" w="med" len="med"/>
           </a:ln>
           <a:effectLst/>
         </p:spPr>
       </p:cxnSp>
-      <p:sp>
-        <p:nvSpPr>
-          <p:cNvPr id="5" name="text4" descr="sci-ppt:C1-E19-004"/>
+      <p:cxnSp>
+        <p:nvCxnSpPr>
+          <p:cNvPr id="5" name="C1-E19 line 3" descr="sci-ppt:o003"/>
+          <p:cNvCxnSpPr/>
+          <p:nvPr/>
+        </p:nvCxnSpPr>
+        <p:spPr>
+          <a:xfrm>
+            <a:off x="914400" y="3108960"/>
+            <a:ext cx="0" cy="64008"/>
+          </a:xfrm>
+          <a:prstGeom prst="line">
+            <a:avLst/>
+          </a:prstGeom>
+          <a:ln w="12700">
+            <a:solidFill>
+              <a:srgbClr val="B4C7D2"/>
+            </a:solidFill>
+          </a:ln>
+          <a:effectLst/>
+        </p:spPr>
+      </p:cxnSp>
+      <p:cxnSp>
+        <p:nvCxnSpPr>
+          <p:cNvPr id="6" name="C1-E19 line 4" descr="sci-ppt:o004"/>
+          <p:cNvCxnSpPr/>
+          <p:nvPr/>
+        </p:nvCxnSpPr>
+        <p:spPr>
+          <a:xfrm>
+            <a:off x="914400" y="1280160"/>
+            <a:ext cx="0" cy="1828800"/>
+          </a:xfrm>
+          <a:prstGeom prst="line">
+            <a:avLst/>
+          </a:prstGeom>
+          <a:ln w="7620">
+            <a:solidFill>
+              <a:srgbClr val="2E4756"/>
+            </a:solidFill>
+          </a:ln>
+          <a:effectLst/>
+        </p:spPr>
+      </p:cxnSp>
+      <p:sp>
+        <p:nvSpPr>
+          <p:cNvPr id="7" name="C1-E19 text 5" descr="sci-ppt:o005"/>
           <p:cNvSpPr txBox="1"/>
           <p:nvPr/>
         </p:nvSpPr>
         <p:spPr>
           <a:xfrm>
-            <a:off x="3474720" y="2133600"/>
-            <a:ext cx="1584960" cy="396849"/>
+            <a:off x="457200" y="3191256"/>
+            <a:ext cx="914400" cy="208407"/>
           </a:xfrm>
           <a:prstGeom prst="rect">
             <a:avLst/>
@@ -3210,7 +3242,573 @@
           <a:effectLst/>
         </p:spPr>
         <p:txBody>
-          <a:bodyPr wrap="none" lIns="27432" rIns="27432" tIns="18288" bIns="18288" anchor="ctr">
+          <a:bodyPr wrap="none" lIns="18288" rIns="18288" tIns="18288" bIns="18288" anchor="t">
+            <a:spAutoFit/>
+          </a:bodyPr>
+          <a:lstStyle/>
+          <a:p>
+            <a:pPr algn="ctr">
+              <a:spcAft>
+                <a:spcPts val="0"/>
+              </a:spcAft>
+            </a:pPr>
+            <a:r>
+              <a:rPr sz="1050" b="0" i="0">
+                <a:solidFill>
+                  <a:srgbClr val="B4C7D2"/>
+                </a:solidFill>
+                <a:latin typeface="Arial"/>
+              </a:rPr>
+              <a:t>0</a:t>
+            </a:r>
+          </a:p>
+        </p:txBody>
+      </p:sp>
+      <p:cxnSp>
+        <p:nvCxnSpPr>
+          <p:cNvPr id="8" name="C1-E19 line 6" descr="sci-ppt:o006"/>
+          <p:cNvCxnSpPr/>
+          <p:nvPr/>
+        </p:nvCxnSpPr>
+        <p:spPr>
+          <a:xfrm>
+            <a:off x="2834639" y="3108960"/>
+            <a:ext cx="0" cy="64008"/>
+          </a:xfrm>
+          <a:prstGeom prst="line">
+            <a:avLst/>
+          </a:prstGeom>
+          <a:ln w="12700">
+            <a:solidFill>
+              <a:srgbClr val="B4C7D2"/>
+            </a:solidFill>
+          </a:ln>
+          <a:effectLst/>
+        </p:spPr>
+      </p:cxnSp>
+      <p:cxnSp>
+        <p:nvCxnSpPr>
+          <p:cNvPr id="9" name="C1-E19 line 7" descr="sci-ppt:o007"/>
+          <p:cNvCxnSpPr/>
+          <p:nvPr/>
+        </p:nvCxnSpPr>
+        <p:spPr>
+          <a:xfrm>
+            <a:off x="2834639" y="1280160"/>
+            <a:ext cx="0" cy="1828800"/>
+          </a:xfrm>
+          <a:prstGeom prst="line">
+            <a:avLst/>
+          </a:prstGeom>
+          <a:ln w="7620">
+            <a:solidFill>
+              <a:srgbClr val="2E4756"/>
+            </a:solidFill>
+          </a:ln>
+          <a:effectLst/>
+        </p:spPr>
+      </p:cxnSp>
+      <p:sp>
+        <p:nvSpPr>
+          <p:cNvPr id="10" name="C1-E19 text 8" descr="sci-ppt:o008"/>
+          <p:cNvSpPr txBox="1"/>
+          <p:nvPr/>
+        </p:nvSpPr>
+        <p:spPr>
+          <a:xfrm>
+            <a:off x="2377439" y="3191256"/>
+            <a:ext cx="914400" cy="208407"/>
+          </a:xfrm>
+          <a:prstGeom prst="rect">
+            <a:avLst/>
+          </a:prstGeom>
+          <a:noFill/>
+          <a:effectLst/>
+        </p:spPr>
+        <p:txBody>
+          <a:bodyPr wrap="none" lIns="18288" rIns="18288" tIns="18288" bIns="18288" anchor="t">
+            <a:spAutoFit/>
+          </a:bodyPr>
+          <a:lstStyle/>
+          <a:p>
+            <a:pPr algn="ctr">
+              <a:spcAft>
+                <a:spcPts val="0"/>
+              </a:spcAft>
+            </a:pPr>
+            <a:r>
+              <a:rPr sz="1050" b="0" i="0">
+                <a:solidFill>
+                  <a:srgbClr val="B4C7D2"/>
+                </a:solidFill>
+                <a:latin typeface="Arial"/>
+              </a:rPr>
+              <a:t>1</a:t>
+            </a:r>
+          </a:p>
+        </p:txBody>
+      </p:sp>
+      <p:cxnSp>
+        <p:nvCxnSpPr>
+          <p:cNvPr id="11" name="C1-E19 line 9" descr="sci-ppt:o009"/>
+          <p:cNvCxnSpPr/>
+          <p:nvPr/>
+        </p:nvCxnSpPr>
+        <p:spPr>
+          <a:xfrm>
+            <a:off x="4754879" y="3108960"/>
+            <a:ext cx="0" cy="64008"/>
+          </a:xfrm>
+          <a:prstGeom prst="line">
+            <a:avLst/>
+          </a:prstGeom>
+          <a:ln w="12700">
+            <a:solidFill>
+              <a:srgbClr val="B4C7D2"/>
+            </a:solidFill>
+          </a:ln>
+          <a:effectLst/>
+        </p:spPr>
+      </p:cxnSp>
+      <p:cxnSp>
+        <p:nvCxnSpPr>
+          <p:cNvPr id="12" name="C1-E19 line 10" descr="sci-ppt:o010"/>
+          <p:cNvCxnSpPr/>
+          <p:nvPr/>
+        </p:nvCxnSpPr>
+        <p:spPr>
+          <a:xfrm>
+            <a:off x="4754879" y="1280160"/>
+            <a:ext cx="0" cy="1828800"/>
+          </a:xfrm>
+          <a:prstGeom prst="line">
+            <a:avLst/>
+          </a:prstGeom>
+          <a:ln w="7620">
+            <a:solidFill>
+              <a:srgbClr val="2E4756"/>
+            </a:solidFill>
+          </a:ln>
+          <a:effectLst/>
+        </p:spPr>
+      </p:cxnSp>
+      <p:sp>
+        <p:nvSpPr>
+          <p:cNvPr id="13" name="C1-E19 text 11" descr="sci-ppt:o011"/>
+          <p:cNvSpPr txBox="1"/>
+          <p:nvPr/>
+        </p:nvSpPr>
+        <p:spPr>
+          <a:xfrm>
+            <a:off x="4297679" y="3191256"/>
+            <a:ext cx="914400" cy="208407"/>
+          </a:xfrm>
+          <a:prstGeom prst="rect">
+            <a:avLst/>
+          </a:prstGeom>
+          <a:noFill/>
+          <a:effectLst/>
+        </p:spPr>
+        <p:txBody>
+          <a:bodyPr wrap="none" lIns="18288" rIns="18288" tIns="18288" bIns="18288" anchor="t">
+            <a:spAutoFit/>
+          </a:bodyPr>
+          <a:lstStyle/>
+          <a:p>
+            <a:pPr algn="ctr">
+              <a:spcAft>
+                <a:spcPts val="0"/>
+              </a:spcAft>
+            </a:pPr>
+            <a:r>
+              <a:rPr sz="1050" b="0" i="0">
+                <a:solidFill>
+                  <a:srgbClr val="B4C7D2"/>
+                </a:solidFill>
+                <a:latin typeface="Arial"/>
+              </a:rPr>
+              <a:t>2</a:t>
+            </a:r>
+          </a:p>
+        </p:txBody>
+      </p:sp>
+      <p:cxnSp>
+        <p:nvCxnSpPr>
+          <p:cNvPr id="14" name="C1-E19 line 12" descr="sci-ppt:o012"/>
+          <p:cNvCxnSpPr/>
+          <p:nvPr/>
+        </p:nvCxnSpPr>
+        <p:spPr>
+          <a:xfrm>
+            <a:off x="6675120" y="3108960"/>
+            <a:ext cx="0" cy="64008"/>
+          </a:xfrm>
+          <a:prstGeom prst="line">
+            <a:avLst/>
+          </a:prstGeom>
+          <a:ln w="12700">
+            <a:solidFill>
+              <a:srgbClr val="B4C7D2"/>
+            </a:solidFill>
+          </a:ln>
+          <a:effectLst/>
+        </p:spPr>
+      </p:cxnSp>
+      <p:cxnSp>
+        <p:nvCxnSpPr>
+          <p:cNvPr id="15" name="C1-E19 line 13" descr="sci-ppt:o013"/>
+          <p:cNvCxnSpPr/>
+          <p:nvPr/>
+        </p:nvCxnSpPr>
+        <p:spPr>
+          <a:xfrm>
+            <a:off x="6675120" y="1280160"/>
+            <a:ext cx="0" cy="1828800"/>
+          </a:xfrm>
+          <a:prstGeom prst="line">
+            <a:avLst/>
+          </a:prstGeom>
+          <a:ln w="7620">
+            <a:solidFill>
+              <a:srgbClr val="2E4756"/>
+            </a:solidFill>
+          </a:ln>
+          <a:effectLst/>
+        </p:spPr>
+      </p:cxnSp>
+      <p:sp>
+        <p:nvSpPr>
+          <p:cNvPr id="16" name="C1-E19 text 14" descr="sci-ppt:o014"/>
+          <p:cNvSpPr txBox="1"/>
+          <p:nvPr/>
+        </p:nvSpPr>
+        <p:spPr>
+          <a:xfrm>
+            <a:off x="6217920" y="3191256"/>
+            <a:ext cx="914400" cy="208407"/>
+          </a:xfrm>
+          <a:prstGeom prst="rect">
+            <a:avLst/>
+          </a:prstGeom>
+          <a:noFill/>
+          <a:effectLst/>
+        </p:spPr>
+        <p:txBody>
+          <a:bodyPr wrap="none" lIns="18288" rIns="18288" tIns="18288" bIns="18288" anchor="t">
+            <a:spAutoFit/>
+          </a:bodyPr>
+          <a:lstStyle/>
+          <a:p>
+            <a:pPr algn="ctr">
+              <a:spcAft>
+                <a:spcPts val="0"/>
+              </a:spcAft>
+            </a:pPr>
+            <a:r>
+              <a:rPr sz="1050" b="0" i="0">
+                <a:solidFill>
+                  <a:srgbClr val="B4C7D2"/>
+                </a:solidFill>
+                <a:latin typeface="Arial"/>
+              </a:rPr>
+              <a:t>3</a:t>
+            </a:r>
+          </a:p>
+        </p:txBody>
+      </p:sp>
+      <p:cxnSp>
+        <p:nvCxnSpPr>
+          <p:cNvPr id="17" name="C1-E19 line 15" descr="sci-ppt:o015"/>
+          <p:cNvCxnSpPr/>
+          <p:nvPr/>
+        </p:nvCxnSpPr>
+        <p:spPr>
+          <a:xfrm>
+            <a:off x="850392" y="3108960"/>
+            <a:ext cx="64008" cy="0"/>
+          </a:xfrm>
+          <a:prstGeom prst="line">
+            <a:avLst/>
+          </a:prstGeom>
+          <a:ln w="12700">
+            <a:solidFill>
+              <a:srgbClr val="B4C7D2"/>
+            </a:solidFill>
+          </a:ln>
+          <a:effectLst/>
+        </p:spPr>
+      </p:cxnSp>
+      <p:cxnSp>
+        <p:nvCxnSpPr>
+          <p:cNvPr id="18" name="C1-E19 line 16" descr="sci-ppt:o016"/>
+          <p:cNvCxnSpPr/>
+          <p:nvPr/>
+        </p:nvCxnSpPr>
+        <p:spPr>
+          <a:xfrm>
+            <a:off x="850392" y="2537460"/>
+            <a:ext cx="64008" cy="0"/>
+          </a:xfrm>
+          <a:prstGeom prst="line">
+            <a:avLst/>
+          </a:prstGeom>
+          <a:ln w="12700">
+            <a:solidFill>
+              <a:srgbClr val="B4C7D2"/>
+            </a:solidFill>
+          </a:ln>
+          <a:effectLst/>
+        </p:spPr>
+      </p:cxnSp>
+      <p:cxnSp>
+        <p:nvCxnSpPr>
+          <p:cNvPr id="19" name="C1-E19 line 17" descr="sci-ppt:o017"/>
+          <p:cNvCxnSpPr/>
+          <p:nvPr/>
+        </p:nvCxnSpPr>
+        <p:spPr>
+          <a:xfrm>
+            <a:off x="914400" y="2537460"/>
+            <a:ext cx="5760720" cy="0"/>
+          </a:xfrm>
+          <a:prstGeom prst="line">
+            <a:avLst/>
+          </a:prstGeom>
+          <a:ln w="7620">
+            <a:solidFill>
+              <a:srgbClr val="2E4756"/>
+            </a:solidFill>
+          </a:ln>
+          <a:effectLst/>
+        </p:spPr>
+      </p:cxnSp>
+      <p:sp>
+        <p:nvSpPr>
+          <p:cNvPr id="20" name="C1-E19 text 18" descr="sci-ppt:o018"/>
+          <p:cNvSpPr txBox="1"/>
+          <p:nvPr/>
+        </p:nvSpPr>
+        <p:spPr>
+          <a:xfrm>
+            <a:off x="45720" y="2455164"/>
+            <a:ext cx="777240" cy="208407"/>
+          </a:xfrm>
+          <a:prstGeom prst="rect">
+            <a:avLst/>
+          </a:prstGeom>
+          <a:noFill/>
+          <a:effectLst/>
+        </p:spPr>
+        <p:txBody>
+          <a:bodyPr wrap="none" lIns="18288" rIns="18288" tIns="18288" bIns="18288" anchor="t">
+            <a:spAutoFit/>
+          </a:bodyPr>
+          <a:lstStyle/>
+          <a:p>
+            <a:pPr algn="r">
+              <a:spcAft>
+                <a:spcPts val="0"/>
+              </a:spcAft>
+            </a:pPr>
+            <a:r>
+              <a:rPr sz="1050" b="0" i="0">
+                <a:solidFill>
+                  <a:srgbClr val="B4C7D2"/>
+                </a:solidFill>
+                <a:latin typeface="Arial"/>
+              </a:rPr>
+              <a:t>10</a:t>
+            </a:r>
+          </a:p>
+        </p:txBody>
+      </p:sp>
+      <p:cxnSp>
+        <p:nvCxnSpPr>
+          <p:cNvPr id="21" name="C1-E19 line 19" descr="sci-ppt:o019"/>
+          <p:cNvCxnSpPr/>
+          <p:nvPr/>
+        </p:nvCxnSpPr>
+        <p:spPr>
+          <a:xfrm>
+            <a:off x="850392" y="1965960"/>
+            <a:ext cx="64008" cy="0"/>
+          </a:xfrm>
+          <a:prstGeom prst="line">
+            <a:avLst/>
+          </a:prstGeom>
+          <a:ln w="12700">
+            <a:solidFill>
+              <a:srgbClr val="B4C7D2"/>
+            </a:solidFill>
+          </a:ln>
+          <a:effectLst/>
+        </p:spPr>
+      </p:cxnSp>
+      <p:cxnSp>
+        <p:nvCxnSpPr>
+          <p:cNvPr id="22" name="C1-E19 line 20" descr="sci-ppt:o020"/>
+          <p:cNvCxnSpPr/>
+          <p:nvPr/>
+        </p:nvCxnSpPr>
+        <p:spPr>
+          <a:xfrm>
+            <a:off x="914400" y="1965960"/>
+            <a:ext cx="5760720" cy="0"/>
+          </a:xfrm>
+          <a:prstGeom prst="line">
+            <a:avLst/>
+          </a:prstGeom>
+          <a:ln w="7620">
+            <a:solidFill>
+              <a:srgbClr val="2E4756"/>
+            </a:solidFill>
+          </a:ln>
+          <a:effectLst/>
+        </p:spPr>
+      </p:cxnSp>
+      <p:sp>
+        <p:nvSpPr>
+          <p:cNvPr id="23" name="C1-E19 text 21" descr="sci-ppt:o021"/>
+          <p:cNvSpPr txBox="1"/>
+          <p:nvPr/>
+        </p:nvSpPr>
+        <p:spPr>
+          <a:xfrm>
+            <a:off x="45720" y="1883664"/>
+            <a:ext cx="777240" cy="208407"/>
+          </a:xfrm>
+          <a:prstGeom prst="rect">
+            <a:avLst/>
+          </a:prstGeom>
+          <a:noFill/>
+          <a:effectLst/>
+        </p:spPr>
+        <p:txBody>
+          <a:bodyPr wrap="none" lIns="18288" rIns="18288" tIns="18288" bIns="18288" anchor="t">
+            <a:spAutoFit/>
+          </a:bodyPr>
+          <a:lstStyle/>
+          <a:p>
+            <a:pPr algn="r">
+              <a:spcAft>
+                <a:spcPts val="0"/>
+              </a:spcAft>
+            </a:pPr>
+            <a:r>
+              <a:rPr sz="1050" b="0" i="0">
+                <a:solidFill>
+                  <a:srgbClr val="B4C7D2"/>
+                </a:solidFill>
+                <a:latin typeface="Arial"/>
+              </a:rPr>
+              <a:t>20</a:t>
+            </a:r>
+          </a:p>
+        </p:txBody>
+      </p:sp>
+      <p:cxnSp>
+        <p:nvCxnSpPr>
+          <p:cNvPr id="24" name="C1-E19 line 22" descr="sci-ppt:o022"/>
+          <p:cNvCxnSpPr/>
+          <p:nvPr/>
+        </p:nvCxnSpPr>
+        <p:spPr>
+          <a:xfrm>
+            <a:off x="850392" y="1394460"/>
+            <a:ext cx="64008" cy="0"/>
+          </a:xfrm>
+          <a:prstGeom prst="line">
+            <a:avLst/>
+          </a:prstGeom>
+          <a:ln w="12700">
+            <a:solidFill>
+              <a:srgbClr val="B4C7D2"/>
+            </a:solidFill>
+          </a:ln>
+          <a:effectLst/>
+        </p:spPr>
+      </p:cxnSp>
+      <p:cxnSp>
+        <p:nvCxnSpPr>
+          <p:cNvPr id="25" name="C1-E19 line 23" descr="sci-ppt:o023"/>
+          <p:cNvCxnSpPr/>
+          <p:nvPr/>
+        </p:nvCxnSpPr>
+        <p:spPr>
+          <a:xfrm>
+            <a:off x="914400" y="1394460"/>
+            <a:ext cx="5760720" cy="0"/>
+          </a:xfrm>
+          <a:prstGeom prst="line">
+            <a:avLst/>
+          </a:prstGeom>
+          <a:ln w="7620">
+            <a:solidFill>
+              <a:srgbClr val="2E4756"/>
+            </a:solidFill>
+          </a:ln>
+          <a:effectLst/>
+        </p:spPr>
+      </p:cxnSp>
+      <p:sp>
+        <p:nvSpPr>
+          <p:cNvPr id="26" name="C1-E19 text 24" descr="sci-ppt:o024"/>
+          <p:cNvSpPr txBox="1"/>
+          <p:nvPr/>
+        </p:nvSpPr>
+        <p:spPr>
+          <a:xfrm>
+            <a:off x="45720" y="1312163"/>
+            <a:ext cx="777240" cy="208407"/>
+          </a:xfrm>
+          <a:prstGeom prst="rect">
+            <a:avLst/>
+          </a:prstGeom>
+          <a:noFill/>
+          <a:effectLst/>
+        </p:spPr>
+        <p:txBody>
+          <a:bodyPr wrap="none" lIns="18288" rIns="18288" tIns="18288" bIns="18288" anchor="t">
+            <a:spAutoFit/>
+          </a:bodyPr>
+          <a:lstStyle/>
+          <a:p>
+            <a:pPr algn="r">
+              <a:spcAft>
+                <a:spcPts val="0"/>
+              </a:spcAft>
+            </a:pPr>
+            <a:r>
+              <a:rPr sz="1050" b="0" i="0">
+                <a:solidFill>
+                  <a:srgbClr val="B4C7D2"/>
+                </a:solidFill>
+                <a:latin typeface="Arial"/>
+              </a:rPr>
+              <a:t>30</a:t>
+            </a:r>
+          </a:p>
+        </p:txBody>
+      </p:sp>
+      <p:sp>
+        <p:nvSpPr>
+          <p:cNvPr id="27" name="C1-E19 text 25" descr="sci-ppt:o025"/>
+          <p:cNvSpPr txBox="1"/>
+          <p:nvPr/>
+        </p:nvSpPr>
+        <p:spPr>
+          <a:xfrm>
+            <a:off x="365760" y="932688"/>
+            <a:ext cx="5760720" cy="231648"/>
+          </a:xfrm>
+          <a:prstGeom prst="rect">
+            <a:avLst/>
+          </a:prstGeom>
+          <a:noFill/>
+          <a:effectLst/>
+        </p:spPr>
+        <p:txBody>
+          <a:bodyPr wrap="none" lIns="18288" rIns="18288" tIns="18288" bIns="18288" anchor="t">
             <a:spAutoFit/>
           </a:bodyPr>
           <a:lstStyle/>
@@ -3221,27 +3819,573 @@
               </a:spcAft>
             </a:pPr>
             <a:r>
-              <a:rPr sz="2016" b="0" i="0">
+              <a:rPr sz="1200" b="0" i="0">
                 <a:solidFill>
                   <a:srgbClr val="E7F0F3"/>
                 </a:solidFill>
                 <a:latin typeface="Arial"/>
               </a:rPr>
-              <a:t>R(t)</a:t>
-            </a:r>
-          </a:p>
-        </p:txBody>
-      </p:sp>
-      <p:sp>
-        <p:nvSpPr>
-          <p:cNvPr id="6" name="text5" descr="sci-ppt:C1-E19-005"/>
+              <a:t>R  (µm)</a:t>
+            </a:r>
+          </a:p>
+        </p:txBody>
+      </p:sp>
+      <p:sp>
+        <p:nvSpPr>
+          <p:cNvPr id="28" name="C1-E19 polygon 26" descr="sci-ppt:o026"/>
+          <p:cNvSpPr/>
+          <p:nvPr/>
+        </p:nvSpPr>
+        <p:spPr>
+          <a:xfrm>
+            <a:off x="914400" y="1394460"/>
+            <a:ext cx="5269223" cy="1714157"/>
+          </a:xfrm>
+          <a:custGeom>
+            <a:avLst/>
+            <a:gdLst/>
+            <a:ahLst/>
+            <a:cxnLst/>
+            <a:rect l="l" t="t" r="r" b="b"/>
+            <a:pathLst>
+              <a:path w="5269223" h="1714157">
+                <a:moveTo>
+                  <a:pt x="0" y="0"/>
+                </a:moveTo>
+                <a:lnTo>
+                  <a:pt x="54396" y="76"/>
+                </a:lnTo>
+                <a:lnTo>
+                  <a:pt x="108789" y="305"/>
+                </a:lnTo>
+                <a:lnTo>
+                  <a:pt x="163171" y="687"/>
+                </a:lnTo>
+                <a:lnTo>
+                  <a:pt x="217539" y="1223"/>
+                </a:lnTo>
+                <a:lnTo>
+                  <a:pt x="271887" y="1910"/>
+                </a:lnTo>
+                <a:lnTo>
+                  <a:pt x="326212" y="2751"/>
+                </a:lnTo>
+                <a:lnTo>
+                  <a:pt x="380507" y="3745"/>
+                </a:lnTo>
+                <a:lnTo>
+                  <a:pt x="434768" y="4892"/>
+                </a:lnTo>
+                <a:lnTo>
+                  <a:pt x="488990" y="6191"/>
+                </a:lnTo>
+                <a:lnTo>
+                  <a:pt x="543169" y="7643"/>
+                </a:lnTo>
+                <a:lnTo>
+                  <a:pt x="597299" y="9249"/>
+                </a:lnTo>
+                <a:lnTo>
+                  <a:pt x="651375" y="11007"/>
+                </a:lnTo>
+                <a:lnTo>
+                  <a:pt x="705393" y="12918"/>
+                </a:lnTo>
+                <a:lnTo>
+                  <a:pt x="759348" y="14982"/>
+                </a:lnTo>
+                <a:lnTo>
+                  <a:pt x="813235" y="17198"/>
+                </a:lnTo>
+                <a:lnTo>
+                  <a:pt x="867049" y="19568"/>
+                </a:lnTo>
+                <a:lnTo>
+                  <a:pt x="920785" y="22090"/>
+                </a:lnTo>
+                <a:lnTo>
+                  <a:pt x="974438" y="24766"/>
+                </a:lnTo>
+                <a:lnTo>
+                  <a:pt x="1028004" y="27594"/>
+                </a:lnTo>
+                <a:lnTo>
+                  <a:pt x="1081476" y="30575"/>
+                </a:lnTo>
+                <a:lnTo>
+                  <a:pt x="1134852" y="33709"/>
+                </a:lnTo>
+                <a:lnTo>
+                  <a:pt x="1188124" y="36996"/>
+                </a:lnTo>
+                <a:lnTo>
+                  <a:pt x="1241289" y="40436"/>
+                </a:lnTo>
+                <a:lnTo>
+                  <a:pt x="1294342" y="44029"/>
+                </a:lnTo>
+                <a:lnTo>
+                  <a:pt x="1347278" y="47774"/>
+                </a:lnTo>
+                <a:lnTo>
+                  <a:pt x="1400090" y="51672"/>
+                </a:lnTo>
+                <a:lnTo>
+                  <a:pt x="1452776" y="55724"/>
+                </a:lnTo>
+                <a:lnTo>
+                  <a:pt x="1505329" y="59928"/>
+                </a:lnTo>
+                <a:lnTo>
+                  <a:pt x="1557745" y="64285"/>
+                </a:lnTo>
+                <a:lnTo>
+                  <a:pt x="1610018" y="68795"/>
+                </a:lnTo>
+                <a:lnTo>
+                  <a:pt x="1662144" y="73458"/>
+                </a:lnTo>
+                <a:lnTo>
+                  <a:pt x="1714118" y="78273"/>
+                </a:lnTo>
+                <a:lnTo>
+                  <a:pt x="1765933" y="83242"/>
+                </a:lnTo>
+                <a:lnTo>
+                  <a:pt x="1817586" y="88363"/>
+                </a:lnTo>
+                <a:lnTo>
+                  <a:pt x="1869072" y="93638"/>
+                </a:lnTo>
+                <a:lnTo>
+                  <a:pt x="1920384" y="99065"/>
+                </a:lnTo>
+                <a:lnTo>
+                  <a:pt x="1971519" y="104645"/>
+                </a:lnTo>
+                <a:lnTo>
+                  <a:pt x="2022470" y="110378"/>
+                </a:lnTo>
+                <a:lnTo>
+                  <a:pt x="2073234" y="116264"/>
+                </a:lnTo>
+                <a:lnTo>
+                  <a:pt x="2123803" y="122302"/>
+                </a:lnTo>
+                <a:lnTo>
+                  <a:pt x="2174174" y="128494"/>
+                </a:lnTo>
+                <a:lnTo>
+                  <a:pt x="2224342" y="134839"/>
+                </a:lnTo>
+                <a:lnTo>
+                  <a:pt x="2274300" y="141336"/>
+                </a:lnTo>
+                <a:lnTo>
+                  <a:pt x="2324044" y="147986"/>
+                </a:lnTo>
+                <a:lnTo>
+                  <a:pt x="2373568" y="154789"/>
+                </a:lnTo>
+                <a:lnTo>
+                  <a:pt x="2422868" y="161745"/>
+                </a:lnTo>
+                <a:lnTo>
+                  <a:pt x="2471937" y="168854"/>
+                </a:lnTo>
+                <a:lnTo>
+                  <a:pt x="2520771" y="176116"/>
+                </a:lnTo>
+                <a:lnTo>
+                  <a:pt x="2569365" y="183530"/>
+                </a:lnTo>
+                <a:lnTo>
+                  <a:pt x="2617712" y="191098"/>
+                </a:lnTo>
+                <a:lnTo>
+                  <a:pt x="2665808" y="198818"/>
+                </a:lnTo>
+                <a:lnTo>
+                  <a:pt x="2713646" y="206691"/>
+                </a:lnTo>
+                <a:lnTo>
+                  <a:pt x="2761223" y="214718"/>
+                </a:lnTo>
+                <a:lnTo>
+                  <a:pt x="2808532" y="222897"/>
+                </a:lnTo>
+                <a:lnTo>
+                  <a:pt x="2855568" y="231229"/>
+                </a:lnTo>
+                <a:lnTo>
+                  <a:pt x="2902325" y="239713"/>
+                </a:lnTo>
+                <a:lnTo>
+                  <a:pt x="2948798" y="248351"/>
+                </a:lnTo>
+                <a:lnTo>
+                  <a:pt x="2994981" y="257141"/>
+                </a:lnTo>
+                <a:lnTo>
+                  <a:pt x="3040869" y="266085"/>
+                </a:lnTo>
+                <a:lnTo>
+                  <a:pt x="3086456" y="275181"/>
+                </a:lnTo>
+                <a:lnTo>
+                  <a:pt x="3131737" y="284430"/>
+                </a:lnTo>
+                <a:lnTo>
+                  <a:pt x="3176706" y="293832"/>
+                </a:lnTo>
+                <a:lnTo>
+                  <a:pt x="3221357" y="303387"/>
+                </a:lnTo>
+                <a:lnTo>
+                  <a:pt x="3265685" y="313095"/>
+                </a:lnTo>
+                <a:lnTo>
+                  <a:pt x="3309685" y="322956"/>
+                </a:lnTo>
+                <a:lnTo>
+                  <a:pt x="3353349" y="332969"/>
+                </a:lnTo>
+                <a:lnTo>
+                  <a:pt x="3396673" y="343136"/>
+                </a:lnTo>
+                <a:lnTo>
+                  <a:pt x="3439651" y="353455"/>
+                </a:lnTo>
+                <a:lnTo>
+                  <a:pt x="3482277" y="363927"/>
+                </a:lnTo>
+                <a:lnTo>
+                  <a:pt x="3524546" y="374552"/>
+                </a:lnTo>
+                <a:lnTo>
+                  <a:pt x="3566451" y="385330"/>
+                </a:lnTo>
+                <a:lnTo>
+                  <a:pt x="3607987" y="396261"/>
+                </a:lnTo>
+                <a:lnTo>
+                  <a:pt x="3649147" y="407345"/>
+                </a:lnTo>
+                <a:lnTo>
+                  <a:pt x="3689927" y="418581"/>
+                </a:lnTo>
+                <a:lnTo>
+                  <a:pt x="3730319" y="429971"/>
+                </a:lnTo>
+                <a:lnTo>
+                  <a:pt x="3770319" y="441513"/>
+                </a:lnTo>
+                <a:lnTo>
+                  <a:pt x="3809920" y="453208"/>
+                </a:lnTo>
+                <a:lnTo>
+                  <a:pt x="3849116" y="465056"/>
+                </a:lnTo>
+                <a:lnTo>
+                  <a:pt x="3887901" y="477057"/>
+                </a:lnTo>
+                <a:lnTo>
+                  <a:pt x="3926270" y="489211"/>
+                </a:lnTo>
+                <a:lnTo>
+                  <a:pt x="3964216" y="501518"/>
+                </a:lnTo>
+                <a:lnTo>
+                  <a:pt x="4001733" y="513978"/>
+                </a:lnTo>
+                <a:lnTo>
+                  <a:pt x="4038815" y="526590"/>
+                </a:lnTo>
+                <a:lnTo>
+                  <a:pt x="4075457" y="539356"/>
+                </a:lnTo>
+                <a:lnTo>
+                  <a:pt x="4111651" y="552274"/>
+                </a:lnTo>
+                <a:lnTo>
+                  <a:pt x="4147393" y="565345"/>
+                </a:lnTo>
+                <a:lnTo>
+                  <a:pt x="4182675" y="578569"/>
+                </a:lnTo>
+                <a:lnTo>
+                  <a:pt x="4217492" y="591946"/>
+                </a:lnTo>
+                <a:lnTo>
+                  <a:pt x="4251838" y="605476"/>
+                </a:lnTo>
+                <a:lnTo>
+                  <a:pt x="4285707" y="619158"/>
+                </a:lnTo>
+                <a:lnTo>
+                  <a:pt x="4319092" y="632994"/>
+                </a:lnTo>
+                <a:lnTo>
+                  <a:pt x="4351987" y="646982"/>
+                </a:lnTo>
+                <a:lnTo>
+                  <a:pt x="4384387" y="661123"/>
+                </a:lnTo>
+                <a:lnTo>
+                  <a:pt x="4416285" y="675418"/>
+                </a:lnTo>
+                <a:lnTo>
+                  <a:pt x="4447675" y="689865"/>
+                </a:lnTo>
+                <a:lnTo>
+                  <a:pt x="4478551" y="704465"/>
+                </a:lnTo>
+                <a:lnTo>
+                  <a:pt x="4508908" y="719217"/>
+                </a:lnTo>
+                <a:lnTo>
+                  <a:pt x="4538738" y="734123"/>
+                </a:lnTo>
+                <a:lnTo>
+                  <a:pt x="4568037" y="749182"/>
+                </a:lnTo>
+                <a:lnTo>
+                  <a:pt x="4596798" y="764393"/>
+                </a:lnTo>
+                <a:lnTo>
+                  <a:pt x="4625015" y="779757"/>
+                </a:lnTo>
+                <a:lnTo>
+                  <a:pt x="4652682" y="795274"/>
+                </a:lnTo>
+                <a:lnTo>
+                  <a:pt x="4679794" y="810945"/>
+                </a:lnTo>
+                <a:lnTo>
+                  <a:pt x="4706345" y="826767"/>
+                </a:lnTo>
+                <a:lnTo>
+                  <a:pt x="4732329" y="842743"/>
+                </a:lnTo>
+                <a:lnTo>
+                  <a:pt x="4757741" y="858872"/>
+                </a:lnTo>
+                <a:lnTo>
+                  <a:pt x="4782574" y="875154"/>
+                </a:lnTo>
+                <a:lnTo>
+                  <a:pt x="4806824" y="891588"/>
+                </a:lnTo>
+                <a:lnTo>
+                  <a:pt x="4830485" y="908175"/>
+                </a:lnTo>
+                <a:lnTo>
+                  <a:pt x="4853553" y="924916"/>
+                </a:lnTo>
+                <a:lnTo>
+                  <a:pt x="4876021" y="941809"/>
+                </a:lnTo>
+                <a:lnTo>
+                  <a:pt x="4897885" y="958855"/>
+                </a:lnTo>
+                <a:lnTo>
+                  <a:pt x="4919140" y="976054"/>
+                </a:lnTo>
+                <a:lnTo>
+                  <a:pt x="4939781" y="993405"/>
+                </a:lnTo>
+                <a:lnTo>
+                  <a:pt x="4959805" y="1010910"/>
+                </a:lnTo>
+                <a:lnTo>
+                  <a:pt x="4979206" y="1028567"/>
+                </a:lnTo>
+                <a:lnTo>
+                  <a:pt x="4997981" y="1046378"/>
+                </a:lnTo>
+                <a:lnTo>
+                  <a:pt x="5016125" y="1064341"/>
+                </a:lnTo>
+                <a:lnTo>
+                  <a:pt x="5033636" y="1082457"/>
+                </a:lnTo>
+                <a:lnTo>
+                  <a:pt x="5050510" y="1100726"/>
+                </a:lnTo>
+                <a:lnTo>
+                  <a:pt x="5066745" y="1119148"/>
+                </a:lnTo>
+                <a:lnTo>
+                  <a:pt x="5082336" y="1137723"/>
+                </a:lnTo>
+                <a:lnTo>
+                  <a:pt x="5097283" y="1156450"/>
+                </a:lnTo>
+                <a:lnTo>
+                  <a:pt x="5111583" y="1175331"/>
+                </a:lnTo>
+                <a:lnTo>
+                  <a:pt x="5125235" y="1194364"/>
+                </a:lnTo>
+                <a:lnTo>
+                  <a:pt x="5138239" y="1213551"/>
+                </a:lnTo>
+                <a:lnTo>
+                  <a:pt x="5150592" y="1232890"/>
+                </a:lnTo>
+                <a:lnTo>
+                  <a:pt x="5162297" y="1252382"/>
+                </a:lnTo>
+                <a:lnTo>
+                  <a:pt x="5173354" y="1272027"/>
+                </a:lnTo>
+                <a:lnTo>
+                  <a:pt x="5183763" y="1291824"/>
+                </a:lnTo>
+                <a:lnTo>
+                  <a:pt x="5193528" y="1311775"/>
+                </a:lnTo>
+                <a:lnTo>
+                  <a:pt x="5202652" y="1331879"/>
+                </a:lnTo>
+                <a:lnTo>
+                  <a:pt x="5211138" y="1352135"/>
+                </a:lnTo>
+                <a:lnTo>
+                  <a:pt x="5218991" y="1372544"/>
+                </a:lnTo>
+                <a:lnTo>
+                  <a:pt x="5226218" y="1393107"/>
+                </a:lnTo>
+                <a:lnTo>
+                  <a:pt x="5232826" y="1413822"/>
+                </a:lnTo>
+                <a:lnTo>
+                  <a:pt x="5238823" y="1434690"/>
+                </a:lnTo>
+                <a:lnTo>
+                  <a:pt x="5244219" y="1455710"/>
+                </a:lnTo>
+                <a:lnTo>
+                  <a:pt x="5249027" y="1476884"/>
+                </a:lnTo>
+                <a:lnTo>
+                  <a:pt x="5253260" y="1498211"/>
+                </a:lnTo>
+                <a:lnTo>
+                  <a:pt x="5256934" y="1519690"/>
+                </a:lnTo>
+                <a:lnTo>
+                  <a:pt x="5260067" y="1541322"/>
+                </a:lnTo>
+                <a:lnTo>
+                  <a:pt x="5262680" y="1563108"/>
+                </a:lnTo>
+                <a:lnTo>
+                  <a:pt x="5264799" y="1585046"/>
+                </a:lnTo>
+                <a:lnTo>
+                  <a:pt x="5266451" y="1607137"/>
+                </a:lnTo>
+                <a:lnTo>
+                  <a:pt x="5267671" y="1629381"/>
+                </a:lnTo>
+                <a:lnTo>
+                  <a:pt x="5268498" y="1651777"/>
+                </a:lnTo>
+                <a:lnTo>
+                  <a:pt x="5268984" y="1674327"/>
+                </a:lnTo>
+                <a:lnTo>
+                  <a:pt x="5269192" y="1697029"/>
+                </a:lnTo>
+                <a:lnTo>
+                  <a:pt x="5269223" y="1714157"/>
+                </a:lnTo>
+              </a:path>
+            </a:pathLst>
+          </a:custGeom>
+          <a:noFill/>
+          <a:ln w="38100">
+            <a:solidFill>
+              <a:srgbClr val="8EDBD4"/>
+            </a:solidFill>
+          </a:ln>
+          <a:effectLst/>
+        </p:spPr>
+        <p:txBody>
+          <a:bodyPr rtlCol="0" anchor="ctr"/>
+          <a:lstStyle/>
+          <a:p>
+            <a:pPr algn="ctr"/>
+          </a:p>
+        </p:txBody>
+      </p:sp>
+      <p:sp>
+        <p:nvSpPr>
+          <p:cNvPr id="29" name="C1-E19 ellipse 27" descr="sci-ppt:o027"/>
+          <p:cNvSpPr/>
+          <p:nvPr/>
+        </p:nvSpPr>
+        <p:spPr>
+          <a:xfrm>
+            <a:off x="5598989" y="2178558"/>
+            <a:ext cx="146304" cy="146304"/>
+          </a:xfrm>
+          <a:prstGeom prst="ellipse">
+            <a:avLst/>
+          </a:prstGeom>
+          <a:solidFill>
+            <a:srgbClr val="F2B880"/>
+          </a:solidFill>
+          <a:ln w="12700">
+            <a:solidFill>
+              <a:srgbClr val="F2B880"/>
+            </a:solidFill>
+          </a:ln>
+          <a:effectLst/>
+        </p:spPr>
+        <p:txBody>
+          <a:bodyPr rtlCol="0" anchor="ctr"/>
+          <a:lstStyle/>
+          <a:p>
+            <a:pPr algn="ctr"/>
+          </a:p>
+        </p:txBody>
+      </p:sp>
+      <p:cxnSp>
+        <p:nvCxnSpPr>
+          <p:cNvPr id="30" name="C1-E19 line 28" descr="sci-ppt:o028"/>
+          <p:cNvCxnSpPr/>
+          <p:nvPr/>
+        </p:nvCxnSpPr>
+        <p:spPr>
+          <a:xfrm>
+            <a:off x="6183623" y="1280160"/>
+            <a:ext cx="0" cy="1828800"/>
+          </a:xfrm>
+          <a:prstGeom prst="line">
+            <a:avLst/>
+          </a:prstGeom>
+          <a:ln w="16510">
+            <a:solidFill>
+              <a:srgbClr val="F28BA0"/>
+            </a:solidFill>
+            <a:prstDash val="dash"/>
+          </a:ln>
+          <a:effectLst/>
+        </p:spPr>
+      </p:cxnSp>
+      <p:sp>
+        <p:nvSpPr>
+          <p:cNvPr id="31" name="C1-E19 text 29" descr="sci-ppt:o029"/>
           <p:cNvSpPr txBox="1"/>
           <p:nvPr/>
         </p:nvSpPr>
         <p:spPr>
           <a:xfrm>
-            <a:off x="2682240" y="2804160"/>
-            <a:ext cx="2194560" cy="377952"/>
+            <a:off x="3203261" y="2205990"/>
+            <a:ext cx="2377440" cy="223900"/>
           </a:xfrm>
           <a:prstGeom prst="rect">
             <a:avLst/>
@@ -3250,7 +4394,7 @@
           <a:effectLst/>
         </p:spPr>
         <p:txBody>
-          <a:bodyPr wrap="none" lIns="27432" rIns="27432" tIns="18288" bIns="18288" anchor="ctr">
+          <a:bodyPr wrap="none" lIns="18288" rIns="18288" tIns="18288" bIns="18288" anchor="t">
             <a:spAutoFit/>
           </a:bodyPr>
           <a:lstStyle/>
@@ -3261,27 +4405,761 @@
               </a:spcAft>
             </a:pPr>
             <a:r>
-              <a:rPr sz="1920" b="0" i="0">
+              <a:rPr sz="1150" b="0" i="0">
+                <a:solidFill>
+                  <a:srgbClr val="F2B880"/>
+                </a:solidFill>
+                <a:latin typeface="Arial"/>
+              </a:rPr>
+              <a:t>R = Rₘₐₓ/2 at 2.48 µs</a:t>
+            </a:r>
+          </a:p>
+        </p:txBody>
+      </p:sp>
+      <p:sp>
+        <p:nvSpPr>
+          <p:cNvPr id="32" name="C1-E19 text 30" descr="sci-ppt:o030"/>
+          <p:cNvSpPr txBox="1"/>
+          <p:nvPr/>
+        </p:nvSpPr>
+        <p:spPr>
+          <a:xfrm>
+            <a:off x="4446263" y="1451610"/>
+            <a:ext cx="1645920" cy="231648"/>
+          </a:xfrm>
+          <a:prstGeom prst="rect">
+            <a:avLst/>
+          </a:prstGeom>
+          <a:noFill/>
+          <a:effectLst/>
+        </p:spPr>
+        <p:txBody>
+          <a:bodyPr wrap="none" lIns="18288" rIns="18288" tIns="18288" bIns="18288" anchor="t">
+            <a:spAutoFit/>
+          </a:bodyPr>
+          <a:lstStyle/>
+          <a:p>
+            <a:pPr algn="l">
+              <a:spcAft>
+                <a:spcPts val="0"/>
+              </a:spcAft>
+            </a:pPr>
+            <a:r>
+              <a:rPr sz="1200" b="0" i="0">
+                <a:solidFill>
+                  <a:srgbClr val="F28BA0"/>
+                </a:solidFill>
+                <a:latin typeface="Arial"/>
+              </a:rPr>
+              <a:t>t_c = 2.744 µs</a:t>
+            </a:r>
+          </a:p>
+        </p:txBody>
+      </p:sp>
+      <p:cxnSp>
+        <p:nvCxnSpPr>
+          <p:cNvPr id="33" name="C1-E19 line 31" descr="sci-ppt:o031"/>
+          <p:cNvCxnSpPr/>
+          <p:nvPr/>
+        </p:nvCxnSpPr>
+        <p:spPr>
+          <a:xfrm>
+            <a:off x="914400" y="5577840"/>
+            <a:ext cx="5760720" cy="0"/>
+          </a:xfrm>
+          <a:prstGeom prst="line">
+            <a:avLst/>
+          </a:prstGeom>
+          <a:ln w="19050">
+            <a:solidFill>
+              <a:srgbClr val="B4C7D2"/>
+            </a:solidFill>
+          </a:ln>
+          <a:effectLst/>
+        </p:spPr>
+      </p:cxnSp>
+      <p:cxnSp>
+        <p:nvCxnSpPr>
+          <p:cNvPr id="34" name="C1-E19 line 32" descr="sci-ppt:o032"/>
+          <p:cNvCxnSpPr/>
+          <p:nvPr/>
+        </p:nvCxnSpPr>
+        <p:spPr>
+          <a:xfrm>
+            <a:off x="914400" y="3840480"/>
+            <a:ext cx="0" cy="1737360"/>
+          </a:xfrm>
+          <a:prstGeom prst="line">
+            <a:avLst/>
+          </a:prstGeom>
+          <a:ln w="19050">
+            <a:solidFill>
+              <a:srgbClr val="B4C7D2"/>
+            </a:solidFill>
+          </a:ln>
+          <a:effectLst/>
+        </p:spPr>
+      </p:cxnSp>
+      <p:cxnSp>
+        <p:nvCxnSpPr>
+          <p:cNvPr id="35" name="C1-E19 line 33" descr="sci-ppt:o033"/>
+          <p:cNvCxnSpPr/>
+          <p:nvPr/>
+        </p:nvCxnSpPr>
+        <p:spPr>
+          <a:xfrm>
+            <a:off x="914400" y="5577840"/>
+            <a:ext cx="0" cy="64008"/>
+          </a:xfrm>
+          <a:prstGeom prst="line">
+            <a:avLst/>
+          </a:prstGeom>
+          <a:ln w="12700">
+            <a:solidFill>
+              <a:srgbClr val="B4C7D2"/>
+            </a:solidFill>
+          </a:ln>
+          <a:effectLst/>
+        </p:spPr>
+      </p:cxnSp>
+      <p:cxnSp>
+        <p:nvCxnSpPr>
+          <p:cNvPr id="36" name="C1-E19 line 34" descr="sci-ppt:o034"/>
+          <p:cNvCxnSpPr/>
+          <p:nvPr/>
+        </p:nvCxnSpPr>
+        <p:spPr>
+          <a:xfrm>
+            <a:off x="914400" y="3840480"/>
+            <a:ext cx="0" cy="1737360"/>
+          </a:xfrm>
+          <a:prstGeom prst="line">
+            <a:avLst/>
+          </a:prstGeom>
+          <a:ln w="7620">
+            <a:solidFill>
+              <a:srgbClr val="2E4756"/>
+            </a:solidFill>
+          </a:ln>
+          <a:effectLst/>
+        </p:spPr>
+      </p:cxnSp>
+      <p:sp>
+        <p:nvSpPr>
+          <p:cNvPr id="37" name="C1-E19 text 35" descr="sci-ppt:o035"/>
+          <p:cNvSpPr txBox="1"/>
+          <p:nvPr/>
+        </p:nvSpPr>
+        <p:spPr>
+          <a:xfrm>
+            <a:off x="457200" y="5660136"/>
+            <a:ext cx="914400" cy="208407"/>
+          </a:xfrm>
+          <a:prstGeom prst="rect">
+            <a:avLst/>
+          </a:prstGeom>
+          <a:noFill/>
+          <a:effectLst/>
+        </p:spPr>
+        <p:txBody>
+          <a:bodyPr wrap="none" lIns="18288" rIns="18288" tIns="18288" bIns="18288" anchor="t">
+            <a:spAutoFit/>
+          </a:bodyPr>
+          <a:lstStyle/>
+          <a:p>
+            <a:pPr algn="ctr">
+              <a:spcAft>
+                <a:spcPts val="0"/>
+              </a:spcAft>
+            </a:pPr>
+            <a:r>
+              <a:rPr sz="1050" b="0" i="0">
+                <a:solidFill>
+                  <a:srgbClr val="B4C7D2"/>
+                </a:solidFill>
+                <a:latin typeface="Arial"/>
+              </a:rPr>
+              <a:t>0</a:t>
+            </a:r>
+          </a:p>
+        </p:txBody>
+      </p:sp>
+      <p:cxnSp>
+        <p:nvCxnSpPr>
+          <p:cNvPr id="38" name="C1-E19 line 36" descr="sci-ppt:o036"/>
+          <p:cNvCxnSpPr/>
+          <p:nvPr/>
+        </p:nvCxnSpPr>
+        <p:spPr>
+          <a:xfrm>
+            <a:off x="2834639" y="5577840"/>
+            <a:ext cx="0" cy="64008"/>
+          </a:xfrm>
+          <a:prstGeom prst="line">
+            <a:avLst/>
+          </a:prstGeom>
+          <a:ln w="12700">
+            <a:solidFill>
+              <a:srgbClr val="B4C7D2"/>
+            </a:solidFill>
+          </a:ln>
+          <a:effectLst/>
+        </p:spPr>
+      </p:cxnSp>
+      <p:cxnSp>
+        <p:nvCxnSpPr>
+          <p:cNvPr id="39" name="C1-E19 line 37" descr="sci-ppt:o037"/>
+          <p:cNvCxnSpPr/>
+          <p:nvPr/>
+        </p:nvCxnSpPr>
+        <p:spPr>
+          <a:xfrm>
+            <a:off x="2834639" y="3840480"/>
+            <a:ext cx="0" cy="1737360"/>
+          </a:xfrm>
+          <a:prstGeom prst="line">
+            <a:avLst/>
+          </a:prstGeom>
+          <a:ln w="7620">
+            <a:solidFill>
+              <a:srgbClr val="2E4756"/>
+            </a:solidFill>
+          </a:ln>
+          <a:effectLst/>
+        </p:spPr>
+      </p:cxnSp>
+      <p:sp>
+        <p:nvSpPr>
+          <p:cNvPr id="40" name="C1-E19 text 38" descr="sci-ppt:o038"/>
+          <p:cNvSpPr txBox="1"/>
+          <p:nvPr/>
+        </p:nvSpPr>
+        <p:spPr>
+          <a:xfrm>
+            <a:off x="2377439" y="5660136"/>
+            <a:ext cx="914400" cy="208407"/>
+          </a:xfrm>
+          <a:prstGeom prst="rect">
+            <a:avLst/>
+          </a:prstGeom>
+          <a:noFill/>
+          <a:effectLst/>
+        </p:spPr>
+        <p:txBody>
+          <a:bodyPr wrap="none" lIns="18288" rIns="18288" tIns="18288" bIns="18288" anchor="t">
+            <a:spAutoFit/>
+          </a:bodyPr>
+          <a:lstStyle/>
+          <a:p>
+            <a:pPr algn="ctr">
+              <a:spcAft>
+                <a:spcPts val="0"/>
+              </a:spcAft>
+            </a:pPr>
+            <a:r>
+              <a:rPr sz="1050" b="0" i="0">
+                <a:solidFill>
+                  <a:srgbClr val="B4C7D2"/>
+                </a:solidFill>
+                <a:latin typeface="Arial"/>
+              </a:rPr>
+              <a:t>1</a:t>
+            </a:r>
+          </a:p>
+        </p:txBody>
+      </p:sp>
+      <p:cxnSp>
+        <p:nvCxnSpPr>
+          <p:cNvPr id="41" name="C1-E19 line 39" descr="sci-ppt:o039"/>
+          <p:cNvCxnSpPr/>
+          <p:nvPr/>
+        </p:nvCxnSpPr>
+        <p:spPr>
+          <a:xfrm>
+            <a:off x="4754879" y="5577840"/>
+            <a:ext cx="0" cy="64008"/>
+          </a:xfrm>
+          <a:prstGeom prst="line">
+            <a:avLst/>
+          </a:prstGeom>
+          <a:ln w="12700">
+            <a:solidFill>
+              <a:srgbClr val="B4C7D2"/>
+            </a:solidFill>
+          </a:ln>
+          <a:effectLst/>
+        </p:spPr>
+      </p:cxnSp>
+      <p:cxnSp>
+        <p:nvCxnSpPr>
+          <p:cNvPr id="42" name="C1-E19 line 40" descr="sci-ppt:o040"/>
+          <p:cNvCxnSpPr/>
+          <p:nvPr/>
+        </p:nvCxnSpPr>
+        <p:spPr>
+          <a:xfrm>
+            <a:off x="4754879" y="3840480"/>
+            <a:ext cx="0" cy="1737360"/>
+          </a:xfrm>
+          <a:prstGeom prst="line">
+            <a:avLst/>
+          </a:prstGeom>
+          <a:ln w="7620">
+            <a:solidFill>
+              <a:srgbClr val="2E4756"/>
+            </a:solidFill>
+          </a:ln>
+          <a:effectLst/>
+        </p:spPr>
+      </p:cxnSp>
+      <p:sp>
+        <p:nvSpPr>
+          <p:cNvPr id="43" name="C1-E19 text 41" descr="sci-ppt:o041"/>
+          <p:cNvSpPr txBox="1"/>
+          <p:nvPr/>
+        </p:nvSpPr>
+        <p:spPr>
+          <a:xfrm>
+            <a:off x="4297679" y="5660136"/>
+            <a:ext cx="914400" cy="208407"/>
+          </a:xfrm>
+          <a:prstGeom prst="rect">
+            <a:avLst/>
+          </a:prstGeom>
+          <a:noFill/>
+          <a:effectLst/>
+        </p:spPr>
+        <p:txBody>
+          <a:bodyPr wrap="none" lIns="18288" rIns="18288" tIns="18288" bIns="18288" anchor="t">
+            <a:spAutoFit/>
+          </a:bodyPr>
+          <a:lstStyle/>
+          <a:p>
+            <a:pPr algn="ctr">
+              <a:spcAft>
+                <a:spcPts val="0"/>
+              </a:spcAft>
+            </a:pPr>
+            <a:r>
+              <a:rPr sz="1050" b="0" i="0">
+                <a:solidFill>
+                  <a:srgbClr val="B4C7D2"/>
+                </a:solidFill>
+                <a:latin typeface="Arial"/>
+              </a:rPr>
+              <a:t>2</a:t>
+            </a:r>
+          </a:p>
+        </p:txBody>
+      </p:sp>
+      <p:cxnSp>
+        <p:nvCxnSpPr>
+          <p:cNvPr id="44" name="C1-E19 line 42" descr="sci-ppt:o042"/>
+          <p:cNvCxnSpPr/>
+          <p:nvPr/>
+        </p:nvCxnSpPr>
+        <p:spPr>
+          <a:xfrm>
+            <a:off x="6675120" y="5577840"/>
+            <a:ext cx="0" cy="64008"/>
+          </a:xfrm>
+          <a:prstGeom prst="line">
+            <a:avLst/>
+          </a:prstGeom>
+          <a:ln w="12700">
+            <a:solidFill>
+              <a:srgbClr val="B4C7D2"/>
+            </a:solidFill>
+          </a:ln>
+          <a:effectLst/>
+        </p:spPr>
+      </p:cxnSp>
+      <p:cxnSp>
+        <p:nvCxnSpPr>
+          <p:cNvPr id="45" name="C1-E19 line 43" descr="sci-ppt:o043"/>
+          <p:cNvCxnSpPr/>
+          <p:nvPr/>
+        </p:nvCxnSpPr>
+        <p:spPr>
+          <a:xfrm>
+            <a:off x="6675120" y="3840480"/>
+            <a:ext cx="0" cy="1737360"/>
+          </a:xfrm>
+          <a:prstGeom prst="line">
+            <a:avLst/>
+          </a:prstGeom>
+          <a:ln w="7620">
+            <a:solidFill>
+              <a:srgbClr val="2E4756"/>
+            </a:solidFill>
+          </a:ln>
+          <a:effectLst/>
+        </p:spPr>
+      </p:cxnSp>
+      <p:sp>
+        <p:nvSpPr>
+          <p:cNvPr id="46" name="C1-E19 text 44" descr="sci-ppt:o044"/>
+          <p:cNvSpPr txBox="1"/>
+          <p:nvPr/>
+        </p:nvSpPr>
+        <p:spPr>
+          <a:xfrm>
+            <a:off x="6217920" y="5660136"/>
+            <a:ext cx="914400" cy="208407"/>
+          </a:xfrm>
+          <a:prstGeom prst="rect">
+            <a:avLst/>
+          </a:prstGeom>
+          <a:noFill/>
+          <a:effectLst/>
+        </p:spPr>
+        <p:txBody>
+          <a:bodyPr wrap="none" lIns="18288" rIns="18288" tIns="18288" bIns="18288" anchor="t">
+            <a:spAutoFit/>
+          </a:bodyPr>
+          <a:lstStyle/>
+          <a:p>
+            <a:pPr algn="ctr">
+              <a:spcAft>
+                <a:spcPts val="0"/>
+              </a:spcAft>
+            </a:pPr>
+            <a:r>
+              <a:rPr sz="1050" b="0" i="0">
+                <a:solidFill>
+                  <a:srgbClr val="B4C7D2"/>
+                </a:solidFill>
+                <a:latin typeface="Arial"/>
+              </a:rPr>
+              <a:t>3</a:t>
+            </a:r>
+          </a:p>
+        </p:txBody>
+      </p:sp>
+      <p:cxnSp>
+        <p:nvCxnSpPr>
+          <p:cNvPr id="47" name="C1-E19 line 45" descr="sci-ppt:o045"/>
+          <p:cNvCxnSpPr/>
+          <p:nvPr/>
+        </p:nvCxnSpPr>
+        <p:spPr>
+          <a:xfrm>
+            <a:off x="850392" y="5577840"/>
+            <a:ext cx="64008" cy="0"/>
+          </a:xfrm>
+          <a:prstGeom prst="line">
+            <a:avLst/>
+          </a:prstGeom>
+          <a:ln w="12700">
+            <a:solidFill>
+              <a:srgbClr val="B4C7D2"/>
+            </a:solidFill>
+          </a:ln>
+          <a:effectLst/>
+        </p:spPr>
+      </p:cxnSp>
+      <p:cxnSp>
+        <p:nvCxnSpPr>
+          <p:cNvPr id="48" name="C1-E19 line 46" descr="sci-ppt:o046"/>
+          <p:cNvCxnSpPr/>
+          <p:nvPr/>
+        </p:nvCxnSpPr>
+        <p:spPr>
+          <a:xfrm>
+            <a:off x="850392" y="5043267"/>
+            <a:ext cx="64008" cy="0"/>
+          </a:xfrm>
+          <a:prstGeom prst="line">
+            <a:avLst/>
+          </a:prstGeom>
+          <a:ln w="12700">
+            <a:solidFill>
+              <a:srgbClr val="B4C7D2"/>
+            </a:solidFill>
+          </a:ln>
+          <a:effectLst/>
+        </p:spPr>
+      </p:cxnSp>
+      <p:cxnSp>
+        <p:nvCxnSpPr>
+          <p:cNvPr id="49" name="C1-E19 line 47" descr="sci-ppt:o047"/>
+          <p:cNvCxnSpPr/>
+          <p:nvPr/>
+        </p:nvCxnSpPr>
+        <p:spPr>
+          <a:xfrm>
+            <a:off x="914400" y="5043267"/>
+            <a:ext cx="5760720" cy="0"/>
+          </a:xfrm>
+          <a:prstGeom prst="line">
+            <a:avLst/>
+          </a:prstGeom>
+          <a:ln w="7620">
+            <a:solidFill>
+              <a:srgbClr val="2E4756"/>
+            </a:solidFill>
+          </a:ln>
+          <a:effectLst/>
+        </p:spPr>
+      </p:cxnSp>
+      <p:sp>
+        <p:nvSpPr>
+          <p:cNvPr id="50" name="C1-E19 text 48" descr="sci-ppt:o048"/>
+          <p:cNvSpPr txBox="1"/>
+          <p:nvPr/>
+        </p:nvSpPr>
+        <p:spPr>
+          <a:xfrm>
+            <a:off x="45720" y="4960971"/>
+            <a:ext cx="777240" cy="208407"/>
+          </a:xfrm>
+          <a:prstGeom prst="rect">
+            <a:avLst/>
+          </a:prstGeom>
+          <a:noFill/>
+          <a:effectLst/>
+        </p:spPr>
+        <p:txBody>
+          <a:bodyPr wrap="none" lIns="18288" rIns="18288" tIns="18288" bIns="18288" anchor="t">
+            <a:spAutoFit/>
+          </a:bodyPr>
+          <a:lstStyle/>
+          <a:p>
+            <a:pPr algn="r">
+              <a:spcAft>
+                <a:spcPts val="0"/>
+              </a:spcAft>
+            </a:pPr>
+            <a:r>
+              <a:rPr sz="1050" b="0" i="0">
+                <a:solidFill>
+                  <a:srgbClr val="B4C7D2"/>
+                </a:solidFill>
+                <a:latin typeface="Arial"/>
+              </a:rPr>
+              <a:t>4</a:t>
+            </a:r>
+          </a:p>
+        </p:txBody>
+      </p:sp>
+      <p:cxnSp>
+        <p:nvCxnSpPr>
+          <p:cNvPr id="51" name="C1-E19 line 49" descr="sci-ppt:o049"/>
+          <p:cNvCxnSpPr/>
+          <p:nvPr/>
+        </p:nvCxnSpPr>
+        <p:spPr>
+          <a:xfrm>
+            <a:off x="850392" y="4508695"/>
+            <a:ext cx="64008" cy="0"/>
+          </a:xfrm>
+          <a:prstGeom prst="line">
+            <a:avLst/>
+          </a:prstGeom>
+          <a:ln w="12700">
+            <a:solidFill>
+              <a:srgbClr val="B4C7D2"/>
+            </a:solidFill>
+          </a:ln>
+          <a:effectLst/>
+        </p:spPr>
+      </p:cxnSp>
+      <p:cxnSp>
+        <p:nvCxnSpPr>
+          <p:cNvPr id="52" name="C1-E19 line 50" descr="sci-ppt:o050"/>
+          <p:cNvCxnSpPr/>
+          <p:nvPr/>
+        </p:nvCxnSpPr>
+        <p:spPr>
+          <a:xfrm>
+            <a:off x="914400" y="4508695"/>
+            <a:ext cx="5760720" cy="0"/>
+          </a:xfrm>
+          <a:prstGeom prst="line">
+            <a:avLst/>
+          </a:prstGeom>
+          <a:ln w="7620">
+            <a:solidFill>
+              <a:srgbClr val="2E4756"/>
+            </a:solidFill>
+          </a:ln>
+          <a:effectLst/>
+        </p:spPr>
+      </p:cxnSp>
+      <p:sp>
+        <p:nvSpPr>
+          <p:cNvPr id="53" name="C1-E19 text 51" descr="sci-ppt:o051"/>
+          <p:cNvSpPr txBox="1"/>
+          <p:nvPr/>
+        </p:nvSpPr>
+        <p:spPr>
+          <a:xfrm>
+            <a:off x="45720" y="4426399"/>
+            <a:ext cx="777240" cy="208407"/>
+          </a:xfrm>
+          <a:prstGeom prst="rect">
+            <a:avLst/>
+          </a:prstGeom>
+          <a:noFill/>
+          <a:effectLst/>
+        </p:spPr>
+        <p:txBody>
+          <a:bodyPr wrap="none" lIns="18288" rIns="18288" tIns="18288" bIns="18288" anchor="t">
+            <a:spAutoFit/>
+          </a:bodyPr>
+          <a:lstStyle/>
+          <a:p>
+            <a:pPr algn="r">
+              <a:spcAft>
+                <a:spcPts val="0"/>
+              </a:spcAft>
+            </a:pPr>
+            <a:r>
+              <a:rPr sz="1050" b="0" i="0">
+                <a:solidFill>
+                  <a:srgbClr val="B4C7D2"/>
+                </a:solidFill>
+                <a:latin typeface="Arial"/>
+              </a:rPr>
+              <a:t>8</a:t>
+            </a:r>
+          </a:p>
+        </p:txBody>
+      </p:sp>
+      <p:cxnSp>
+        <p:nvCxnSpPr>
+          <p:cNvPr id="54" name="C1-E19 line 52" descr="sci-ppt:o052"/>
+          <p:cNvCxnSpPr/>
+          <p:nvPr/>
+        </p:nvCxnSpPr>
+        <p:spPr>
+          <a:xfrm>
+            <a:off x="850392" y="3974123"/>
+            <a:ext cx="64008" cy="0"/>
+          </a:xfrm>
+          <a:prstGeom prst="line">
+            <a:avLst/>
+          </a:prstGeom>
+          <a:ln w="12700">
+            <a:solidFill>
+              <a:srgbClr val="B4C7D2"/>
+            </a:solidFill>
+          </a:ln>
+          <a:effectLst/>
+        </p:spPr>
+      </p:cxnSp>
+      <p:cxnSp>
+        <p:nvCxnSpPr>
+          <p:cNvPr id="55" name="C1-E19 line 53" descr="sci-ppt:o053"/>
+          <p:cNvCxnSpPr/>
+          <p:nvPr/>
+        </p:nvCxnSpPr>
+        <p:spPr>
+          <a:xfrm>
+            <a:off x="914400" y="3974123"/>
+            <a:ext cx="5760720" cy="0"/>
+          </a:xfrm>
+          <a:prstGeom prst="line">
+            <a:avLst/>
+          </a:prstGeom>
+          <a:ln w="7620">
+            <a:solidFill>
+              <a:srgbClr val="2E4756"/>
+            </a:solidFill>
+          </a:ln>
+          <a:effectLst/>
+        </p:spPr>
+      </p:cxnSp>
+      <p:sp>
+        <p:nvSpPr>
+          <p:cNvPr id="56" name="C1-E19 text 54" descr="sci-ppt:o054"/>
+          <p:cNvSpPr txBox="1"/>
+          <p:nvPr/>
+        </p:nvSpPr>
+        <p:spPr>
+          <a:xfrm>
+            <a:off x="45720" y="3891827"/>
+            <a:ext cx="777240" cy="208407"/>
+          </a:xfrm>
+          <a:prstGeom prst="rect">
+            <a:avLst/>
+          </a:prstGeom>
+          <a:noFill/>
+          <a:effectLst/>
+        </p:spPr>
+        <p:txBody>
+          <a:bodyPr wrap="none" lIns="18288" rIns="18288" tIns="18288" bIns="18288" anchor="t">
+            <a:spAutoFit/>
+          </a:bodyPr>
+          <a:lstStyle/>
+          <a:p>
+            <a:pPr algn="r">
+              <a:spcAft>
+                <a:spcPts val="0"/>
+              </a:spcAft>
+            </a:pPr>
+            <a:r>
+              <a:rPr sz="1050" b="0" i="0">
+                <a:solidFill>
+                  <a:srgbClr val="B4C7D2"/>
+                </a:solidFill>
+                <a:latin typeface="Arial"/>
+              </a:rPr>
+              <a:t>12</a:t>
+            </a:r>
+          </a:p>
+        </p:txBody>
+      </p:sp>
+      <p:sp>
+        <p:nvSpPr>
+          <p:cNvPr id="57" name="C1-E19 text 55" descr="sci-ppt:o055"/>
+          <p:cNvSpPr txBox="1"/>
+          <p:nvPr/>
+        </p:nvSpPr>
+        <p:spPr>
+          <a:xfrm>
+            <a:off x="914400" y="5861303"/>
+            <a:ext cx="5760720" cy="231648"/>
+          </a:xfrm>
+          <a:prstGeom prst="rect">
+            <a:avLst/>
+          </a:prstGeom>
+          <a:noFill/>
+          <a:effectLst/>
+        </p:spPr>
+        <p:txBody>
+          <a:bodyPr wrap="none" lIns="18288" rIns="18288" tIns="18288" bIns="18288" anchor="t">
+            <a:spAutoFit/>
+          </a:bodyPr>
+          <a:lstStyle/>
+          <a:p>
+            <a:pPr algn="ctr">
+              <a:spcAft>
+                <a:spcPts val="0"/>
+              </a:spcAft>
+            </a:pPr>
+            <a:r>
+              <a:rPr sz="1200" b="0" i="0">
                 <a:solidFill>
                   <a:srgbClr val="E7F0F3"/>
                 </a:solidFill>
                 <a:latin typeface="Arial"/>
               </a:rPr>
-              <a:t>p_b</a:t>
-            </a:r>
-          </a:p>
-        </p:txBody>
-      </p:sp>
-      <p:sp>
-        <p:nvSpPr>
-          <p:cNvPr id="7" name="text6" descr="sci-ppt:C1-E19-006"/>
+              <a:t>t  (µs)</a:t>
+            </a:r>
+          </a:p>
+        </p:txBody>
+      </p:sp>
+      <p:sp>
+        <p:nvSpPr>
+          <p:cNvPr id="58" name="C1-E19 text 56" descr="sci-ppt:o056"/>
           <p:cNvSpPr txBox="1"/>
           <p:nvPr/>
         </p:nvSpPr>
         <p:spPr>
           <a:xfrm>
-            <a:off x="5242560" y="1524000"/>
-            <a:ext cx="4876800" cy="415747"/>
+            <a:off x="365760" y="3493008"/>
+            <a:ext cx="5760720" cy="231648"/>
           </a:xfrm>
           <a:prstGeom prst="rect">
             <a:avLst/>
@@ -3290,7 +5168,7 @@
           <a:effectLst/>
         </p:spPr>
         <p:txBody>
-          <a:bodyPr wrap="none" lIns="27432" rIns="27432" tIns="18288" bIns="18288" anchor="ctr">
+          <a:bodyPr wrap="none" lIns="18288" rIns="18288" tIns="18288" bIns="18288" anchor="t">
             <a:spAutoFit/>
           </a:bodyPr>
           <a:lstStyle/>
@@ -3301,27 +5179,541 @@
               </a:spcAft>
             </a:pPr>
             <a:r>
-              <a:rPr sz="2111" b="0" i="0">
+              <a:rPr sz="1200" b="0" i="0">
                 <a:solidFill>
                   <a:srgbClr val="E7F0F3"/>
                 </a:solidFill>
                 <a:latin typeface="Arial"/>
               </a:rPr>
-              <a:t>Surrounding liquid</a:t>
-            </a:r>
-          </a:p>
-        </p:txBody>
-      </p:sp>
-      <p:sp>
-        <p:nvSpPr>
-          <p:cNvPr id="8" name="text7" descr="sci-ppt:C1-E19-007"/>
+              <a:t>Kₗ  (nJ)</a:t>
+            </a:r>
+          </a:p>
+        </p:txBody>
+      </p:sp>
+      <p:sp>
+        <p:nvSpPr>
+          <p:cNvPr id="59" name="C1-E19 polygon 57" descr="sci-ppt:o057"/>
+          <p:cNvSpPr/>
+          <p:nvPr/>
+        </p:nvSpPr>
+        <p:spPr>
+          <a:xfrm>
+            <a:off x="914400" y="4066372"/>
+            <a:ext cx="5269223" cy="1511014"/>
+          </a:xfrm>
+          <a:custGeom>
+            <a:avLst/>
+            <a:gdLst/>
+            <a:ahLst/>
+            <a:cxnLst/>
+            <a:rect l="l" t="t" r="r" b="b"/>
+            <a:pathLst>
+              <a:path w="5269223" h="1511014">
+                <a:moveTo>
+                  <a:pt x="0" y="1511014"/>
+                </a:moveTo>
+                <a:lnTo>
+                  <a:pt x="54396" y="1511014"/>
+                </a:lnTo>
+                <a:lnTo>
+                  <a:pt x="108789" y="1510659"/>
+                </a:lnTo>
+                <a:lnTo>
+                  <a:pt x="163171" y="1509649"/>
+                </a:lnTo>
+                <a:lnTo>
+                  <a:pt x="217539" y="1508235"/>
+                </a:lnTo>
+                <a:lnTo>
+                  <a:pt x="271887" y="1506419"/>
+                </a:lnTo>
+                <a:lnTo>
+                  <a:pt x="326212" y="1504201"/>
+                </a:lnTo>
+                <a:lnTo>
+                  <a:pt x="380507" y="1501583"/>
+                </a:lnTo>
+                <a:lnTo>
+                  <a:pt x="434768" y="1498566"/>
+                </a:lnTo>
+                <a:lnTo>
+                  <a:pt x="488990" y="1495151"/>
+                </a:lnTo>
+                <a:lnTo>
+                  <a:pt x="543169" y="1491341"/>
+                </a:lnTo>
+                <a:lnTo>
+                  <a:pt x="597299" y="1487138"/>
+                </a:lnTo>
+                <a:lnTo>
+                  <a:pt x="651375" y="1482543"/>
+                </a:lnTo>
+                <a:lnTo>
+                  <a:pt x="705393" y="1477559"/>
+                </a:lnTo>
+                <a:lnTo>
+                  <a:pt x="759348" y="1472189"/>
+                </a:lnTo>
+                <a:lnTo>
+                  <a:pt x="813235" y="1466436"/>
+                </a:lnTo>
+                <a:lnTo>
+                  <a:pt x="867049" y="1460302"/>
+                </a:lnTo>
+                <a:lnTo>
+                  <a:pt x="920785" y="1453792"/>
+                </a:lnTo>
+                <a:lnTo>
+                  <a:pt x="974438" y="1446909"/>
+                </a:lnTo>
+                <a:lnTo>
+                  <a:pt x="1028004" y="1439655"/>
+                </a:lnTo>
+                <a:lnTo>
+                  <a:pt x="1081476" y="1432036"/>
+                </a:lnTo>
+                <a:lnTo>
+                  <a:pt x="1134852" y="1424055"/>
+                </a:lnTo>
+                <a:lnTo>
+                  <a:pt x="1188124" y="1415717"/>
+                </a:lnTo>
+                <a:lnTo>
+                  <a:pt x="1241289" y="1407026"/>
+                </a:lnTo>
+                <a:lnTo>
+                  <a:pt x="1294342" y="1397987"/>
+                </a:lnTo>
+                <a:lnTo>
+                  <a:pt x="1347278" y="1388604"/>
+                </a:lnTo>
+                <a:lnTo>
+                  <a:pt x="1400090" y="1378883"/>
+                </a:lnTo>
+                <a:lnTo>
+                  <a:pt x="1452776" y="1368829"/>
+                </a:lnTo>
+                <a:lnTo>
+                  <a:pt x="1505329" y="1358448"/>
+                </a:lnTo>
+                <a:lnTo>
+                  <a:pt x="1557745" y="1347744"/>
+                </a:lnTo>
+                <a:lnTo>
+                  <a:pt x="1610018" y="1336725"/>
+                </a:lnTo>
+                <a:lnTo>
+                  <a:pt x="1662144" y="1325395"/>
+                </a:lnTo>
+                <a:lnTo>
+                  <a:pt x="1714118" y="1313761"/>
+                </a:lnTo>
+                <a:lnTo>
+                  <a:pt x="1765933" y="1301829"/>
+                </a:lnTo>
+                <a:lnTo>
+                  <a:pt x="1817586" y="1289606"/>
+                </a:lnTo>
+                <a:lnTo>
+                  <a:pt x="1869072" y="1277098"/>
+                </a:lnTo>
+                <a:lnTo>
+                  <a:pt x="1920384" y="1264313"/>
+                </a:lnTo>
+                <a:lnTo>
+                  <a:pt x="1971519" y="1251256"/>
+                </a:lnTo>
+                <a:lnTo>
+                  <a:pt x="2022470" y="1237936"/>
+                </a:lnTo>
+                <a:lnTo>
+                  <a:pt x="2073234" y="1224359"/>
+                </a:lnTo>
+                <a:lnTo>
+                  <a:pt x="2123803" y="1210533"/>
+                </a:lnTo>
+                <a:lnTo>
+                  <a:pt x="2174174" y="1196466"/>
+                </a:lnTo>
+                <a:lnTo>
+                  <a:pt x="2224342" y="1182165"/>
+                </a:lnTo>
+                <a:lnTo>
+                  <a:pt x="2274300" y="1167638"/>
+                </a:lnTo>
+                <a:lnTo>
+                  <a:pt x="2324044" y="1152892"/>
+                </a:lnTo>
+                <a:lnTo>
+                  <a:pt x="2373568" y="1137937"/>
+                </a:lnTo>
+                <a:lnTo>
+                  <a:pt x="2422868" y="1122780"/>
+                </a:lnTo>
+                <a:lnTo>
+                  <a:pt x="2471937" y="1107429"/>
+                </a:lnTo>
+                <a:lnTo>
+                  <a:pt x="2520771" y="1091894"/>
+                </a:lnTo>
+                <a:lnTo>
+                  <a:pt x="2569365" y="1076182"/>
+                </a:lnTo>
+                <a:lnTo>
+                  <a:pt x="2617712" y="1060302"/>
+                </a:lnTo>
+                <a:lnTo>
+                  <a:pt x="2665808" y="1044263"/>
+                </a:lnTo>
+                <a:lnTo>
+                  <a:pt x="2713646" y="1028074"/>
+                </a:lnTo>
+                <a:lnTo>
+                  <a:pt x="2761223" y="1011744"/>
+                </a:lnTo>
+                <a:lnTo>
+                  <a:pt x="2808532" y="995282"/>
+                </a:lnTo>
+                <a:lnTo>
+                  <a:pt x="2855568" y="978696"/>
+                </a:lnTo>
+                <a:lnTo>
+                  <a:pt x="2902325" y="961997"/>
+                </a:lnTo>
+                <a:lnTo>
+                  <a:pt x="2948798" y="945193"/>
+                </a:lnTo>
+                <a:lnTo>
+                  <a:pt x="2994981" y="928293"/>
+                </a:lnTo>
+                <a:lnTo>
+                  <a:pt x="3040869" y="911308"/>
+                </a:lnTo>
+                <a:lnTo>
+                  <a:pt x="3086456" y="894246"/>
+                </a:lnTo>
+                <a:lnTo>
+                  <a:pt x="3131737" y="877117"/>
+                </a:lnTo>
+                <a:lnTo>
+                  <a:pt x="3176706" y="859930"/>
+                </a:lnTo>
+                <a:lnTo>
+                  <a:pt x="3221357" y="842696"/>
+                </a:lnTo>
+                <a:lnTo>
+                  <a:pt x="3265685" y="825423"/>
+                </a:lnTo>
+                <a:lnTo>
+                  <a:pt x="3309685" y="808122"/>
+                </a:lnTo>
+                <a:lnTo>
+                  <a:pt x="3353349" y="790801"/>
+                </a:lnTo>
+                <a:lnTo>
+                  <a:pt x="3396673" y="773472"/>
+                </a:lnTo>
+                <a:lnTo>
+                  <a:pt x="3439651" y="756142"/>
+                </a:lnTo>
+                <a:lnTo>
+                  <a:pt x="3482277" y="738822"/>
+                </a:lnTo>
+                <a:lnTo>
+                  <a:pt x="3524546" y="721522"/>
+                </a:lnTo>
+                <a:lnTo>
+                  <a:pt x="3566451" y="704251"/>
+                </a:lnTo>
+                <a:lnTo>
+                  <a:pt x="3607987" y="687018"/>
+                </a:lnTo>
+                <a:lnTo>
+                  <a:pt x="3649147" y="669834"/>
+                </a:lnTo>
+                <a:lnTo>
+                  <a:pt x="3689927" y="652708"/>
+                </a:lnTo>
+                <a:lnTo>
+                  <a:pt x="3730319" y="635650"/>
+                </a:lnTo>
+                <a:lnTo>
+                  <a:pt x="3770319" y="618668"/>
+                </a:lnTo>
+                <a:lnTo>
+                  <a:pt x="3809920" y="601772"/>
+                </a:lnTo>
+                <a:lnTo>
+                  <a:pt x="3849116" y="584973"/>
+                </a:lnTo>
+                <a:lnTo>
+                  <a:pt x="3887901" y="568278"/>
+                </a:lnTo>
+                <a:lnTo>
+                  <a:pt x="3926270" y="551698"/>
+                </a:lnTo>
+                <a:lnTo>
+                  <a:pt x="3964216" y="535240"/>
+                </a:lnTo>
+                <a:lnTo>
+                  <a:pt x="4001733" y="518915"/>
+                </a:lnTo>
+                <a:lnTo>
+                  <a:pt x="4038815" y="502732"/>
+                </a:lnTo>
+                <a:lnTo>
+                  <a:pt x="4075457" y="486698"/>
+                </a:lnTo>
+                <a:lnTo>
+                  <a:pt x="4111651" y="470823"/>
+                </a:lnTo>
+                <a:lnTo>
+                  <a:pt x="4147393" y="455116"/>
+                </a:lnTo>
+                <a:lnTo>
+                  <a:pt x="4182675" y="439584"/>
+                </a:lnTo>
+                <a:lnTo>
+                  <a:pt x="4217492" y="424236"/>
+                </a:lnTo>
+                <a:lnTo>
+                  <a:pt x="4251838" y="409081"/>
+                </a:lnTo>
+                <a:lnTo>
+                  <a:pt x="4285707" y="394126"/>
+                </a:lnTo>
+                <a:lnTo>
+                  <a:pt x="4319092" y="379379"/>
+                </a:lnTo>
+                <a:lnTo>
+                  <a:pt x="4351987" y="364847"/>
+                </a:lnTo>
+                <a:lnTo>
+                  <a:pt x="4384387" y="350539"/>
+                </a:lnTo>
+                <a:lnTo>
+                  <a:pt x="4416285" y="336462"/>
+                </a:lnTo>
+                <a:lnTo>
+                  <a:pt x="4447675" y="322622"/>
+                </a:lnTo>
+                <a:lnTo>
+                  <a:pt x="4478551" y="309026"/>
+                </a:lnTo>
+                <a:lnTo>
+                  <a:pt x="4508908" y="295682"/>
+                </a:lnTo>
+                <a:lnTo>
+                  <a:pt x="4538738" y="282595"/>
+                </a:lnTo>
+                <a:lnTo>
+                  <a:pt x="4568037" y="269772"/>
+                </a:lnTo>
+                <a:lnTo>
+                  <a:pt x="4596798" y="257219"/>
+                </a:lnTo>
+                <a:lnTo>
+                  <a:pt x="4625015" y="244941"/>
+                </a:lnTo>
+                <a:lnTo>
+                  <a:pt x="4652682" y="232944"/>
+                </a:lnTo>
+                <a:lnTo>
+                  <a:pt x="4679794" y="221233"/>
+                </a:lnTo>
+                <a:lnTo>
+                  <a:pt x="4706345" y="209813"/>
+                </a:lnTo>
+                <a:lnTo>
+                  <a:pt x="4732329" y="198688"/>
+                </a:lnTo>
+                <a:lnTo>
+                  <a:pt x="4757741" y="187863"/>
+                </a:lnTo>
+                <a:lnTo>
+                  <a:pt x="4782574" y="177341"/>
+                </a:lnTo>
+                <a:lnTo>
+                  <a:pt x="4806824" y="167127"/>
+                </a:lnTo>
+                <a:lnTo>
+                  <a:pt x="4830485" y="157223"/>
+                </a:lnTo>
+                <a:lnTo>
+                  <a:pt x="4853553" y="147632"/>
+                </a:lnTo>
+                <a:lnTo>
+                  <a:pt x="4876021" y="138358"/>
+                </a:lnTo>
+                <a:lnTo>
+                  <a:pt x="4897885" y="129401"/>
+                </a:lnTo>
+                <a:lnTo>
+                  <a:pt x="4919140" y="120765"/>
+                </a:lnTo>
+                <a:lnTo>
+                  <a:pt x="4939781" y="112451"/>
+                </a:lnTo>
+                <a:lnTo>
+                  <a:pt x="4959805" y="104459"/>
+                </a:lnTo>
+                <a:lnTo>
+                  <a:pt x="4979206" y="96790"/>
+                </a:lnTo>
+                <a:lnTo>
+                  <a:pt x="4997981" y="89444"/>
+                </a:lnTo>
+                <a:lnTo>
+                  <a:pt x="5016125" y="82422"/>
+                </a:lnTo>
+                <a:lnTo>
+                  <a:pt x="5033636" y="75722"/>
+                </a:lnTo>
+                <a:lnTo>
+                  <a:pt x="5050510" y="69344"/>
+                </a:lnTo>
+                <a:lnTo>
+                  <a:pt x="5066745" y="63286"/>
+                </a:lnTo>
+                <a:lnTo>
+                  <a:pt x="5082336" y="57545"/>
+                </a:lnTo>
+                <a:lnTo>
+                  <a:pt x="5097283" y="52120"/>
+                </a:lnTo>
+                <a:lnTo>
+                  <a:pt x="5111583" y="47007"/>
+                </a:lnTo>
+                <a:lnTo>
+                  <a:pt x="5125235" y="42202"/>
+                </a:lnTo>
+                <a:lnTo>
+                  <a:pt x="5138239" y="37702"/>
+                </a:lnTo>
+                <a:lnTo>
+                  <a:pt x="5150592" y="33502"/>
+                </a:lnTo>
+                <a:lnTo>
+                  <a:pt x="5162297" y="29597"/>
+                </a:lnTo>
+                <a:lnTo>
+                  <a:pt x="5173354" y="25980"/>
+                </a:lnTo>
+                <a:lnTo>
+                  <a:pt x="5183763" y="22647"/>
+                </a:lnTo>
+                <a:lnTo>
+                  <a:pt x="5193528" y="19589"/>
+                </a:lnTo>
+                <a:lnTo>
+                  <a:pt x="5202652" y="16799"/>
+                </a:lnTo>
+                <a:lnTo>
+                  <a:pt x="5211138" y="14270"/>
+                </a:lnTo>
+                <a:lnTo>
+                  <a:pt x="5218991" y="11992"/>
+                </a:lnTo>
+                <a:lnTo>
+                  <a:pt x="5226218" y="9956"/>
+                </a:lnTo>
+                <a:lnTo>
+                  <a:pt x="5232826" y="8152"/>
+                </a:lnTo>
+                <a:lnTo>
+                  <a:pt x="5238823" y="6570"/>
+                </a:lnTo>
+                <a:lnTo>
+                  <a:pt x="5244219" y="5198"/>
+                </a:lnTo>
+                <a:lnTo>
+                  <a:pt x="5249027" y="4023"/>
+                </a:lnTo>
+                <a:lnTo>
+                  <a:pt x="5253260" y="3034"/>
+                </a:lnTo>
+                <a:lnTo>
+                  <a:pt x="5256934" y="2217"/>
+                </a:lnTo>
+                <a:lnTo>
+                  <a:pt x="5260067" y="1558"/>
+                </a:lnTo>
+                <a:lnTo>
+                  <a:pt x="5262680" y="1041"/>
+                </a:lnTo>
+                <a:lnTo>
+                  <a:pt x="5264799" y="651"/>
+                </a:lnTo>
+                <a:lnTo>
+                  <a:pt x="5266451" y="371"/>
+                </a:lnTo>
+                <a:lnTo>
+                  <a:pt x="5267671" y="185"/>
+                </a:lnTo>
+                <a:lnTo>
+                  <a:pt x="5268498" y="74"/>
+                </a:lnTo>
+                <a:lnTo>
+                  <a:pt x="5268984" y="19"/>
+                </a:lnTo>
+                <a:lnTo>
+                  <a:pt x="5269192" y="2"/>
+                </a:lnTo>
+                <a:lnTo>
+                  <a:pt x="5269223" y="0"/>
+                </a:lnTo>
+              </a:path>
+            </a:pathLst>
+          </a:custGeom>
+          <a:noFill/>
+          <a:ln w="38100">
+            <a:solidFill>
+              <a:srgbClr val="8EDBD4"/>
+            </a:solidFill>
+          </a:ln>
+          <a:effectLst/>
+        </p:spPr>
+        <p:txBody>
+          <a:bodyPr rtlCol="0" anchor="ctr"/>
+          <a:lstStyle/>
+          <a:p>
+            <a:pPr algn="ctr"/>
+          </a:p>
+        </p:txBody>
+      </p:sp>
+      <p:cxnSp>
+        <p:nvCxnSpPr>
+          <p:cNvPr id="60" name="C1-E19 line 58" descr="sci-ppt:o058"/>
+          <p:cNvCxnSpPr/>
+          <p:nvPr/>
+        </p:nvCxnSpPr>
+        <p:spPr>
+          <a:xfrm>
+            <a:off x="914400" y="4066372"/>
+            <a:ext cx="5760720" cy="0"/>
+          </a:xfrm>
+          <a:prstGeom prst="line">
+            <a:avLst/>
+          </a:prstGeom>
+          <a:ln w="16510">
+            <a:solidFill>
+              <a:srgbClr val="F2B880"/>
+            </a:solidFill>
+            <a:prstDash val="dash"/>
+          </a:ln>
+          <a:effectLst/>
+        </p:spPr>
+      </p:cxnSp>
+      <p:sp>
+        <p:nvSpPr>
+          <p:cNvPr id="61" name="C1-E19 text 59" descr="sci-ppt:o059"/>
           <p:cNvSpPr txBox="1"/>
           <p:nvPr/>
         </p:nvSpPr>
         <p:spPr>
           <a:xfrm>
-            <a:off x="5242560" y="1987296"/>
-            <a:ext cx="5852160" cy="359054"/>
+            <a:off x="1179576" y="3773764"/>
+            <a:ext cx="2194560" cy="231648"/>
           </a:xfrm>
           <a:prstGeom prst="rect">
             <a:avLst/>
@@ -3330,7 +5722,7 @@
           <a:effectLst/>
         </p:spPr>
         <p:txBody>
-          <a:bodyPr wrap="none" lIns="27432" rIns="27432" tIns="18288" bIns="18288" anchor="ctr">
+          <a:bodyPr wrap="none" lIns="18288" rIns="18288" tIns="18288" bIns="18288" anchor="t">
             <a:spAutoFit/>
           </a:bodyPr>
           <a:lstStyle/>
@@ -3341,51 +5733,251 @@
               </a:spcAft>
             </a:pPr>
             <a:r>
-              <a:rPr sz="1823" b="0" i="0">
+              <a:rPr sz="1200" b="0" i="0">
+                <a:solidFill>
+                  <a:srgbClr val="F2B880"/>
+                </a:solidFill>
+                <a:latin typeface="Arial"/>
+              </a:rPr>
+              <a:t>E_B = 11.3097 nJ</a:t>
+            </a:r>
+          </a:p>
+        </p:txBody>
+      </p:sp>
+      <p:sp>
+        <p:nvSpPr>
+          <p:cNvPr id="62" name="C1-E19 ellipse 60" descr="sci-ppt:o060"/>
+          <p:cNvSpPr/>
+          <p:nvPr/>
+        </p:nvSpPr>
+        <p:spPr>
+          <a:xfrm>
+            <a:off x="5598989" y="4182153"/>
+            <a:ext cx="146304" cy="146304"/>
+          </a:xfrm>
+          <a:prstGeom prst="ellipse">
+            <a:avLst/>
+          </a:prstGeom>
+          <a:solidFill>
+            <a:srgbClr val="F2B880"/>
+          </a:solidFill>
+          <a:ln w="12700">
+            <a:solidFill>
+              <a:srgbClr val="F2B880"/>
+            </a:solidFill>
+          </a:ln>
+          <a:effectLst/>
+        </p:spPr>
+        <p:txBody>
+          <a:bodyPr rtlCol="0" anchor="ctr"/>
+          <a:lstStyle/>
+          <a:p>
+            <a:pPr algn="ctr"/>
+          </a:p>
+        </p:txBody>
+      </p:sp>
+      <p:sp>
+        <p:nvSpPr>
+          <p:cNvPr id="63" name="C1-E19 text 61" descr="sci-ppt:o061"/>
+          <p:cNvSpPr txBox="1"/>
+          <p:nvPr/>
+        </p:nvSpPr>
+        <p:spPr>
+          <a:xfrm>
+            <a:off x="3386141" y="4365033"/>
+            <a:ext cx="2194560" cy="223900"/>
+          </a:xfrm>
+          <a:prstGeom prst="rect">
+            <a:avLst/>
+          </a:prstGeom>
+          <a:noFill/>
+          <a:effectLst/>
+        </p:spPr>
+        <p:txBody>
+          <a:bodyPr wrap="none" lIns="18288" rIns="18288" tIns="18288" bIns="18288" anchor="t">
+            <a:spAutoFit/>
+          </a:bodyPr>
+          <a:lstStyle/>
+          <a:p>
+            <a:pPr algn="l">
+              <a:spcAft>
+                <a:spcPts val="0"/>
+              </a:spcAft>
+            </a:pPr>
+            <a:r>
+              <a:rPr sz="1150" b="0" i="0">
+                <a:solidFill>
+                  <a:srgbClr val="F2B880"/>
+                </a:solidFill>
+                <a:latin typeface="Arial"/>
+              </a:rPr>
+              <a:t>Kₗ = 7/8 E_B = 9.896 nJ</a:t>
+            </a:r>
+          </a:p>
+        </p:txBody>
+      </p:sp>
+      <p:sp>
+        <p:nvSpPr>
+          <p:cNvPr id="64" name="C1-E19 round_rect 62" descr="sci-ppt:o062"/>
+          <p:cNvSpPr/>
+          <p:nvPr/>
+        </p:nvSpPr>
+        <p:spPr>
+          <a:xfrm>
+            <a:off x="7040880" y="1280160"/>
+            <a:ext cx="4800600" cy="4526280"/>
+          </a:xfrm>
+          <a:prstGeom prst="roundRect">
+            <a:avLst/>
+          </a:prstGeom>
+          <a:solidFill>
+            <a:srgbClr val="213E4B"/>
+          </a:solidFill>
+          <a:ln w="20320">
+            <a:solidFill>
+              <a:srgbClr val="8EDBD4"/>
+            </a:solidFill>
+          </a:ln>
+          <a:effectLst/>
+        </p:spPr>
+        <p:txBody>
+          <a:bodyPr rtlCol="0" anchor="ctr"/>
+          <a:lstStyle/>
+          <a:p>
+            <a:pPr algn="ctr"/>
+          </a:p>
+        </p:txBody>
+      </p:sp>
+      <p:sp>
+        <p:nvSpPr>
+          <p:cNvPr id="65" name="C1-E19 text 63" descr="sci-ppt:o063"/>
+          <p:cNvSpPr txBox="1"/>
+          <p:nvPr/>
+        </p:nvSpPr>
+        <p:spPr>
+          <a:xfrm>
+            <a:off x="7150608" y="1335024"/>
+            <a:ext cx="4581144" cy="254889"/>
+          </a:xfrm>
+          <a:prstGeom prst="rect">
+            <a:avLst/>
+          </a:prstGeom>
+          <a:noFill/>
+          <a:effectLst/>
+        </p:spPr>
+        <p:txBody>
+          <a:bodyPr wrap="none" lIns="18288" rIns="18288" tIns="18288" bIns="18288" anchor="t">
+            <a:spAutoFit/>
+          </a:bodyPr>
+          <a:lstStyle/>
+          <a:p>
+            <a:pPr algn="l">
+              <a:spcAft>
+                <a:spcPts val="0"/>
+              </a:spcAft>
+            </a:pPr>
+            <a:r>
+              <a:rPr sz="1350" b="1" i="0">
+                <a:solidFill>
+                  <a:srgbClr val="8EDBD4"/>
+                </a:solidFill>
+                <a:latin typeface="Arial"/>
+              </a:rPr>
+              <a:t>The declared numbers</a:t>
+            </a:r>
+          </a:p>
+        </p:txBody>
+      </p:sp>
+      <p:sp>
+        <p:nvSpPr>
+          <p:cNvPr id="66" name="C1-E19 text 64" descr="sci-ppt:o064"/>
+          <p:cNvSpPr txBox="1"/>
+          <p:nvPr/>
+        </p:nvSpPr>
+        <p:spPr>
+          <a:xfrm>
+            <a:off x="7223760" y="1783080"/>
+            <a:ext cx="4480560" cy="247142"/>
+          </a:xfrm>
+          <a:prstGeom prst="rect">
+            <a:avLst/>
+          </a:prstGeom>
+          <a:noFill/>
+          <a:effectLst/>
+        </p:spPr>
+        <p:txBody>
+          <a:bodyPr wrap="none" lIns="18288" rIns="18288" tIns="18288" bIns="18288" anchor="t">
+            <a:spAutoFit/>
+          </a:bodyPr>
+          <a:lstStyle/>
+          <a:p>
+            <a:pPr algn="l">
+              <a:spcAft>
+                <a:spcPts val="0"/>
+              </a:spcAft>
+            </a:pPr>
+            <a:r>
+              <a:rPr sz="1300" b="1" i="0">
+                <a:solidFill>
+                  <a:srgbClr val="F2B880"/>
+                </a:solidFill>
+                <a:latin typeface="Arial"/>
+              </a:rPr>
+              <a:t>Collapse time</a:t>
+            </a:r>
+          </a:p>
+        </p:txBody>
+      </p:sp>
+      <p:sp>
+        <p:nvSpPr>
+          <p:cNvPr id="67" name="C1-E19 text 65" descr="sci-ppt:o065"/>
+          <p:cNvSpPr txBox="1"/>
+          <p:nvPr/>
+        </p:nvSpPr>
+        <p:spPr>
+          <a:xfrm>
+            <a:off x="7315200" y="2030221"/>
+            <a:ext cx="4389120" cy="231648"/>
+          </a:xfrm>
+          <a:prstGeom prst="rect">
+            <a:avLst/>
+          </a:prstGeom>
+          <a:noFill/>
+          <a:effectLst/>
+        </p:spPr>
+        <p:txBody>
+          <a:bodyPr wrap="none" lIns="18288" rIns="18288" tIns="18288" bIns="18288" anchor="t">
+            <a:spAutoFit/>
+          </a:bodyPr>
+          <a:lstStyle/>
+          <a:p>
+            <a:pPr algn="l">
+              <a:spcAft>
+                <a:spcPts val="0"/>
+              </a:spcAft>
+            </a:pPr>
+            <a:r>
+              <a:rPr sz="1200" b="0" i="0">
                 <a:solidFill>
                   <a:srgbClr val="E7F0F3"/>
                 </a:solidFill>
                 <a:latin typeface="Arial"/>
               </a:rPr>
-              <a:t>p∞, ρ, μ; interface: σ</a:t>
-            </a:r>
-          </a:p>
-        </p:txBody>
-      </p:sp>
-      <p:cxnSp>
-        <p:nvCxnSpPr>
-          <p:cNvPr id="9" name="arrow8" descr="sci-ppt:C1-E19-008"/>
-          <p:cNvCxnSpPr/>
-          <p:nvPr/>
-        </p:nvCxnSpPr>
-        <p:spPr>
-          <a:xfrm>
-            <a:off x="3291840" y="2621280"/>
-            <a:ext cx="1706880" cy="1158240"/>
-          </a:xfrm>
-          <a:prstGeom prst="line">
-            <a:avLst/>
-          </a:prstGeom>
-          <a:ln w="25400">
-            <a:solidFill>
-              <a:srgbClr val="8EDBD4"/>
-            </a:solidFill>
-            <a:headEnd type="none" w="med" len="med"/>
-            <a:tailEnd type="triangle" w="med" len="med"/>
-          </a:ln>
-          <a:effectLst/>
-        </p:spPr>
-      </p:cxnSp>
-      <p:sp>
-        <p:nvSpPr>
-          <p:cNvPr id="10" name="text9" descr="sci-ppt:C1-E19-009"/>
+              <a:t>t_c = 0.9147 × 30 µm × √(1000/10⁵) = 2.7440 µs</a:t>
+            </a:r>
+          </a:p>
+        </p:txBody>
+      </p:sp>
+      <p:sp>
+        <p:nvSpPr>
+          <p:cNvPr id="68" name="C1-E19 text 66" descr="sci-ppt:o066"/>
           <p:cNvSpPr txBox="1"/>
           <p:nvPr/>
         </p:nvSpPr>
         <p:spPr>
           <a:xfrm>
-            <a:off x="5364480" y="3657600"/>
-            <a:ext cx="1950720" cy="340156"/>
+            <a:off x="7223760" y="2426462"/>
+            <a:ext cx="4480560" cy="247142"/>
           </a:xfrm>
           <a:prstGeom prst="rect">
             <a:avLst/>
@@ -3394,7 +5986,7 @@
           <a:effectLst/>
         </p:spPr>
         <p:txBody>
-          <a:bodyPr wrap="none" lIns="27432" rIns="27432" tIns="18288" bIns="18288" anchor="ctr">
+          <a:bodyPr wrap="none" lIns="18288" rIns="18288" tIns="18288" bIns="18288" anchor="t">
             <a:spAutoFit/>
           </a:bodyPr>
           <a:lstStyle/>
@@ -3405,51 +5997,67 @@
               </a:spcAft>
             </a:pPr>
             <a:r>
-              <a:rPr sz="1728" b="0" i="0">
+              <a:rPr sz="1300" b="1" i="0">
+                <a:solidFill>
+                  <a:srgbClr val="F2B880"/>
+                </a:solidFill>
+                <a:latin typeface="Arial"/>
+              </a:rPr>
+              <a:t>Work scale</a:t>
+            </a:r>
+          </a:p>
+        </p:txBody>
+      </p:sp>
+      <p:sp>
+        <p:nvSpPr>
+          <p:cNvPr id="69" name="C1-E19 text 67" descr="sci-ppt:o067"/>
+          <p:cNvSpPr txBox="1"/>
+          <p:nvPr/>
+        </p:nvSpPr>
+        <p:spPr>
+          <a:xfrm>
+            <a:off x="7315200" y="2673604"/>
+            <a:ext cx="4389120" cy="231648"/>
+          </a:xfrm>
+          <a:prstGeom prst="rect">
+            <a:avLst/>
+          </a:prstGeom>
+          <a:noFill/>
+          <a:effectLst/>
+        </p:spPr>
+        <p:txBody>
+          <a:bodyPr wrap="none" lIns="18288" rIns="18288" tIns="18288" bIns="18288" anchor="t">
+            <a:spAutoFit/>
+          </a:bodyPr>
+          <a:lstStyle/>
+          <a:p>
+            <a:pPr algn="l">
+              <a:spcAft>
+                <a:spcPts val="0"/>
+              </a:spcAft>
+            </a:pPr>
+            <a:r>
+              <a:rPr sz="1200" b="0" i="0">
                 <a:solidFill>
                   <a:srgbClr val="E7F0F3"/>
                 </a:solidFill>
                 <a:latin typeface="Arial"/>
               </a:rPr>
-              <a:t>r ≥ R</a:t>
-            </a:r>
-          </a:p>
-        </p:txBody>
-      </p:sp>
-      <p:cxnSp>
-        <p:nvCxnSpPr>
-          <p:cNvPr id="11" name="arrow10" descr="sci-ppt:C1-E19-010"/>
-          <p:cNvCxnSpPr/>
-          <p:nvPr/>
-        </p:nvCxnSpPr>
-        <p:spPr>
-          <a:xfrm>
-            <a:off x="4998720" y="2621280"/>
-            <a:ext cx="792480" cy="0"/>
-          </a:xfrm>
-          <a:prstGeom prst="line">
-            <a:avLst/>
-          </a:prstGeom>
-          <a:ln w="25400">
-            <a:solidFill>
-              <a:srgbClr val="8EDBD4"/>
-            </a:solidFill>
-            <a:headEnd type="none" w="med" len="med"/>
-            <a:tailEnd type="triangle" w="med" len="med"/>
-          </a:ln>
-          <a:effectLst/>
-        </p:spPr>
-      </p:cxnSp>
-      <p:sp>
-        <p:nvSpPr>
-          <p:cNvPr id="12" name="text11" descr="sci-ppt:C1-E19-011"/>
+              <a:t>E_B = (4π/3)(10⁵)(30 µm)³ = 11.3097 nJ</a:t>
+            </a:r>
+          </a:p>
+        </p:txBody>
+      </p:sp>
+      <p:sp>
+        <p:nvSpPr>
+          <p:cNvPr id="70" name="C1-E19 text 68" descr="sci-ppt:o068"/>
           <p:cNvSpPr txBox="1"/>
           <p:nvPr/>
         </p:nvSpPr>
         <p:spPr>
           <a:xfrm>
-            <a:off x="5059680" y="2865120"/>
-            <a:ext cx="3291840" cy="321259"/>
+            <a:off x="7223760" y="3069844"/>
+            <a:ext cx="4480560" cy="247142"/>
           </a:xfrm>
           <a:prstGeom prst="rect">
             <a:avLst/>
@@ -3458,7 +6066,7 @@
           <a:effectLst/>
         </p:spPr>
         <p:txBody>
-          <a:bodyPr wrap="none" lIns="27432" rIns="27432" tIns="18288" bIns="18288" anchor="ctr">
+          <a:bodyPr wrap="none" lIns="18288" rIns="18288" tIns="18288" bIns="18288" anchor="t">
             <a:spAutoFit/>
           </a:bodyPr>
           <a:lstStyle/>
@@ -3469,27 +6077,67 @@
               </a:spcAft>
             </a:pPr>
             <a:r>
-              <a:rPr sz="1632" b="0" i="0">
+              <a:rPr sz="1300" b="1" i="0">
+                <a:solidFill>
+                  <a:srgbClr val="F2B880"/>
+                </a:solidFill>
+                <a:latin typeface="Arial"/>
+              </a:rPr>
+              <a:t>Half-radius speed</a:t>
+            </a:r>
+          </a:p>
+        </p:txBody>
+      </p:sp>
+      <p:sp>
+        <p:nvSpPr>
+          <p:cNvPr id="71" name="C1-E19 text 69" descr="sci-ppt:o069"/>
+          <p:cNvSpPr txBox="1"/>
+          <p:nvPr/>
+        </p:nvSpPr>
+        <p:spPr>
+          <a:xfrm>
+            <a:off x="7315200" y="3316986"/>
+            <a:ext cx="4389120" cy="231648"/>
+          </a:xfrm>
+          <a:prstGeom prst="rect">
+            <a:avLst/>
+          </a:prstGeom>
+          <a:noFill/>
+          <a:effectLst/>
+        </p:spPr>
+        <p:txBody>
+          <a:bodyPr wrap="none" lIns="18288" rIns="18288" tIns="18288" bIns="18288" anchor="t">
+            <a:spAutoFit/>
+          </a:bodyPr>
+          <a:lstStyle/>
+          <a:p>
+            <a:pPr algn="l">
+              <a:spcAft>
+                <a:spcPts val="0"/>
+              </a:spcAft>
+            </a:pPr>
+            <a:r>
+              <a:rPr sz="1200" b="0" i="0">
                 <a:solidFill>
                   <a:srgbClr val="E7F0F3"/>
                 </a:solidFill>
                 <a:latin typeface="Arial"/>
               </a:rPr>
-              <a:t>+e_r (coordinate)</a:t>
-            </a:r>
-          </a:p>
-        </p:txBody>
-      </p:sp>
-      <p:sp>
-        <p:nvSpPr>
-          <p:cNvPr id="13" name="text12" descr="sci-ppt:C1-E19-012"/>
+              <a:t>Ṙ = −√[(2×10⁵/(3×1000))(8 − 1)] = −21.6025 m/s</a:t>
+            </a:r>
+          </a:p>
+        </p:txBody>
+      </p:sp>
+      <p:sp>
+        <p:nvSpPr>
+          <p:cNvPr id="72" name="C1-E19 text 70" descr="sci-ppt:o070"/>
           <p:cNvSpPr txBox="1"/>
           <p:nvPr/>
         </p:nvSpPr>
         <p:spPr>
           <a:xfrm>
-            <a:off x="1219200" y="4206240"/>
-            <a:ext cx="9753600" cy="340156"/>
+            <a:off x="7223760" y="3713226"/>
+            <a:ext cx="4480560" cy="247142"/>
           </a:xfrm>
           <a:prstGeom prst="rect">
             <a:avLst/>
@@ -3498,7 +6146,7 @@
           <a:effectLst/>
         </p:spPr>
         <p:txBody>
-          <a:bodyPr wrap="none" lIns="27432" rIns="27432" tIns="18288" bIns="18288" anchor="ctr">
+          <a:bodyPr wrap="none" lIns="18288" rIns="18288" tIns="18288" bIns="18288" anchor="t">
             <a:spAutoFit/>
           </a:bodyPr>
           <a:lstStyle/>
@@ -3509,51 +6157,67 @@
               </a:spcAft>
             </a:pPr>
             <a:r>
-              <a:rPr sz="1728" b="0" i="0">
+              <a:rPr sz="1300" b="1" i="0">
+                <a:solidFill>
+                  <a:srgbClr val="F2B880"/>
+                </a:solidFill>
+                <a:latin typeface="Arial"/>
+              </a:rPr>
+              <a:t>Half-radius energy</a:t>
+            </a:r>
+          </a:p>
+        </p:txBody>
+      </p:sp>
+      <p:sp>
+        <p:nvSpPr>
+          <p:cNvPr id="73" name="C1-E19 text 71" descr="sci-ppt:o071"/>
+          <p:cNvSpPr txBox="1"/>
+          <p:nvPr/>
+        </p:nvSpPr>
+        <p:spPr>
+          <a:xfrm>
+            <a:off x="7315200" y="3960368"/>
+            <a:ext cx="4389120" cy="231648"/>
+          </a:xfrm>
+          <a:prstGeom prst="rect">
+            <a:avLst/>
+          </a:prstGeom>
+          <a:noFill/>
+          <a:effectLst/>
+        </p:spPr>
+        <p:txBody>
+          <a:bodyPr wrap="none" lIns="18288" rIns="18288" tIns="18288" bIns="18288" anchor="t">
+            <a:spAutoFit/>
+          </a:bodyPr>
+          <a:lstStyle/>
+          <a:p>
+            <a:pPr algn="l">
+              <a:spcAft>
+                <a:spcPts val="0"/>
+              </a:spcAft>
+            </a:pPr>
+            <a:r>
+              <a:rPr sz="1200" b="0" i="0">
                 <a:solidFill>
                   <a:srgbClr val="E7F0F3"/>
                 </a:solidFill>
                 <a:latin typeface="Arial"/>
               </a:rPr>
-              <a:t>Signed wall speed: Ṙ; acceleration: R̈</a:t>
-            </a:r>
-          </a:p>
-        </p:txBody>
-      </p:sp>
-      <p:cxnSp>
-        <p:nvCxnSpPr>
-          <p:cNvPr id="14" name="arrow13" descr="sci-ppt:C1-E19-013"/>
-          <p:cNvCxnSpPr/>
-          <p:nvPr/>
-        </p:nvCxnSpPr>
-        <p:spPr>
-          <a:xfrm>
-            <a:off x="1950720" y="2621280"/>
-            <a:ext cx="548640" cy="0"/>
-          </a:xfrm>
-          <a:prstGeom prst="line">
-            <a:avLst/>
-          </a:prstGeom>
-          <a:ln w="25400">
-            <a:solidFill>
-              <a:srgbClr val="F6BC77"/>
-            </a:solidFill>
-            <a:headEnd type="none" w="med" len="med"/>
-            <a:tailEnd type="triangle" w="med" len="med"/>
-          </a:ln>
-          <a:effectLst/>
-        </p:spPr>
-      </p:cxnSp>
-      <p:sp>
-        <p:nvSpPr>
-          <p:cNvPr id="15" name="text14" descr="sci-ppt:C1-E19-014"/>
+              <a:t>Kₗ = (7/8) E_B = 9.8960 nJ</a:t>
+            </a:r>
+          </a:p>
+        </p:txBody>
+      </p:sp>
+      <p:sp>
+        <p:nvSpPr>
+          <p:cNvPr id="74" name="C1-E19 text 72" descr="sci-ppt:o072"/>
           <p:cNvSpPr txBox="1"/>
           <p:nvPr/>
         </p:nvSpPr>
         <p:spPr>
           <a:xfrm>
-            <a:off x="1097280" y="975360"/>
-            <a:ext cx="4267200" cy="340156"/>
+            <a:off x="7223760" y="4402327"/>
+            <a:ext cx="4480560" cy="402081"/>
           </a:xfrm>
           <a:prstGeom prst="rect">
             <a:avLst/>
@@ -3562,7 +6226,7 @@
           <a:effectLst/>
         </p:spPr>
         <p:txBody>
-          <a:bodyPr wrap="none" lIns="27432" rIns="27432" tIns="18288" bIns="18288" anchor="ctr">
+          <a:bodyPr wrap="none" lIns="18288" rIns="18288" tIns="18288" bIns="18288" anchor="t">
             <a:spAutoFit/>
           </a:bodyPr>
           <a:lstStyle/>
@@ -3573,39 +6237,15 @@
               </a:spcAft>
             </a:pPr>
             <a:r>
-              <a:rPr sz="1728" b="0" i="0">
+              <a:rPr sz="1150" b="0" i="0">
                 <a:solidFill>
-                  <a:srgbClr val="F6BC77"/>
+                  <a:srgbClr val="B4C7D2"/>
                 </a:solidFill>
                 <a:latin typeface="Arial"/>
               </a:rPr>
-              <a:t>Collapse: Ṙ &lt; 0</a:t>
-            </a:r>
-          </a:p>
-        </p:txBody>
-      </p:sp>
-      <p:sp>
-        <p:nvSpPr>
-          <p:cNvPr id="16" name="text15" descr="sci-ppt:C1-E19-015"/>
-          <p:cNvSpPr txBox="1"/>
-          <p:nvPr/>
-        </p:nvSpPr>
-        <p:spPr>
-          <a:xfrm>
-            <a:off x="365760" y="4974336"/>
-            <a:ext cx="5547360" cy="321259"/>
-          </a:xfrm>
-          <a:prstGeom prst="rect">
-            <a:avLst/>
-          </a:prstGeom>
-          <a:noFill/>
-          <a:effectLst/>
-        </p:spPr>
-        <p:txBody>
-          <a:bodyPr wrap="none" lIns="27432" rIns="27432" tIns="18288" bIns="18288" anchor="ctr">
-            <a:spAutoFit/>
-          </a:bodyPr>
-          <a:lstStyle/>
+              <a:t>Inputs: ρ = 1000 kg/m³, Δp_c = 100 kPa, Rₘₐₓ = 30 µm. A</a:t>
+            </a:r>
+          </a:p>
           <a:p>
             <a:pPr algn="l">
               <a:spcAft>
@@ -3613,27 +6253,27 @@
               </a:spcAft>
             </a:pPr>
             <a:r>
-              <a:rPr sz="1632" b="0" i="0">
+              <a:rPr sz="1150" b="0" i="0">
                 <a:solidFill>
-                  <a:srgbClr val="E7F0F3"/>
+                  <a:srgbClr val="B4C7D2"/>
                 </a:solidFill>
                 <a:latin typeface="Arial"/>
               </a:rPr>
-              <a:t>Rmax = 30 μm</a:t>
-            </a:r>
-          </a:p>
-        </p:txBody>
-      </p:sp>
-      <p:sp>
-        <p:nvSpPr>
-          <p:cNvPr id="17" name="text16" descr="sci-ppt:C1-E19-016"/>
+              <a:t>teaching case, not a measurement.</a:t>
+            </a:r>
+          </a:p>
+        </p:txBody>
+      </p:sp>
+      <p:sp>
+        <p:nvSpPr>
+          <p:cNvPr id="75" name="C1-E19 text 73" descr="sci-ppt:o073"/>
           <p:cNvSpPr txBox="1"/>
           <p:nvPr/>
         </p:nvSpPr>
         <p:spPr>
           <a:xfrm>
-            <a:off x="365760" y="5266944"/>
-            <a:ext cx="5547360" cy="321259"/>
+            <a:off x="320040" y="6510528"/>
+            <a:ext cx="11521440" cy="200660"/>
           </a:xfrm>
           <a:prstGeom prst="rect">
             <a:avLst/>
@@ -3642,7 +6282,7 @@
           <a:effectLst/>
         </p:spPr>
         <p:txBody>
-          <a:bodyPr wrap="none" lIns="27432" rIns="27432" tIns="18288" bIns="18288" anchor="ctr">
+          <a:bodyPr wrap="none" lIns="18288" rIns="18288" tIns="18288" bIns="18288" anchor="t">
             <a:spAutoFit/>
           </a:bodyPr>
           <a:lstStyle/>
@@ -3653,293 +6293,13 @@
               </a:spcAft>
             </a:pPr>
             <a:r>
-              <a:rPr sz="1632" b="0" i="0">
-                <a:solidFill>
-                  <a:srgbClr val="E7F0F3"/>
-                </a:solidFill>
-                <a:latin typeface="Arial"/>
-              </a:rPr>
-              <a:t>ρ = 1000 kg/m³</a:t>
-            </a:r>
-          </a:p>
-        </p:txBody>
-      </p:sp>
-      <p:sp>
-        <p:nvSpPr>
-          <p:cNvPr id="18" name="text17" descr="sci-ppt:C1-E19-017"/>
-          <p:cNvSpPr txBox="1"/>
-          <p:nvPr/>
-        </p:nvSpPr>
-        <p:spPr>
-          <a:xfrm>
-            <a:off x="365760" y="5559552"/>
-            <a:ext cx="5547360" cy="321259"/>
-          </a:xfrm>
-          <a:prstGeom prst="rect">
-            <a:avLst/>
-          </a:prstGeom>
-          <a:noFill/>
-          <a:effectLst/>
-        </p:spPr>
-        <p:txBody>
-          <a:bodyPr wrap="none" lIns="27432" rIns="27432" tIns="18288" bIns="18288" anchor="ctr">
-            <a:spAutoFit/>
-          </a:bodyPr>
-          <a:lstStyle/>
-          <a:p>
-            <a:pPr algn="l">
-              <a:spcAft>
-                <a:spcPts val="0"/>
-              </a:spcAft>
-            </a:pPr>
-            <a:r>
-              <a:rPr sz="1632" b="0" i="0">
-                <a:solidFill>
-                  <a:srgbClr val="E7F0F3"/>
-                </a:solidFill>
-                <a:latin typeface="Arial"/>
-              </a:rPr>
-              <a:t>tc = 2.74404 μs</a:t>
-            </a:r>
-          </a:p>
-        </p:txBody>
-      </p:sp>
-      <p:sp>
-        <p:nvSpPr>
-          <p:cNvPr id="19" name="text18" descr="sci-ppt:C1-E19-018"/>
-          <p:cNvSpPr txBox="1"/>
-          <p:nvPr/>
-        </p:nvSpPr>
-        <p:spPr>
-          <a:xfrm>
-            <a:off x="365760" y="5852160"/>
-            <a:ext cx="5547360" cy="321259"/>
-          </a:xfrm>
-          <a:prstGeom prst="rect">
-            <a:avLst/>
-          </a:prstGeom>
-          <a:noFill/>
-          <a:effectLst/>
-        </p:spPr>
-        <p:txBody>
-          <a:bodyPr wrap="none" lIns="27432" rIns="27432" tIns="18288" bIns="18288" anchor="ctr">
-            <a:spAutoFit/>
-          </a:bodyPr>
-          <a:lstStyle/>
-          <a:p>
-            <a:pPr algn="l">
-              <a:spcAft>
-                <a:spcPts val="0"/>
-              </a:spcAft>
-            </a:pPr>
-            <a:r>
-              <a:rPr sz="1632" b="0" i="0">
-                <a:solidFill>
-                  <a:srgbClr val="E7F0F3"/>
-                </a:solidFill>
-                <a:latin typeface="Arial"/>
-              </a:rPr>
-              <a:t>Ṙ = −21.6025 m/s</a:t>
-            </a:r>
-          </a:p>
-        </p:txBody>
-      </p:sp>
-      <p:sp>
-        <p:nvSpPr>
-          <p:cNvPr id="20" name="text19" descr="sci-ppt:C1-E19-019"/>
-          <p:cNvSpPr txBox="1"/>
-          <p:nvPr/>
-        </p:nvSpPr>
-        <p:spPr>
-          <a:xfrm>
-            <a:off x="6156960" y="4974336"/>
-            <a:ext cx="5547360" cy="321259"/>
-          </a:xfrm>
-          <a:prstGeom prst="rect">
-            <a:avLst/>
-          </a:prstGeom>
-          <a:noFill/>
-          <a:effectLst/>
-        </p:spPr>
-        <p:txBody>
-          <a:bodyPr wrap="none" lIns="27432" rIns="27432" tIns="18288" bIns="18288" anchor="ctr">
-            <a:spAutoFit/>
-          </a:bodyPr>
-          <a:lstStyle/>
-          <a:p>
-            <a:pPr algn="l">
-              <a:spcAft>
-                <a:spcPts val="0"/>
-              </a:spcAft>
-            </a:pPr>
-            <a:r>
-              <a:rPr sz="1632" b="0" i="0">
-                <a:solidFill>
-                  <a:srgbClr val="E7F0F3"/>
-                </a:solidFill>
-                <a:latin typeface="Arial"/>
-              </a:rPr>
-              <a:t>R = 15 μm</a:t>
-            </a:r>
-          </a:p>
-        </p:txBody>
-      </p:sp>
-      <p:sp>
-        <p:nvSpPr>
-          <p:cNvPr id="21" name="text20" descr="sci-ppt:C1-E19-020"/>
-          <p:cNvSpPr txBox="1"/>
-          <p:nvPr/>
-        </p:nvSpPr>
-        <p:spPr>
-          <a:xfrm>
-            <a:off x="6156960" y="5266944"/>
-            <a:ext cx="5547360" cy="321259"/>
-          </a:xfrm>
-          <a:prstGeom prst="rect">
-            <a:avLst/>
-          </a:prstGeom>
-          <a:noFill/>
-          <a:effectLst/>
-        </p:spPr>
-        <p:txBody>
-          <a:bodyPr wrap="none" lIns="27432" rIns="27432" tIns="18288" bIns="18288" anchor="ctr">
-            <a:spAutoFit/>
-          </a:bodyPr>
-          <a:lstStyle/>
-          <a:p>
-            <a:pPr algn="l">
-              <a:spcAft>
-                <a:spcPts val="0"/>
-              </a:spcAft>
-            </a:pPr>
-            <a:r>
-              <a:rPr sz="1632" b="0" i="0">
-                <a:solidFill>
-                  <a:srgbClr val="E7F0F3"/>
-                </a:solidFill>
-                <a:latin typeface="Arial"/>
-              </a:rPr>
-              <a:t>Δpc = 100 kPa</a:t>
-            </a:r>
-          </a:p>
-        </p:txBody>
-      </p:sp>
-      <p:sp>
-        <p:nvSpPr>
-          <p:cNvPr id="22" name="text21" descr="sci-ppt:C1-E19-021"/>
-          <p:cNvSpPr txBox="1"/>
-          <p:nvPr/>
-        </p:nvSpPr>
-        <p:spPr>
-          <a:xfrm>
-            <a:off x="6156960" y="5559552"/>
-            <a:ext cx="5547360" cy="321259"/>
-          </a:xfrm>
-          <a:prstGeom prst="rect">
-            <a:avLst/>
-          </a:prstGeom>
-          <a:noFill/>
-          <a:effectLst/>
-        </p:spPr>
-        <p:txBody>
-          <a:bodyPr wrap="none" lIns="27432" rIns="27432" tIns="18288" bIns="18288" anchor="ctr">
-            <a:spAutoFit/>
-          </a:bodyPr>
-          <a:lstStyle/>
-          <a:p>
-            <a:pPr algn="l">
-              <a:spcAft>
-                <a:spcPts val="0"/>
-              </a:spcAft>
-            </a:pPr>
-            <a:r>
-              <a:rPr sz="1632" b="0" i="0">
-                <a:solidFill>
-                  <a:srgbClr val="E7F0F3"/>
-                </a:solidFill>
-                <a:latin typeface="Arial"/>
-              </a:rPr>
-              <a:t>EB = 11.3097 nJ</a:t>
-            </a:r>
-          </a:p>
-        </p:txBody>
-      </p:sp>
-      <p:sp>
-        <p:nvSpPr>
-          <p:cNvPr id="23" name="text22" descr="sci-ppt:C1-E19-022"/>
-          <p:cNvSpPr txBox="1"/>
-          <p:nvPr/>
-        </p:nvSpPr>
-        <p:spPr>
-          <a:xfrm>
-            <a:off x="6156960" y="5852160"/>
-            <a:ext cx="5547360" cy="321259"/>
-          </a:xfrm>
-          <a:prstGeom prst="rect">
-            <a:avLst/>
-          </a:prstGeom>
-          <a:noFill/>
-          <a:effectLst/>
-        </p:spPr>
-        <p:txBody>
-          <a:bodyPr wrap="none" lIns="27432" rIns="27432" tIns="18288" bIns="18288" anchor="ctr">
-            <a:spAutoFit/>
-          </a:bodyPr>
-          <a:lstStyle/>
-          <a:p>
-            <a:pPr algn="l">
-              <a:spcAft>
-                <a:spcPts val="0"/>
-              </a:spcAft>
-            </a:pPr>
-            <a:r>
-              <a:rPr sz="1632" b="0" i="0">
-                <a:solidFill>
-                  <a:srgbClr val="E7F0F3"/>
-                </a:solidFill>
-                <a:latin typeface="Arial"/>
-              </a:rPr>
-              <a:t>Kl = 9.89602 nJ</a:t>
-            </a:r>
-          </a:p>
-        </p:txBody>
-      </p:sp>
-      <p:sp>
-        <p:nvSpPr>
-          <p:cNvPr id="24" name="text23" descr="sci-ppt:C1-E19-023"/>
-          <p:cNvSpPr txBox="1"/>
-          <p:nvPr/>
-        </p:nvSpPr>
-        <p:spPr>
-          <a:xfrm>
-            <a:off x="365760" y="6339840"/>
-            <a:ext cx="11277600" cy="302361"/>
-          </a:xfrm>
-          <a:prstGeom prst="rect">
-            <a:avLst/>
-          </a:prstGeom>
-          <a:noFill/>
-          <a:effectLst/>
-        </p:spPr>
-        <p:txBody>
-          <a:bodyPr wrap="none" lIns="27432" rIns="27432" tIns="18288" bIns="18288" anchor="ctr">
-            <a:spAutoFit/>
-          </a:bodyPr>
-          <a:lstStyle/>
-          <a:p>
-            <a:pPr algn="l">
-              <a:spcAft>
-                <a:spcPts val="0"/>
-              </a:spcAft>
-            </a:pPr>
-            <a:r>
-              <a:rPr sz="1536" b="0" i="0">
+              <a:rPr sz="1000" b="0" i="0">
                 <a:solidFill>
                   <a:srgbClr val="B4C7D2"/>
                 </a:solidFill>
                 <a:latin typeface="Arial"/>
               </a:rPr>
-              <a:t>These values are a spherical control, not a PFC performance prediction</a:t>
+              <a:t>All values from Eq. C1-E19 and the Rayleigh curve of Eq. C1-E16.</a:t>
             </a:r>
           </a:p>
         </p:txBody>

--- a/assets/figures-editable/c1-c2/c1-e19.pptx
+++ b/assets/figures-editable/c1-c2/c1-e19.pptx
@@ -3131,7 +3131,7 @@
                 </a:solidFill>
                 <a:latin typeface="Arial"/>
               </a:rPr>
-              <a:t>C1-E19 · Declared teaching calculation</a:t>
+              <a:t>C1-E19 · Ideal-trajectory diagnostic, not a physical limit</a:t>
             </a:r>
           </a:p>
         </p:txBody>
@@ -3144,8 +3144,8 @@
         </p:nvCxnSpPr>
         <p:spPr>
           <a:xfrm>
-            <a:off x="914400" y="3108960"/>
-            <a:ext cx="5760720" cy="0"/>
+            <a:off x="914400" y="5029200"/>
+            <a:ext cx="6035040" cy="0"/>
           </a:xfrm>
           <a:prstGeom prst="line">
             <a:avLst/>
@@ -3166,8 +3166,8 @@
         </p:nvCxnSpPr>
         <p:spPr>
           <a:xfrm>
-            <a:off x="914400" y="1280160"/>
-            <a:ext cx="0" cy="1828800"/>
+            <a:off x="914400" y="1371600"/>
+            <a:ext cx="0" cy="3657600"/>
           </a:xfrm>
           <a:prstGeom prst="line">
             <a:avLst/>
@@ -3188,7 +3188,7 @@
         </p:nvCxnSpPr>
         <p:spPr>
           <a:xfrm>
-            <a:off x="914400" y="3108960"/>
+            <a:off x="914400" y="5029200"/>
             <a:ext cx="0" cy="64008"/>
           </a:xfrm>
           <a:prstGeom prst="line">
@@ -3210,8 +3210,8 @@
         </p:nvCxnSpPr>
         <p:spPr>
           <a:xfrm>
-            <a:off x="914400" y="1280160"/>
-            <a:ext cx="0" cy="1828800"/>
+            <a:off x="914400" y="1371600"/>
+            <a:ext cx="0" cy="3657600"/>
           </a:xfrm>
           <a:prstGeom prst="line">
             <a:avLst/>
@@ -3232,7 +3232,7 @@
         </p:nvSpPr>
         <p:spPr>
           <a:xfrm>
-            <a:off x="457200" y="3191256"/>
+            <a:off x="457200" y="5111496"/>
             <a:ext cx="914400" cy="208407"/>
           </a:xfrm>
           <a:prstGeom prst="rect">
@@ -3259,7 +3259,7 @@
                 </a:solidFill>
                 <a:latin typeface="Arial"/>
               </a:rPr>
-              <a:t>0</a:t>
+              <a:t>0.025</a:t>
             </a:r>
           </a:p>
         </p:txBody>
@@ -3272,7 +3272,7 @@
         </p:nvCxnSpPr>
         <p:spPr>
           <a:xfrm>
-            <a:off x="2834639" y="3108960"/>
+            <a:off x="2048395" y="5029200"/>
             <a:ext cx="0" cy="64008"/>
           </a:xfrm>
           <a:prstGeom prst="line">
@@ -3294,8 +3294,8 @@
         </p:nvCxnSpPr>
         <p:spPr>
           <a:xfrm>
-            <a:off x="2834639" y="1280160"/>
-            <a:ext cx="0" cy="1828800"/>
+            <a:off x="2048395" y="1371600"/>
+            <a:ext cx="0" cy="3657600"/>
           </a:xfrm>
           <a:prstGeom prst="line">
             <a:avLst/>
@@ -3316,7 +3316,343 @@
         </p:nvSpPr>
         <p:spPr>
           <a:xfrm>
-            <a:off x="2377439" y="3191256"/>
+            <a:off x="1591195" y="5111496"/>
+            <a:ext cx="914400" cy="208407"/>
+          </a:xfrm>
+          <a:prstGeom prst="rect">
+            <a:avLst/>
+          </a:prstGeom>
+          <a:noFill/>
+          <a:effectLst/>
+        </p:spPr>
+        <p:txBody>
+          <a:bodyPr wrap="none" lIns="18288" rIns="18288" tIns="18288" bIns="18288" anchor="t">
+            <a:spAutoFit/>
+          </a:bodyPr>
+          <a:lstStyle/>
+          <a:p>
+            <a:pPr algn="ctr">
+              <a:spcAft>
+                <a:spcPts val="0"/>
+              </a:spcAft>
+            </a:pPr>
+            <a:r>
+              <a:rPr sz="1050" b="0" i="0">
+                <a:solidFill>
+                  <a:srgbClr val="B4C7D2"/>
+                </a:solidFill>
+                <a:latin typeface="Arial"/>
+              </a:rPr>
+              <a:t>0.05</a:t>
+            </a:r>
+          </a:p>
+        </p:txBody>
+      </p:sp>
+      <p:cxnSp>
+        <p:nvCxnSpPr>
+          <p:cNvPr id="11" name="C1-E19 line 9" descr="sci-ppt:o009"/>
+          <p:cNvCxnSpPr/>
+          <p:nvPr/>
+        </p:nvCxnSpPr>
+        <p:spPr>
+          <a:xfrm>
+            <a:off x="3182390" y="5029200"/>
+            <a:ext cx="0" cy="64008"/>
+          </a:xfrm>
+          <a:prstGeom prst="line">
+            <a:avLst/>
+          </a:prstGeom>
+          <a:ln w="12700">
+            <a:solidFill>
+              <a:srgbClr val="B4C7D2"/>
+            </a:solidFill>
+          </a:ln>
+          <a:effectLst/>
+        </p:spPr>
+      </p:cxnSp>
+      <p:cxnSp>
+        <p:nvCxnSpPr>
+          <p:cNvPr id="12" name="C1-E19 line 10" descr="sci-ppt:o010"/>
+          <p:cNvCxnSpPr/>
+          <p:nvPr/>
+        </p:nvCxnSpPr>
+        <p:spPr>
+          <a:xfrm>
+            <a:off x="3182390" y="1371600"/>
+            <a:ext cx="0" cy="3657600"/>
+          </a:xfrm>
+          <a:prstGeom prst="line">
+            <a:avLst/>
+          </a:prstGeom>
+          <a:ln w="7620">
+            <a:solidFill>
+              <a:srgbClr val="2E4756"/>
+            </a:solidFill>
+          </a:ln>
+          <a:effectLst/>
+        </p:spPr>
+      </p:cxnSp>
+      <p:sp>
+        <p:nvSpPr>
+          <p:cNvPr id="13" name="C1-E19 text 11" descr="sci-ppt:o011"/>
+          <p:cNvSpPr txBox="1"/>
+          <p:nvPr/>
+        </p:nvSpPr>
+        <p:spPr>
+          <a:xfrm>
+            <a:off x="2725190" y="5111496"/>
+            <a:ext cx="914400" cy="208407"/>
+          </a:xfrm>
+          <a:prstGeom prst="rect">
+            <a:avLst/>
+          </a:prstGeom>
+          <a:noFill/>
+          <a:effectLst/>
+        </p:spPr>
+        <p:txBody>
+          <a:bodyPr wrap="none" lIns="18288" rIns="18288" tIns="18288" bIns="18288" anchor="t">
+            <a:spAutoFit/>
+          </a:bodyPr>
+          <a:lstStyle/>
+          <a:p>
+            <a:pPr algn="ctr">
+              <a:spcAft>
+                <a:spcPts val="0"/>
+              </a:spcAft>
+            </a:pPr>
+            <a:r>
+              <a:rPr sz="1050" b="0" i="0">
+                <a:solidFill>
+                  <a:srgbClr val="B4C7D2"/>
+                </a:solidFill>
+                <a:latin typeface="Arial"/>
+              </a:rPr>
+              <a:t>0.1</a:t>
+            </a:r>
+          </a:p>
+        </p:txBody>
+      </p:sp>
+      <p:cxnSp>
+        <p:nvCxnSpPr>
+          <p:cNvPr id="14" name="C1-E19 line 12" descr="sci-ppt:o012"/>
+          <p:cNvCxnSpPr/>
+          <p:nvPr/>
+        </p:nvCxnSpPr>
+        <p:spPr>
+          <a:xfrm>
+            <a:off x="4316385" y="5029200"/>
+            <a:ext cx="0" cy="64008"/>
+          </a:xfrm>
+          <a:prstGeom prst="line">
+            <a:avLst/>
+          </a:prstGeom>
+          <a:ln w="12700">
+            <a:solidFill>
+              <a:srgbClr val="B4C7D2"/>
+            </a:solidFill>
+          </a:ln>
+          <a:effectLst/>
+        </p:spPr>
+      </p:cxnSp>
+      <p:cxnSp>
+        <p:nvCxnSpPr>
+          <p:cNvPr id="15" name="C1-E19 line 13" descr="sci-ppt:o013"/>
+          <p:cNvCxnSpPr/>
+          <p:nvPr/>
+        </p:nvCxnSpPr>
+        <p:spPr>
+          <a:xfrm>
+            <a:off x="4316385" y="1371600"/>
+            <a:ext cx="0" cy="3657600"/>
+          </a:xfrm>
+          <a:prstGeom prst="line">
+            <a:avLst/>
+          </a:prstGeom>
+          <a:ln w="7620">
+            <a:solidFill>
+              <a:srgbClr val="2E4756"/>
+            </a:solidFill>
+          </a:ln>
+          <a:effectLst/>
+        </p:spPr>
+      </p:cxnSp>
+      <p:sp>
+        <p:nvSpPr>
+          <p:cNvPr id="16" name="C1-E19 text 14" descr="sci-ppt:o014"/>
+          <p:cNvSpPr txBox="1"/>
+          <p:nvPr/>
+        </p:nvSpPr>
+        <p:spPr>
+          <a:xfrm>
+            <a:off x="3859185" y="5111496"/>
+            <a:ext cx="914400" cy="208407"/>
+          </a:xfrm>
+          <a:prstGeom prst="rect">
+            <a:avLst/>
+          </a:prstGeom>
+          <a:noFill/>
+          <a:effectLst/>
+        </p:spPr>
+        <p:txBody>
+          <a:bodyPr wrap="none" lIns="18288" rIns="18288" tIns="18288" bIns="18288" anchor="t">
+            <a:spAutoFit/>
+          </a:bodyPr>
+          <a:lstStyle/>
+          <a:p>
+            <a:pPr algn="ctr">
+              <a:spcAft>
+                <a:spcPts val="0"/>
+              </a:spcAft>
+            </a:pPr>
+            <a:r>
+              <a:rPr sz="1050" b="0" i="0">
+                <a:solidFill>
+                  <a:srgbClr val="B4C7D2"/>
+                </a:solidFill>
+                <a:latin typeface="Arial"/>
+              </a:rPr>
+              <a:t>0.2</a:t>
+            </a:r>
+          </a:p>
+        </p:txBody>
+      </p:sp>
+      <p:cxnSp>
+        <p:nvCxnSpPr>
+          <p:cNvPr id="17" name="C1-E19 line 15" descr="sci-ppt:o015"/>
+          <p:cNvCxnSpPr/>
+          <p:nvPr/>
+        </p:nvCxnSpPr>
+        <p:spPr>
+          <a:xfrm>
+            <a:off x="5815444" y="5029200"/>
+            <a:ext cx="0" cy="64008"/>
+          </a:xfrm>
+          <a:prstGeom prst="line">
+            <a:avLst/>
+          </a:prstGeom>
+          <a:ln w="12700">
+            <a:solidFill>
+              <a:srgbClr val="B4C7D2"/>
+            </a:solidFill>
+          </a:ln>
+          <a:effectLst/>
+        </p:spPr>
+      </p:cxnSp>
+      <p:cxnSp>
+        <p:nvCxnSpPr>
+          <p:cNvPr id="18" name="C1-E19 line 16" descr="sci-ppt:o016"/>
+          <p:cNvCxnSpPr/>
+          <p:nvPr/>
+        </p:nvCxnSpPr>
+        <p:spPr>
+          <a:xfrm>
+            <a:off x="5815444" y="1371600"/>
+            <a:ext cx="0" cy="3657600"/>
+          </a:xfrm>
+          <a:prstGeom prst="line">
+            <a:avLst/>
+          </a:prstGeom>
+          <a:ln w="7620">
+            <a:solidFill>
+              <a:srgbClr val="2E4756"/>
+            </a:solidFill>
+          </a:ln>
+          <a:effectLst/>
+        </p:spPr>
+      </p:cxnSp>
+      <p:sp>
+        <p:nvSpPr>
+          <p:cNvPr id="19" name="C1-E19 text 17" descr="sci-ppt:o017"/>
+          <p:cNvSpPr txBox="1"/>
+          <p:nvPr/>
+        </p:nvSpPr>
+        <p:spPr>
+          <a:xfrm>
+            <a:off x="5358244" y="5111496"/>
+            <a:ext cx="914400" cy="208407"/>
+          </a:xfrm>
+          <a:prstGeom prst="rect">
+            <a:avLst/>
+          </a:prstGeom>
+          <a:noFill/>
+          <a:effectLst/>
+        </p:spPr>
+        <p:txBody>
+          <a:bodyPr wrap="none" lIns="18288" rIns="18288" tIns="18288" bIns="18288" anchor="t">
+            <a:spAutoFit/>
+          </a:bodyPr>
+          <a:lstStyle/>
+          <a:p>
+            <a:pPr algn="ctr">
+              <a:spcAft>
+                <a:spcPts val="0"/>
+              </a:spcAft>
+            </a:pPr>
+            <a:r>
+              <a:rPr sz="1050" b="0" i="0">
+                <a:solidFill>
+                  <a:srgbClr val="B4C7D2"/>
+                </a:solidFill>
+                <a:latin typeface="Arial"/>
+              </a:rPr>
+              <a:t>0.5</a:t>
+            </a:r>
+          </a:p>
+        </p:txBody>
+      </p:sp>
+      <p:cxnSp>
+        <p:nvCxnSpPr>
+          <p:cNvPr id="20" name="C1-E19 line 18" descr="sci-ppt:o018"/>
+          <p:cNvCxnSpPr/>
+          <p:nvPr/>
+        </p:nvCxnSpPr>
+        <p:spPr>
+          <a:xfrm>
+            <a:off x="6949440" y="5029200"/>
+            <a:ext cx="0" cy="64008"/>
+          </a:xfrm>
+          <a:prstGeom prst="line">
+            <a:avLst/>
+          </a:prstGeom>
+          <a:ln w="12700">
+            <a:solidFill>
+              <a:srgbClr val="B4C7D2"/>
+            </a:solidFill>
+          </a:ln>
+          <a:effectLst/>
+        </p:spPr>
+      </p:cxnSp>
+      <p:cxnSp>
+        <p:nvCxnSpPr>
+          <p:cNvPr id="21" name="C1-E19 line 19" descr="sci-ppt:o019"/>
+          <p:cNvCxnSpPr/>
+          <p:nvPr/>
+        </p:nvCxnSpPr>
+        <p:spPr>
+          <a:xfrm>
+            <a:off x="6949440" y="1371600"/>
+            <a:ext cx="0" cy="3657600"/>
+          </a:xfrm>
+          <a:prstGeom prst="line">
+            <a:avLst/>
+          </a:prstGeom>
+          <a:ln w="7620">
+            <a:solidFill>
+              <a:srgbClr val="2E4756"/>
+            </a:solidFill>
+          </a:ln>
+          <a:effectLst/>
+        </p:spPr>
+      </p:cxnSp>
+      <p:sp>
+        <p:nvSpPr>
+          <p:cNvPr id="22" name="C1-E19 text 20" descr="sci-ppt:o020"/>
+          <p:cNvSpPr txBox="1"/>
+          <p:nvPr/>
+        </p:nvSpPr>
+        <p:spPr>
+          <a:xfrm>
+            <a:off x="6492240" y="5111496"/>
             <a:ext cx="914400" cy="208407"/>
           </a:xfrm>
           <a:prstGeom prst="rect">
@@ -3350,14 +3686,14 @@
       </p:sp>
       <p:cxnSp>
         <p:nvCxnSpPr>
-          <p:cNvPr id="11" name="C1-E19 line 9" descr="sci-ppt:o009"/>
+          <p:cNvPr id="23" name="C1-E19 line 21" descr="sci-ppt:o021"/>
           <p:cNvCxnSpPr/>
           <p:nvPr/>
         </p:nvCxnSpPr>
         <p:spPr>
           <a:xfrm>
-            <a:off x="4754879" y="3108960"/>
-            <a:ext cx="0" cy="64008"/>
+            <a:off x="850392" y="5029200"/>
+            <a:ext cx="64008" cy="0"/>
           </a:xfrm>
           <a:prstGeom prst="line">
             <a:avLst/>
@@ -3372,14 +3708,36 @@
       </p:cxnSp>
       <p:cxnSp>
         <p:nvCxnSpPr>
-          <p:cNvPr id="12" name="C1-E19 line 10" descr="sci-ppt:o010"/>
+          <p:cNvPr id="24" name="C1-E19 line 22" descr="sci-ppt:o022"/>
           <p:cNvCxnSpPr/>
           <p:nvPr/>
         </p:nvCxnSpPr>
         <p:spPr>
           <a:xfrm>
-            <a:off x="4754879" y="1280160"/>
-            <a:ext cx="0" cy="1828800"/>
+            <a:off x="850392" y="3810000"/>
+            <a:ext cx="64008" cy="0"/>
+          </a:xfrm>
+          <a:prstGeom prst="line">
+            <a:avLst/>
+          </a:prstGeom>
+          <a:ln w="12700">
+            <a:solidFill>
+              <a:srgbClr val="B4C7D2"/>
+            </a:solidFill>
+          </a:ln>
+          <a:effectLst/>
+        </p:spPr>
+      </p:cxnSp>
+      <p:cxnSp>
+        <p:nvCxnSpPr>
+          <p:cNvPr id="25" name="C1-E19 line 23" descr="sci-ppt:o023"/>
+          <p:cNvCxnSpPr/>
+          <p:nvPr/>
+        </p:nvCxnSpPr>
+        <p:spPr>
+          <a:xfrm>
+            <a:off x="914400" y="3810000"/>
+            <a:ext cx="6035040" cy="0"/>
           </a:xfrm>
           <a:prstGeom prst="line">
             <a:avLst/>
@@ -3394,14 +3752,14 @@
       </p:cxnSp>
       <p:sp>
         <p:nvSpPr>
-          <p:cNvPr id="13" name="C1-E19 text 11" descr="sci-ppt:o011"/>
+          <p:cNvPr id="26" name="C1-E19 text 24" descr="sci-ppt:o024"/>
           <p:cNvSpPr txBox="1"/>
           <p:nvPr/>
         </p:nvSpPr>
         <p:spPr>
           <a:xfrm>
-            <a:off x="4297679" y="3191256"/>
-            <a:ext cx="914400" cy="208407"/>
+            <a:off x="45720" y="3727704"/>
+            <a:ext cx="777240" cy="208407"/>
           </a:xfrm>
           <a:prstGeom prst="rect">
             <a:avLst/>
@@ -3415,7 +3773,7 @@
           </a:bodyPr>
           <a:lstStyle/>
           <a:p>
-            <a:pPr algn="ctr">
+            <a:pPr algn="r">
               <a:spcAft>
                 <a:spcPts val="0"/>
               </a:spcAft>
@@ -3427,21 +3785,21 @@
                 </a:solidFill>
                 <a:latin typeface="Arial"/>
               </a:rPr>
-              <a:t>2</a:t>
+              <a:t>0.01</a:t>
             </a:r>
           </a:p>
         </p:txBody>
       </p:sp>
       <p:cxnSp>
         <p:nvCxnSpPr>
-          <p:cNvPr id="14" name="C1-E19 line 12" descr="sci-ppt:o012"/>
+          <p:cNvPr id="27" name="C1-E19 line 25" descr="sci-ppt:o025"/>
           <p:cNvCxnSpPr/>
           <p:nvPr/>
         </p:nvCxnSpPr>
         <p:spPr>
           <a:xfrm>
-            <a:off x="6675120" y="3108960"/>
-            <a:ext cx="0" cy="64008"/>
+            <a:off x="850392" y="2590800"/>
+            <a:ext cx="64008" cy="0"/>
           </a:xfrm>
           <a:prstGeom prst="line">
             <a:avLst/>
@@ -3456,14 +3814,14 @@
       </p:cxnSp>
       <p:cxnSp>
         <p:nvCxnSpPr>
-          <p:cNvPr id="15" name="C1-E19 line 13" descr="sci-ppt:o013"/>
+          <p:cNvPr id="28" name="C1-E19 line 26" descr="sci-ppt:o026"/>
           <p:cNvCxnSpPr/>
           <p:nvPr/>
         </p:nvCxnSpPr>
         <p:spPr>
           <a:xfrm>
-            <a:off x="6675120" y="1280160"/>
-            <a:ext cx="0" cy="1828800"/>
+            <a:off x="914400" y="2590800"/>
+            <a:ext cx="6035040" cy="0"/>
           </a:xfrm>
           <a:prstGeom prst="line">
             <a:avLst/>
@@ -3478,14 +3836,14 @@
       </p:cxnSp>
       <p:sp>
         <p:nvSpPr>
-          <p:cNvPr id="16" name="C1-E19 text 14" descr="sci-ppt:o014"/>
+          <p:cNvPr id="29" name="C1-E19 text 27" descr="sci-ppt:o027"/>
           <p:cNvSpPr txBox="1"/>
           <p:nvPr/>
         </p:nvSpPr>
         <p:spPr>
           <a:xfrm>
-            <a:off x="6217920" y="3191256"/>
-            <a:ext cx="914400" cy="208407"/>
+            <a:off x="45720" y="2508504"/>
+            <a:ext cx="777240" cy="208407"/>
           </a:xfrm>
           <a:prstGeom prst="rect">
             <a:avLst/>
@@ -3499,7 +3857,7 @@
           </a:bodyPr>
           <a:lstStyle/>
           <a:p>
-            <a:pPr algn="ctr">
+            <a:pPr algn="r">
               <a:spcAft>
                 <a:spcPts val="0"/>
               </a:spcAft>
@@ -3511,20 +3869,20 @@
                 </a:solidFill>
                 <a:latin typeface="Arial"/>
               </a:rPr>
-              <a:t>3</a:t>
+              <a:t>0.1</a:t>
             </a:r>
           </a:p>
         </p:txBody>
       </p:sp>
       <p:cxnSp>
         <p:nvCxnSpPr>
-          <p:cNvPr id="17" name="C1-E19 line 15" descr="sci-ppt:o015"/>
+          <p:cNvPr id="30" name="C1-E19 line 28" descr="sci-ppt:o028"/>
           <p:cNvCxnSpPr/>
           <p:nvPr/>
         </p:nvCxnSpPr>
         <p:spPr>
           <a:xfrm>
-            <a:off x="850392" y="3108960"/>
+            <a:off x="850392" y="1371600"/>
             <a:ext cx="64008" cy="0"/>
           </a:xfrm>
           <a:prstGeom prst="line">
@@ -3540,36 +3898,14 @@
       </p:cxnSp>
       <p:cxnSp>
         <p:nvCxnSpPr>
-          <p:cNvPr id="18" name="C1-E19 line 16" descr="sci-ppt:o016"/>
+          <p:cNvPr id="31" name="C1-E19 line 29" descr="sci-ppt:o029"/>
           <p:cNvCxnSpPr/>
           <p:nvPr/>
         </p:nvCxnSpPr>
         <p:spPr>
           <a:xfrm>
-            <a:off x="850392" y="2537460"/>
-            <a:ext cx="64008" cy="0"/>
-          </a:xfrm>
-          <a:prstGeom prst="line">
-            <a:avLst/>
-          </a:prstGeom>
-          <a:ln w="12700">
-            <a:solidFill>
-              <a:srgbClr val="B4C7D2"/>
-            </a:solidFill>
-          </a:ln>
-          <a:effectLst/>
-        </p:spPr>
-      </p:cxnSp>
-      <p:cxnSp>
-        <p:nvCxnSpPr>
-          <p:cNvPr id="19" name="C1-E19 line 17" descr="sci-ppt:o017"/>
-          <p:cNvCxnSpPr/>
-          <p:nvPr/>
-        </p:nvCxnSpPr>
-        <p:spPr>
-          <a:xfrm>
-            <a:off x="914400" y="2537460"/>
-            <a:ext cx="5760720" cy="0"/>
+            <a:off x="914400" y="1371600"/>
+            <a:ext cx="6035040" cy="0"/>
           </a:xfrm>
           <a:prstGeom prst="line">
             <a:avLst/>
@@ -3584,13 +3920,13 @@
       </p:cxnSp>
       <p:sp>
         <p:nvSpPr>
-          <p:cNvPr id="20" name="C1-E19 text 18" descr="sci-ppt:o018"/>
+          <p:cNvPr id="32" name="C1-E19 text 30" descr="sci-ppt:o030"/>
           <p:cNvSpPr txBox="1"/>
           <p:nvPr/>
         </p:nvSpPr>
         <p:spPr>
           <a:xfrm>
-            <a:off x="45720" y="2455164"/>
+            <a:off x="45720" y="1289304"/>
             <a:ext cx="777240" cy="208407"/>
           </a:xfrm>
           <a:prstGeom prst="rect">
@@ -3617,65 +3953,21 @@
                 </a:solidFill>
                 <a:latin typeface="Arial"/>
               </a:rPr>
-              <a:t>10</a:t>
-            </a:r>
-          </a:p>
-        </p:txBody>
-      </p:sp>
-      <p:cxnSp>
-        <p:nvCxnSpPr>
-          <p:cNvPr id="21" name="C1-E19 line 19" descr="sci-ppt:o019"/>
-          <p:cNvCxnSpPr/>
-          <p:nvPr/>
-        </p:nvCxnSpPr>
-        <p:spPr>
-          <a:xfrm>
-            <a:off x="850392" y="1965960"/>
-            <a:ext cx="64008" cy="0"/>
-          </a:xfrm>
-          <a:prstGeom prst="line">
-            <a:avLst/>
-          </a:prstGeom>
-          <a:ln w="12700">
-            <a:solidFill>
-              <a:srgbClr val="B4C7D2"/>
-            </a:solidFill>
-          </a:ln>
-          <a:effectLst/>
-        </p:spPr>
-      </p:cxnSp>
-      <p:cxnSp>
-        <p:nvCxnSpPr>
-          <p:cNvPr id="22" name="C1-E19 line 20" descr="sci-ppt:o020"/>
-          <p:cNvCxnSpPr/>
-          <p:nvPr/>
-        </p:nvCxnSpPr>
-        <p:spPr>
-          <a:xfrm>
-            <a:off x="914400" y="1965960"/>
-            <a:ext cx="5760720" cy="0"/>
-          </a:xfrm>
-          <a:prstGeom prst="line">
-            <a:avLst/>
-          </a:prstGeom>
-          <a:ln w="7620">
-            <a:solidFill>
-              <a:srgbClr val="2E4756"/>
-            </a:solidFill>
-          </a:ln>
-          <a:effectLst/>
-        </p:spPr>
-      </p:cxnSp>
-      <p:sp>
-        <p:nvSpPr>
-          <p:cNvPr id="23" name="C1-E19 text 21" descr="sci-ppt:o021"/>
+              <a:t>1</a:t>
+            </a:r>
+          </a:p>
+        </p:txBody>
+      </p:sp>
+      <p:sp>
+        <p:nvSpPr>
+          <p:cNvPr id="33" name="C1-E19 text 31" descr="sci-ppt:o031"/>
           <p:cNvSpPr txBox="1"/>
           <p:nvPr/>
         </p:nvSpPr>
         <p:spPr>
           <a:xfrm>
-            <a:off x="45720" y="1883664"/>
-            <a:ext cx="777240" cy="208407"/>
+            <a:off x="914400" y="5312664"/>
+            <a:ext cx="6035040" cy="231648"/>
           </a:xfrm>
           <a:prstGeom prst="rect">
             <a:avLst/>
@@ -3689,131 +3981,7 @@
           </a:bodyPr>
           <a:lstStyle/>
           <a:p>
-            <a:pPr algn="r">
-              <a:spcAft>
-                <a:spcPts val="0"/>
-              </a:spcAft>
-            </a:pPr>
-            <a:r>
-              <a:rPr sz="1050" b="0" i="0">
-                <a:solidFill>
-                  <a:srgbClr val="B4C7D2"/>
-                </a:solidFill>
-                <a:latin typeface="Arial"/>
-              </a:rPr>
-              <a:t>20</a:t>
-            </a:r>
-          </a:p>
-        </p:txBody>
-      </p:sp>
-      <p:cxnSp>
-        <p:nvCxnSpPr>
-          <p:cNvPr id="24" name="C1-E19 line 22" descr="sci-ppt:o022"/>
-          <p:cNvCxnSpPr/>
-          <p:nvPr/>
-        </p:nvCxnSpPr>
-        <p:spPr>
-          <a:xfrm>
-            <a:off x="850392" y="1394460"/>
-            <a:ext cx="64008" cy="0"/>
-          </a:xfrm>
-          <a:prstGeom prst="line">
-            <a:avLst/>
-          </a:prstGeom>
-          <a:ln w="12700">
-            <a:solidFill>
-              <a:srgbClr val="B4C7D2"/>
-            </a:solidFill>
-          </a:ln>
-          <a:effectLst/>
-        </p:spPr>
-      </p:cxnSp>
-      <p:cxnSp>
-        <p:nvCxnSpPr>
-          <p:cNvPr id="25" name="C1-E19 line 23" descr="sci-ppt:o023"/>
-          <p:cNvCxnSpPr/>
-          <p:nvPr/>
-        </p:nvCxnSpPr>
-        <p:spPr>
-          <a:xfrm>
-            <a:off x="914400" y="1394460"/>
-            <a:ext cx="5760720" cy="0"/>
-          </a:xfrm>
-          <a:prstGeom prst="line">
-            <a:avLst/>
-          </a:prstGeom>
-          <a:ln w="7620">
-            <a:solidFill>
-              <a:srgbClr val="2E4756"/>
-            </a:solidFill>
-          </a:ln>
-          <a:effectLst/>
-        </p:spPr>
-      </p:cxnSp>
-      <p:sp>
-        <p:nvSpPr>
-          <p:cNvPr id="26" name="C1-E19 text 24" descr="sci-ppt:o024"/>
-          <p:cNvSpPr txBox="1"/>
-          <p:nvPr/>
-        </p:nvSpPr>
-        <p:spPr>
-          <a:xfrm>
-            <a:off x="45720" y="1312163"/>
-            <a:ext cx="777240" cy="208407"/>
-          </a:xfrm>
-          <a:prstGeom prst="rect">
-            <a:avLst/>
-          </a:prstGeom>
-          <a:noFill/>
-          <a:effectLst/>
-        </p:spPr>
-        <p:txBody>
-          <a:bodyPr wrap="none" lIns="18288" rIns="18288" tIns="18288" bIns="18288" anchor="t">
-            <a:spAutoFit/>
-          </a:bodyPr>
-          <a:lstStyle/>
-          <a:p>
-            <a:pPr algn="r">
-              <a:spcAft>
-                <a:spcPts val="0"/>
-              </a:spcAft>
-            </a:pPr>
-            <a:r>
-              <a:rPr sz="1050" b="0" i="0">
-                <a:solidFill>
-                  <a:srgbClr val="B4C7D2"/>
-                </a:solidFill>
-                <a:latin typeface="Arial"/>
-              </a:rPr>
-              <a:t>30</a:t>
-            </a:r>
-          </a:p>
-        </p:txBody>
-      </p:sp>
-      <p:sp>
-        <p:nvSpPr>
-          <p:cNvPr id="27" name="C1-E19 text 25" descr="sci-ppt:o025"/>
-          <p:cNvSpPr txBox="1"/>
-          <p:nvPr/>
-        </p:nvSpPr>
-        <p:spPr>
-          <a:xfrm>
-            <a:off x="365760" y="932688"/>
-            <a:ext cx="5760720" cy="231648"/>
-          </a:xfrm>
-          <a:prstGeom prst="rect">
-            <a:avLst/>
-          </a:prstGeom>
-          <a:noFill/>
-          <a:effectLst/>
-        </p:spPr>
-        <p:txBody>
-          <a:bodyPr wrap="none" lIns="18288" rIns="18288" tIns="18288" bIns="18288" anchor="t">
-            <a:spAutoFit/>
-          </a:bodyPr>
-          <a:lstStyle/>
-          <a:p>
-            <a:pPr algn="l">
+            <a:pPr algn="ctr">
               <a:spcAft>
                 <a:spcPts val="0"/>
               </a:spcAft>
@@ -3825,21 +3993,61 @@
                 </a:solidFill>
                 <a:latin typeface="Arial"/>
               </a:rPr>
-              <a:t>R  (µm)</a:t>
-            </a:r>
-          </a:p>
-        </p:txBody>
-      </p:sp>
-      <p:sp>
-        <p:nvSpPr>
-          <p:cNvPr id="28" name="C1-E19 polygon 26" descr="sci-ppt:o026"/>
+              <a:t>R / Rₘₐₓ</a:t>
+            </a:r>
+          </a:p>
+        </p:txBody>
+      </p:sp>
+      <p:sp>
+        <p:nvSpPr>
+          <p:cNvPr id="34" name="C1-E19 text 32" descr="sci-ppt:o032"/>
+          <p:cNvSpPr txBox="1"/>
+          <p:nvPr/>
+        </p:nvSpPr>
+        <p:spPr>
+          <a:xfrm>
+            <a:off x="365760" y="1024128"/>
+            <a:ext cx="6035040" cy="231648"/>
+          </a:xfrm>
+          <a:prstGeom prst="rect">
+            <a:avLst/>
+          </a:prstGeom>
+          <a:noFill/>
+          <a:effectLst/>
+        </p:spPr>
+        <p:txBody>
+          <a:bodyPr wrap="none" lIns="18288" rIns="18288" tIns="18288" bIns="18288" anchor="t">
+            <a:spAutoFit/>
+          </a:bodyPr>
+          <a:lstStyle/>
+          <a:p>
+            <a:pPr algn="l">
+              <a:spcAft>
+                <a:spcPts val="0"/>
+              </a:spcAft>
+            </a:pPr>
+            <a:r>
+              <a:rPr sz="1200" b="0" i="0">
+                <a:solidFill>
+                  <a:srgbClr val="E7F0F3"/>
+                </a:solidFill>
+                <a:latin typeface="Arial"/>
+              </a:rPr>
+              <a:t>wall Mach number |Ṙ| / c</a:t>
+            </a:r>
+          </a:p>
+        </p:txBody>
+      </p:sp>
+      <p:sp>
+        <p:nvSpPr>
+          <p:cNvPr id="35" name="C1-E19 polygon 33" descr="sci-ppt:o033"/>
           <p:cNvSpPr/>
           <p:nvPr/>
         </p:nvSpPr>
         <p:spPr>
           <a:xfrm>
-            <a:off x="914400" y="1394460"/>
-            <a:ext cx="5269223" cy="1714157"/>
+            <a:off x="922160" y="1371600"/>
+            <a:ext cx="6007121" cy="3628605"/>
           </a:xfrm>
           <a:custGeom>
             <a:avLst/>
@@ -3848,459 +4056,456 @@
             <a:cxnLst/>
             <a:rect l="l" t="t" r="r" b="b"/>
             <a:pathLst>
-              <a:path w="5269223" h="1714157">
+              <a:path w="6007121" h="3628605">
                 <a:moveTo>
                   <a:pt x="0" y="0"/>
                 </a:moveTo>
                 <a:lnTo>
-                  <a:pt x="54396" y="76"/>
-                </a:lnTo>
-                <a:lnTo>
-                  <a:pt x="108789" y="305"/>
-                </a:lnTo>
-                <a:lnTo>
-                  <a:pt x="163171" y="687"/>
-                </a:lnTo>
-                <a:lnTo>
-                  <a:pt x="217539" y="1223"/>
-                </a:lnTo>
-                <a:lnTo>
-                  <a:pt x="271887" y="1910"/>
-                </a:lnTo>
-                <a:lnTo>
-                  <a:pt x="326212" y="2751"/>
-                </a:lnTo>
-                <a:lnTo>
-                  <a:pt x="380507" y="3745"/>
-                </a:lnTo>
-                <a:lnTo>
-                  <a:pt x="434768" y="4892"/>
-                </a:lnTo>
-                <a:lnTo>
-                  <a:pt x="488990" y="6191"/>
-                </a:lnTo>
-                <a:lnTo>
-                  <a:pt x="543169" y="7643"/>
-                </a:lnTo>
-                <a:lnTo>
-                  <a:pt x="597299" y="9249"/>
-                </a:lnTo>
-                <a:lnTo>
-                  <a:pt x="651375" y="11007"/>
-                </a:lnTo>
-                <a:lnTo>
-                  <a:pt x="705393" y="12918"/>
-                </a:lnTo>
-                <a:lnTo>
-                  <a:pt x="759348" y="14982"/>
-                </a:lnTo>
-                <a:lnTo>
-                  <a:pt x="813235" y="17198"/>
-                </a:lnTo>
-                <a:lnTo>
-                  <a:pt x="867049" y="19568"/>
-                </a:lnTo>
-                <a:lnTo>
-                  <a:pt x="920785" y="22090"/>
-                </a:lnTo>
-                <a:lnTo>
-                  <a:pt x="974438" y="24766"/>
-                </a:lnTo>
-                <a:lnTo>
-                  <a:pt x="1028004" y="27594"/>
-                </a:lnTo>
-                <a:lnTo>
-                  <a:pt x="1081476" y="30575"/>
-                </a:lnTo>
-                <a:lnTo>
-                  <a:pt x="1134852" y="33709"/>
-                </a:lnTo>
-                <a:lnTo>
-                  <a:pt x="1188124" y="36996"/>
-                </a:lnTo>
-                <a:lnTo>
-                  <a:pt x="1241289" y="40436"/>
-                </a:lnTo>
-                <a:lnTo>
-                  <a:pt x="1294342" y="44029"/>
-                </a:lnTo>
-                <a:lnTo>
-                  <a:pt x="1347278" y="47774"/>
-                </a:lnTo>
-                <a:lnTo>
-                  <a:pt x="1400090" y="51672"/>
-                </a:lnTo>
-                <a:lnTo>
-                  <a:pt x="1452776" y="55724"/>
-                </a:lnTo>
-                <a:lnTo>
-                  <a:pt x="1505329" y="59928"/>
-                </a:lnTo>
-                <a:lnTo>
-                  <a:pt x="1557745" y="64285"/>
-                </a:lnTo>
-                <a:lnTo>
-                  <a:pt x="1610018" y="68795"/>
-                </a:lnTo>
-                <a:lnTo>
-                  <a:pt x="1662144" y="73458"/>
-                </a:lnTo>
-                <a:lnTo>
-                  <a:pt x="1714118" y="78273"/>
-                </a:lnTo>
-                <a:lnTo>
-                  <a:pt x="1765933" y="83242"/>
-                </a:lnTo>
-                <a:lnTo>
-                  <a:pt x="1817586" y="88363"/>
-                </a:lnTo>
-                <a:lnTo>
-                  <a:pt x="1869072" y="93638"/>
-                </a:lnTo>
-                <a:lnTo>
-                  <a:pt x="1920384" y="99065"/>
-                </a:lnTo>
-                <a:lnTo>
-                  <a:pt x="1971519" y="104645"/>
-                </a:lnTo>
-                <a:lnTo>
-                  <a:pt x="2022470" y="110378"/>
-                </a:lnTo>
-                <a:lnTo>
-                  <a:pt x="2073234" y="116264"/>
-                </a:lnTo>
-                <a:lnTo>
-                  <a:pt x="2123803" y="122302"/>
-                </a:lnTo>
-                <a:lnTo>
-                  <a:pt x="2174174" y="128494"/>
-                </a:lnTo>
-                <a:lnTo>
-                  <a:pt x="2224342" y="134839"/>
-                </a:lnTo>
-                <a:lnTo>
-                  <a:pt x="2274300" y="141336"/>
-                </a:lnTo>
-                <a:lnTo>
-                  <a:pt x="2324044" y="147986"/>
-                </a:lnTo>
-                <a:lnTo>
-                  <a:pt x="2373568" y="154789"/>
-                </a:lnTo>
-                <a:lnTo>
-                  <a:pt x="2422868" y="161745"/>
-                </a:lnTo>
-                <a:lnTo>
-                  <a:pt x="2471937" y="168854"/>
-                </a:lnTo>
-                <a:lnTo>
-                  <a:pt x="2520771" y="176116"/>
-                </a:lnTo>
-                <a:lnTo>
-                  <a:pt x="2569365" y="183530"/>
-                </a:lnTo>
-                <a:lnTo>
-                  <a:pt x="2617712" y="191098"/>
-                </a:lnTo>
-                <a:lnTo>
-                  <a:pt x="2665808" y="198818"/>
-                </a:lnTo>
-                <a:lnTo>
-                  <a:pt x="2713646" y="206691"/>
-                </a:lnTo>
-                <a:lnTo>
-                  <a:pt x="2761223" y="214718"/>
-                </a:lnTo>
-                <a:lnTo>
-                  <a:pt x="2808532" y="222897"/>
-                </a:lnTo>
-                <a:lnTo>
-                  <a:pt x="2855568" y="231229"/>
-                </a:lnTo>
-                <a:lnTo>
-                  <a:pt x="2902325" y="239713"/>
-                </a:lnTo>
-                <a:lnTo>
-                  <a:pt x="2948798" y="248351"/>
-                </a:lnTo>
-                <a:lnTo>
-                  <a:pt x="2994981" y="257141"/>
-                </a:lnTo>
-                <a:lnTo>
-                  <a:pt x="3040869" y="266085"/>
-                </a:lnTo>
-                <a:lnTo>
-                  <a:pt x="3086456" y="275181"/>
-                </a:lnTo>
-                <a:lnTo>
-                  <a:pt x="3131737" y="284430"/>
-                </a:lnTo>
-                <a:lnTo>
-                  <a:pt x="3176706" y="293832"/>
-                </a:lnTo>
-                <a:lnTo>
-                  <a:pt x="3221357" y="303387"/>
-                </a:lnTo>
-                <a:lnTo>
-                  <a:pt x="3265685" y="313095"/>
-                </a:lnTo>
-                <a:lnTo>
-                  <a:pt x="3309685" y="322956"/>
-                </a:lnTo>
-                <a:lnTo>
-                  <a:pt x="3353349" y="332969"/>
-                </a:lnTo>
-                <a:lnTo>
-                  <a:pt x="3396673" y="343136"/>
-                </a:lnTo>
-                <a:lnTo>
-                  <a:pt x="3439651" y="353455"/>
-                </a:lnTo>
-                <a:lnTo>
-                  <a:pt x="3482277" y="363927"/>
-                </a:lnTo>
-                <a:lnTo>
-                  <a:pt x="3524546" y="374552"/>
-                </a:lnTo>
-                <a:lnTo>
-                  <a:pt x="3566451" y="385330"/>
-                </a:lnTo>
-                <a:lnTo>
-                  <a:pt x="3607987" y="396261"/>
-                </a:lnTo>
-                <a:lnTo>
-                  <a:pt x="3649147" y="407345"/>
-                </a:lnTo>
-                <a:lnTo>
-                  <a:pt x="3689927" y="418581"/>
-                </a:lnTo>
-                <a:lnTo>
-                  <a:pt x="3730319" y="429971"/>
-                </a:lnTo>
-                <a:lnTo>
-                  <a:pt x="3770319" y="441513"/>
-                </a:lnTo>
-                <a:lnTo>
-                  <a:pt x="3809920" y="453208"/>
-                </a:lnTo>
-                <a:lnTo>
-                  <a:pt x="3849116" y="465056"/>
-                </a:lnTo>
-                <a:lnTo>
-                  <a:pt x="3887901" y="477057"/>
-                </a:lnTo>
-                <a:lnTo>
-                  <a:pt x="3926270" y="489211"/>
-                </a:lnTo>
-                <a:lnTo>
-                  <a:pt x="3964216" y="501518"/>
-                </a:lnTo>
-                <a:lnTo>
-                  <a:pt x="4001733" y="513978"/>
-                </a:lnTo>
-                <a:lnTo>
-                  <a:pt x="4038815" y="526590"/>
-                </a:lnTo>
-                <a:lnTo>
-                  <a:pt x="4075457" y="539356"/>
-                </a:lnTo>
-                <a:lnTo>
-                  <a:pt x="4111651" y="552274"/>
-                </a:lnTo>
-                <a:lnTo>
-                  <a:pt x="4147393" y="565345"/>
-                </a:lnTo>
-                <a:lnTo>
-                  <a:pt x="4182675" y="578569"/>
-                </a:lnTo>
-                <a:lnTo>
-                  <a:pt x="4217492" y="591946"/>
-                </a:lnTo>
-                <a:lnTo>
-                  <a:pt x="4251838" y="605476"/>
-                </a:lnTo>
-                <a:lnTo>
-                  <a:pt x="4285707" y="619158"/>
-                </a:lnTo>
-                <a:lnTo>
-                  <a:pt x="4319092" y="632994"/>
-                </a:lnTo>
-                <a:lnTo>
-                  <a:pt x="4351987" y="646982"/>
-                </a:lnTo>
-                <a:lnTo>
-                  <a:pt x="4384387" y="661123"/>
-                </a:lnTo>
-                <a:lnTo>
-                  <a:pt x="4416285" y="675418"/>
-                </a:lnTo>
-                <a:lnTo>
-                  <a:pt x="4447675" y="689865"/>
-                </a:lnTo>
-                <a:lnTo>
-                  <a:pt x="4478551" y="704465"/>
-                </a:lnTo>
-                <a:lnTo>
-                  <a:pt x="4508908" y="719217"/>
-                </a:lnTo>
-                <a:lnTo>
-                  <a:pt x="4538738" y="734123"/>
-                </a:lnTo>
-                <a:lnTo>
-                  <a:pt x="4568037" y="749182"/>
-                </a:lnTo>
-                <a:lnTo>
-                  <a:pt x="4596798" y="764393"/>
-                </a:lnTo>
-                <a:lnTo>
-                  <a:pt x="4625015" y="779757"/>
-                </a:lnTo>
-                <a:lnTo>
-                  <a:pt x="4652682" y="795274"/>
-                </a:lnTo>
-                <a:lnTo>
-                  <a:pt x="4679794" y="810945"/>
-                </a:lnTo>
-                <a:lnTo>
-                  <a:pt x="4706345" y="826767"/>
-                </a:lnTo>
-                <a:lnTo>
-                  <a:pt x="4732329" y="842743"/>
-                </a:lnTo>
-                <a:lnTo>
-                  <a:pt x="4757741" y="858872"/>
-                </a:lnTo>
-                <a:lnTo>
-                  <a:pt x="4782574" y="875154"/>
-                </a:lnTo>
-                <a:lnTo>
-                  <a:pt x="4806824" y="891588"/>
-                </a:lnTo>
-                <a:lnTo>
-                  <a:pt x="4830485" y="908175"/>
-                </a:lnTo>
-                <a:lnTo>
-                  <a:pt x="4853553" y="924916"/>
-                </a:lnTo>
-                <a:lnTo>
-                  <a:pt x="4876021" y="941809"/>
-                </a:lnTo>
-                <a:lnTo>
-                  <a:pt x="4897885" y="958855"/>
-                </a:lnTo>
-                <a:lnTo>
-                  <a:pt x="4919140" y="976054"/>
-                </a:lnTo>
-                <a:lnTo>
-                  <a:pt x="4939781" y="993405"/>
-                </a:lnTo>
-                <a:lnTo>
-                  <a:pt x="4959805" y="1010910"/>
-                </a:lnTo>
-                <a:lnTo>
-                  <a:pt x="4979206" y="1028567"/>
-                </a:lnTo>
-                <a:lnTo>
-                  <a:pt x="4997981" y="1046378"/>
-                </a:lnTo>
-                <a:lnTo>
-                  <a:pt x="5016125" y="1064341"/>
-                </a:lnTo>
-                <a:lnTo>
-                  <a:pt x="5033636" y="1082457"/>
-                </a:lnTo>
-                <a:lnTo>
-                  <a:pt x="5050510" y="1100726"/>
-                </a:lnTo>
-                <a:lnTo>
-                  <a:pt x="5066745" y="1119148"/>
-                </a:lnTo>
-                <a:lnTo>
-                  <a:pt x="5082336" y="1137723"/>
-                </a:lnTo>
-                <a:lnTo>
-                  <a:pt x="5097283" y="1156450"/>
-                </a:lnTo>
-                <a:lnTo>
-                  <a:pt x="5111583" y="1175331"/>
-                </a:lnTo>
-                <a:lnTo>
-                  <a:pt x="5125235" y="1194364"/>
-                </a:lnTo>
-                <a:lnTo>
-                  <a:pt x="5138239" y="1213551"/>
-                </a:lnTo>
-                <a:lnTo>
-                  <a:pt x="5150592" y="1232890"/>
-                </a:lnTo>
-                <a:lnTo>
-                  <a:pt x="5162297" y="1252382"/>
-                </a:lnTo>
-                <a:lnTo>
-                  <a:pt x="5173354" y="1272027"/>
-                </a:lnTo>
-                <a:lnTo>
-                  <a:pt x="5183763" y="1291824"/>
-                </a:lnTo>
-                <a:lnTo>
-                  <a:pt x="5193528" y="1311775"/>
-                </a:lnTo>
-                <a:lnTo>
-                  <a:pt x="5202652" y="1331879"/>
-                </a:lnTo>
-                <a:lnTo>
-                  <a:pt x="5211138" y="1352135"/>
-                </a:lnTo>
-                <a:lnTo>
-                  <a:pt x="5218991" y="1372544"/>
-                </a:lnTo>
-                <a:lnTo>
-                  <a:pt x="5226218" y="1393107"/>
-                </a:lnTo>
-                <a:lnTo>
-                  <a:pt x="5232826" y="1413822"/>
-                </a:lnTo>
-                <a:lnTo>
-                  <a:pt x="5238823" y="1434690"/>
-                </a:lnTo>
-                <a:lnTo>
-                  <a:pt x="5244219" y="1455710"/>
-                </a:lnTo>
-                <a:lnTo>
-                  <a:pt x="5249027" y="1476884"/>
-                </a:lnTo>
-                <a:lnTo>
-                  <a:pt x="5253260" y="1498211"/>
-                </a:lnTo>
-                <a:lnTo>
-                  <a:pt x="5256934" y="1519690"/>
-                </a:lnTo>
-                <a:lnTo>
-                  <a:pt x="5260067" y="1541322"/>
-                </a:lnTo>
-                <a:lnTo>
-                  <a:pt x="5262680" y="1563108"/>
-                </a:lnTo>
-                <a:lnTo>
-                  <a:pt x="5264799" y="1585046"/>
-                </a:lnTo>
-                <a:lnTo>
-                  <a:pt x="5266451" y="1607137"/>
-                </a:lnTo>
-                <a:lnTo>
-                  <a:pt x="5267671" y="1629381"/>
-                </a:lnTo>
-                <a:lnTo>
-                  <a:pt x="5268498" y="1651777"/>
-                </a:lnTo>
-                <a:lnTo>
-                  <a:pt x="5268984" y="1674327"/>
-                </a:lnTo>
-                <a:lnTo>
-                  <a:pt x="5269192" y="1697029"/>
-                </a:lnTo>
-                <a:lnTo>
-                  <a:pt x="5269223" y="1714157"/>
+                  <a:pt x="40316" y="0"/>
+                </a:lnTo>
+                <a:lnTo>
+                  <a:pt x="80632" y="0"/>
+                </a:lnTo>
+                <a:lnTo>
+                  <a:pt x="120948" y="0"/>
+                </a:lnTo>
+                <a:lnTo>
+                  <a:pt x="161265" y="0"/>
+                </a:lnTo>
+                <a:lnTo>
+                  <a:pt x="201581" y="0"/>
+                </a:lnTo>
+                <a:lnTo>
+                  <a:pt x="241897" y="0"/>
+                </a:lnTo>
+                <a:lnTo>
+                  <a:pt x="282213" y="0"/>
+                </a:lnTo>
+                <a:lnTo>
+                  <a:pt x="322530" y="0"/>
+                </a:lnTo>
+                <a:lnTo>
+                  <a:pt x="362846" y="10515"/>
+                </a:lnTo>
+                <a:lnTo>
+                  <a:pt x="403162" y="30088"/>
+                </a:lnTo>
+                <a:lnTo>
+                  <a:pt x="443478" y="49662"/>
+                </a:lnTo>
+                <a:lnTo>
+                  <a:pt x="483795" y="69235"/>
+                </a:lnTo>
+                <a:lnTo>
+                  <a:pt x="524111" y="88808"/>
+                </a:lnTo>
+                <a:lnTo>
+                  <a:pt x="564427" y="108381"/>
+                </a:lnTo>
+                <a:lnTo>
+                  <a:pt x="604743" y="127955"/>
+                </a:lnTo>
+                <a:lnTo>
+                  <a:pt x="645060" y="147528"/>
+                </a:lnTo>
+                <a:lnTo>
+                  <a:pt x="685376" y="167101"/>
+                </a:lnTo>
+                <a:lnTo>
+                  <a:pt x="725692" y="186675"/>
+                </a:lnTo>
+                <a:lnTo>
+                  <a:pt x="766008" y="206249"/>
+                </a:lnTo>
+                <a:lnTo>
+                  <a:pt x="806325" y="225822"/>
+                </a:lnTo>
+                <a:lnTo>
+                  <a:pt x="846641" y="245396"/>
+                </a:lnTo>
+                <a:lnTo>
+                  <a:pt x="886957" y="264970"/>
+                </a:lnTo>
+                <a:lnTo>
+                  <a:pt x="927273" y="284544"/>
+                </a:lnTo>
+                <a:lnTo>
+                  <a:pt x="967590" y="304119"/>
+                </a:lnTo>
+                <a:lnTo>
+                  <a:pt x="1007906" y="323693"/>
+                </a:lnTo>
+                <a:lnTo>
+                  <a:pt x="1048222" y="343267"/>
+                </a:lnTo>
+                <a:lnTo>
+                  <a:pt x="1088538" y="362842"/>
+                </a:lnTo>
+                <a:lnTo>
+                  <a:pt x="1128855" y="382417"/>
+                </a:lnTo>
+                <a:lnTo>
+                  <a:pt x="1169171" y="401992"/>
+                </a:lnTo>
+                <a:lnTo>
+                  <a:pt x="1209487" y="421567"/>
+                </a:lnTo>
+                <a:lnTo>
+                  <a:pt x="1249803" y="441142"/>
+                </a:lnTo>
+                <a:lnTo>
+                  <a:pt x="1290120" y="460718"/>
+                </a:lnTo>
+                <a:lnTo>
+                  <a:pt x="1330436" y="480294"/>
+                </a:lnTo>
+                <a:lnTo>
+                  <a:pt x="1370752" y="499870"/>
+                </a:lnTo>
+                <a:lnTo>
+                  <a:pt x="1411068" y="519446"/>
+                </a:lnTo>
+                <a:lnTo>
+                  <a:pt x="1451385" y="539023"/>
+                </a:lnTo>
+                <a:lnTo>
+                  <a:pt x="1491701" y="558600"/>
+                </a:lnTo>
+                <a:lnTo>
+                  <a:pt x="1532017" y="578178"/>
+                </a:lnTo>
+                <a:lnTo>
+                  <a:pt x="1572333" y="597755"/>
+                </a:lnTo>
+                <a:lnTo>
+                  <a:pt x="1612650" y="617334"/>
+                </a:lnTo>
+                <a:lnTo>
+                  <a:pt x="1652966" y="636912"/>
+                </a:lnTo>
+                <a:lnTo>
+                  <a:pt x="1693282" y="656491"/>
+                </a:lnTo>
+                <a:lnTo>
+                  <a:pt x="1733598" y="676071"/>
+                </a:lnTo>
+                <a:lnTo>
+                  <a:pt x="1773915" y="695651"/>
+                </a:lnTo>
+                <a:lnTo>
+                  <a:pt x="1814231" y="715232"/>
+                </a:lnTo>
+                <a:lnTo>
+                  <a:pt x="1854547" y="734813"/>
+                </a:lnTo>
+                <a:lnTo>
+                  <a:pt x="1894864" y="754395"/>
+                </a:lnTo>
+                <a:lnTo>
+                  <a:pt x="1935180" y="773978"/>
+                </a:lnTo>
+                <a:lnTo>
+                  <a:pt x="1975496" y="793562"/>
+                </a:lnTo>
+                <a:lnTo>
+                  <a:pt x="2015812" y="813146"/>
+                </a:lnTo>
+                <a:lnTo>
+                  <a:pt x="2056129" y="832732"/>
+                </a:lnTo>
+                <a:lnTo>
+                  <a:pt x="2096445" y="852318"/>
+                </a:lnTo>
+                <a:lnTo>
+                  <a:pt x="2136761" y="871906"/>
+                </a:lnTo>
+                <a:lnTo>
+                  <a:pt x="2177077" y="891494"/>
+                </a:lnTo>
+                <a:lnTo>
+                  <a:pt x="2217394" y="911084"/>
+                </a:lnTo>
+                <a:lnTo>
+                  <a:pt x="2257710" y="930676"/>
+                </a:lnTo>
+                <a:lnTo>
+                  <a:pt x="2298026" y="950268"/>
+                </a:lnTo>
+                <a:lnTo>
+                  <a:pt x="2338342" y="969862"/>
+                </a:lnTo>
+                <a:lnTo>
+                  <a:pt x="2378659" y="989458"/>
+                </a:lnTo>
+                <a:lnTo>
+                  <a:pt x="2418975" y="1009056"/>
+                </a:lnTo>
+                <a:lnTo>
+                  <a:pt x="2459291" y="1028656"/>
+                </a:lnTo>
+                <a:lnTo>
+                  <a:pt x="2499607" y="1048258"/>
+                </a:lnTo>
+                <a:lnTo>
+                  <a:pt x="2539924" y="1067862"/>
+                </a:lnTo>
+                <a:lnTo>
+                  <a:pt x="2580240" y="1087468"/>
+                </a:lnTo>
+                <a:lnTo>
+                  <a:pt x="2620556" y="1107077"/>
+                </a:lnTo>
+                <a:lnTo>
+                  <a:pt x="2660872" y="1126689"/>
+                </a:lnTo>
+                <a:lnTo>
+                  <a:pt x="2701189" y="1146304"/>
+                </a:lnTo>
+                <a:lnTo>
+                  <a:pt x="2741505" y="1165922"/>
+                </a:lnTo>
+                <a:lnTo>
+                  <a:pt x="2781821" y="1185544"/>
+                </a:lnTo>
+                <a:lnTo>
+                  <a:pt x="2822137" y="1205169"/>
+                </a:lnTo>
+                <a:lnTo>
+                  <a:pt x="2862454" y="1224799"/>
+                </a:lnTo>
+                <a:lnTo>
+                  <a:pt x="2902770" y="1244432"/>
+                </a:lnTo>
+                <a:lnTo>
+                  <a:pt x="2943086" y="1264071"/>
+                </a:lnTo>
+                <a:lnTo>
+                  <a:pt x="2983402" y="1283715"/>
+                </a:lnTo>
+                <a:lnTo>
+                  <a:pt x="3023719" y="1303364"/>
+                </a:lnTo>
+                <a:lnTo>
+                  <a:pt x="3064035" y="1323019"/>
+                </a:lnTo>
+                <a:lnTo>
+                  <a:pt x="3104351" y="1342681"/>
+                </a:lnTo>
+                <a:lnTo>
+                  <a:pt x="3144667" y="1362349"/>
+                </a:lnTo>
+                <a:lnTo>
+                  <a:pt x="3184984" y="1382025"/>
+                </a:lnTo>
+                <a:lnTo>
+                  <a:pt x="3225300" y="1401709"/>
+                </a:lnTo>
+                <a:lnTo>
+                  <a:pt x="3265616" y="1421401"/>
+                </a:lnTo>
+                <a:lnTo>
+                  <a:pt x="3305932" y="1441103"/>
+                </a:lnTo>
+                <a:lnTo>
+                  <a:pt x="3346249" y="1460815"/>
+                </a:lnTo>
+                <a:lnTo>
+                  <a:pt x="3386565" y="1480537"/>
+                </a:lnTo>
+                <a:lnTo>
+                  <a:pt x="3426881" y="1500271"/>
+                </a:lnTo>
+                <a:lnTo>
+                  <a:pt x="3467197" y="1520018"/>
+                </a:lnTo>
+                <a:lnTo>
+                  <a:pt x="3507514" y="1539778"/>
+                </a:lnTo>
+                <a:lnTo>
+                  <a:pt x="3547830" y="1559552"/>
+                </a:lnTo>
+                <a:lnTo>
+                  <a:pt x="3588146" y="1579342"/>
+                </a:lnTo>
+                <a:lnTo>
+                  <a:pt x="3628462" y="1599149"/>
+                </a:lnTo>
+                <a:lnTo>
+                  <a:pt x="3668779" y="1618975"/>
+                </a:lnTo>
+                <a:lnTo>
+                  <a:pt x="3709095" y="1638820"/>
+                </a:lnTo>
+                <a:lnTo>
+                  <a:pt x="3749411" y="1658686"/>
+                </a:lnTo>
+                <a:lnTo>
+                  <a:pt x="3789727" y="1678575"/>
+                </a:lnTo>
+                <a:lnTo>
+                  <a:pt x="3830044" y="1698489"/>
+                </a:lnTo>
+                <a:lnTo>
+                  <a:pt x="3870360" y="1718430"/>
+                </a:lnTo>
+                <a:lnTo>
+                  <a:pt x="3910676" y="1738399"/>
+                </a:lnTo>
+                <a:lnTo>
+                  <a:pt x="3950992" y="1758400"/>
+                </a:lnTo>
+                <a:lnTo>
+                  <a:pt x="3991309" y="1778434"/>
+                </a:lnTo>
+                <a:lnTo>
+                  <a:pt x="4031625" y="1798505"/>
+                </a:lnTo>
+                <a:lnTo>
+                  <a:pt x="4071941" y="1818614"/>
+                </a:lnTo>
+                <a:lnTo>
+                  <a:pt x="4112257" y="1838767"/>
+                </a:lnTo>
+                <a:lnTo>
+                  <a:pt x="4152574" y="1858965"/>
+                </a:lnTo>
+                <a:lnTo>
+                  <a:pt x="4192890" y="1879213"/>
+                </a:lnTo>
+                <a:lnTo>
+                  <a:pt x="4233206" y="1899514"/>
+                </a:lnTo>
+                <a:lnTo>
+                  <a:pt x="4273522" y="1919874"/>
+                </a:lnTo>
+                <a:lnTo>
+                  <a:pt x="4313839" y="1940297"/>
+                </a:lnTo>
+                <a:lnTo>
+                  <a:pt x="4354155" y="1960788"/>
+                </a:lnTo>
+                <a:lnTo>
+                  <a:pt x="4394471" y="1981353"/>
+                </a:lnTo>
+                <a:lnTo>
+                  <a:pt x="4434787" y="2001999"/>
+                </a:lnTo>
+                <a:lnTo>
+                  <a:pt x="4475104" y="2022732"/>
+                </a:lnTo>
+                <a:lnTo>
+                  <a:pt x="4515420" y="2043559"/>
+                </a:lnTo>
+                <a:lnTo>
+                  <a:pt x="4555736" y="2064490"/>
+                </a:lnTo>
+                <a:lnTo>
+                  <a:pt x="4596052" y="2085532"/>
+                </a:lnTo>
+                <a:lnTo>
+                  <a:pt x="4636369" y="2106697"/>
+                </a:lnTo>
+                <a:lnTo>
+                  <a:pt x="4676685" y="2127994"/>
+                </a:lnTo>
+                <a:lnTo>
+                  <a:pt x="4717001" y="2149437"/>
+                </a:lnTo>
+                <a:lnTo>
+                  <a:pt x="4757318" y="2171038"/>
+                </a:lnTo>
+                <a:lnTo>
+                  <a:pt x="4797634" y="2192812"/>
+                </a:lnTo>
+                <a:lnTo>
+                  <a:pt x="4837950" y="2214776"/>
+                </a:lnTo>
+                <a:lnTo>
+                  <a:pt x="4878266" y="2236947"/>
+                </a:lnTo>
+                <a:lnTo>
+                  <a:pt x="4918583" y="2259347"/>
+                </a:lnTo>
+                <a:lnTo>
+                  <a:pt x="4958899" y="2281998"/>
+                </a:lnTo>
+                <a:lnTo>
+                  <a:pt x="4999215" y="2304925"/>
+                </a:lnTo>
+                <a:lnTo>
+                  <a:pt x="5039531" y="2328158"/>
+                </a:lnTo>
+                <a:lnTo>
+                  <a:pt x="5079848" y="2351730"/>
+                </a:lnTo>
+                <a:lnTo>
+                  <a:pt x="5120164" y="2375677"/>
+                </a:lnTo>
+                <a:lnTo>
+                  <a:pt x="5160480" y="2400042"/>
+                </a:lnTo>
+                <a:lnTo>
+                  <a:pt x="5200796" y="2424873"/>
+                </a:lnTo>
+                <a:lnTo>
+                  <a:pt x="5241113" y="2450228"/>
+                </a:lnTo>
+                <a:lnTo>
+                  <a:pt x="5281429" y="2476170"/>
+                </a:lnTo>
+                <a:lnTo>
+                  <a:pt x="5321745" y="2502777"/>
+                </a:lnTo>
+                <a:lnTo>
+                  <a:pt x="5362061" y="2530139"/>
+                </a:lnTo>
+                <a:lnTo>
+                  <a:pt x="5402378" y="2558363"/>
+                </a:lnTo>
+                <a:lnTo>
+                  <a:pt x="5442694" y="2587578"/>
+                </a:lnTo>
+                <a:lnTo>
+                  <a:pt x="5483010" y="2617942"/>
+                </a:lnTo>
+                <a:lnTo>
+                  <a:pt x="5523326" y="2649647"/>
+                </a:lnTo>
+                <a:lnTo>
+                  <a:pt x="5563643" y="2682936"/>
+                </a:lnTo>
+                <a:lnTo>
+                  <a:pt x="5603959" y="2718119"/>
+                </a:lnTo>
+                <a:lnTo>
+                  <a:pt x="5644275" y="2755597"/>
+                </a:lnTo>
+                <a:lnTo>
+                  <a:pt x="5684591" y="2795907"/>
+                </a:lnTo>
+                <a:lnTo>
+                  <a:pt x="5724908" y="2839788"/>
+                </a:lnTo>
+                <a:lnTo>
+                  <a:pt x="5765224" y="2888300"/>
+                </a:lnTo>
+                <a:lnTo>
+                  <a:pt x="5805540" y="2943035"/>
+                </a:lnTo>
+                <a:lnTo>
+                  <a:pt x="5845856" y="3006549"/>
+                </a:lnTo>
+                <a:lnTo>
+                  <a:pt x="5886173" y="3083351"/>
+                </a:lnTo>
+                <a:lnTo>
+                  <a:pt x="5926489" y="3182579"/>
+                </a:lnTo>
+                <a:lnTo>
+                  <a:pt x="5966805" y="3327845"/>
+                </a:lnTo>
+                <a:lnTo>
+                  <a:pt x="6007121" y="3628605"/>
                 </a:lnTo>
               </a:path>
             </a:pathLst>
@@ -4321,30 +4526,118 @@
           </a:p>
         </p:txBody>
       </p:sp>
-      <p:sp>
-        <p:nvSpPr>
-          <p:cNvPr id="29" name="C1-E19 ellipse 27" descr="sci-ppt:o027"/>
-          <p:cNvSpPr/>
+      <p:cxnSp>
+        <p:nvCxnSpPr>
+          <p:cNvPr id="36" name="C1-E19 line 34" descr="sci-ppt:o034"/>
+          <p:cNvCxnSpPr/>
           <p:nvPr/>
-        </p:nvSpPr>
-        <p:spPr>
-          <a:xfrm>
-            <a:off x="5598989" y="2178558"/>
-            <a:ext cx="146304" cy="146304"/>
-          </a:xfrm>
-          <a:prstGeom prst="ellipse">
+        </p:nvCxnSpPr>
+        <p:spPr>
+          <a:xfrm>
+            <a:off x="914400" y="2590800"/>
+            <a:ext cx="6035040" cy="0"/>
+          </a:xfrm>
+          <a:prstGeom prst="line">
             <a:avLst/>
           </a:prstGeom>
-          <a:solidFill>
-            <a:srgbClr val="F2B880"/>
-          </a:solidFill>
-          <a:ln w="12700">
+          <a:ln w="16510">
             <a:solidFill>
               <a:srgbClr val="F2B880"/>
             </a:solidFill>
+            <a:prstDash val="dash"/>
           </a:ln>
           <a:effectLst/>
         </p:spPr>
+      </p:cxnSp>
+      <p:sp>
+        <p:nvSpPr>
+          <p:cNvPr id="37" name="C1-E19 text 35" descr="sci-ppt:o035"/>
+          <p:cNvSpPr txBox="1"/>
+          <p:nvPr/>
+        </p:nvSpPr>
+        <p:spPr>
+          <a:xfrm>
+            <a:off x="5888596" y="2298192"/>
+            <a:ext cx="1371600" cy="239395"/>
+          </a:xfrm>
+          <a:prstGeom prst="rect">
+            <a:avLst/>
+          </a:prstGeom>
+          <a:noFill/>
+          <a:effectLst/>
+        </p:spPr>
+        <p:txBody>
+          <a:bodyPr wrap="none" lIns="18288" rIns="18288" tIns="18288" bIns="18288" anchor="t">
+            <a:spAutoFit/>
+          </a:bodyPr>
+          <a:lstStyle/>
+          <a:p>
+            <a:pPr algn="l">
+              <a:spcAft>
+                <a:spcPts val="0"/>
+              </a:spcAft>
+            </a:pPr>
+            <a:r>
+              <a:rPr sz="1250" b="0" i="0">
+                <a:solidFill>
+                  <a:srgbClr val="F2B880"/>
+                </a:solidFill>
+                <a:latin typeface="Arial"/>
+              </a:rPr>
+              <a:t>M* = 0.1</a:t>
+            </a:r>
+          </a:p>
+        </p:txBody>
+      </p:sp>
+      <p:sp>
+        <p:nvSpPr>
+          <p:cNvPr id="38" name="C1-E19 polygon 36" descr="sci-ppt:o036"/>
+          <p:cNvSpPr/>
+          <p:nvPr/>
+        </p:nvSpPr>
+        <p:spPr>
+          <a:xfrm>
+            <a:off x="922160" y="1371600"/>
+            <a:ext cx="2850955" cy="3657600"/>
+          </a:xfrm>
+          <a:custGeom>
+            <a:avLst/>
+            <a:gdLst/>
+            <a:ahLst/>
+            <a:cxnLst/>
+            <a:rect l="l" t="t" r="r" b="b"/>
+            <a:pathLst>
+              <a:path w="2850955" h="3657600">
+                <a:moveTo>
+                  <a:pt x="0" y="0"/>
+                </a:moveTo>
+                <a:lnTo>
+                  <a:pt x="2850955" y="0"/>
+                </a:lnTo>
+                <a:lnTo>
+                  <a:pt x="2850955" y="3657600"/>
+                </a:lnTo>
+                <a:lnTo>
+                  <a:pt x="0" y="3657600"/>
+                </a:lnTo>
+                <a:close/>
+              </a:path>
+            </a:pathLst>
+          </a:custGeom>
+          <a:solidFill>
+            <a:srgbClr val="F28BA0">
+              <a:alpha val="18000"/>
+            </a:srgbClr>
+          </a:solidFill>
+          <a:ln w="6350">
+            <a:solidFill>
+              <a:srgbClr val="F28BA0">
+                <a:alpha val="18000"/>
+              </a:srgbClr>
+            </a:solidFill>
+          </a:ln>
+          <a:effectLst/>
+        </p:spPr>
         <p:txBody>
           <a:bodyPr rtlCol="0" anchor="ctr"/>
           <a:lstStyle/>
@@ -4355,14 +4648,14 @@
       </p:sp>
       <p:cxnSp>
         <p:nvCxnSpPr>
-          <p:cNvPr id="30" name="C1-E19 line 28" descr="sci-ppt:o028"/>
+          <p:cNvPr id="39" name="C1-E19 line 37" descr="sci-ppt:o037"/>
           <p:cNvCxnSpPr/>
           <p:nvPr/>
         </p:nvCxnSpPr>
         <p:spPr>
           <a:xfrm>
-            <a:off x="6183623" y="1280160"/>
-            <a:ext cx="0" cy="1828800"/>
+            <a:off x="3773115" y="1371600"/>
+            <a:ext cx="0" cy="3657600"/>
           </a:xfrm>
           <a:prstGeom prst="line">
             <a:avLst/>
@@ -4378,54 +4671,46 @@
       </p:cxnSp>
       <p:sp>
         <p:nvSpPr>
-          <p:cNvPr id="31" name="C1-E19 text 29" descr="sci-ppt:o029"/>
+          <p:cNvPr id="40" name="C1-E19 ellipse 38" descr="sci-ppt:o038"/>
+          <p:cNvSpPr/>
+          <p:nvPr/>
+        </p:nvSpPr>
+        <p:spPr>
+          <a:xfrm>
+            <a:off x="3699963" y="2517648"/>
+            <a:ext cx="146304" cy="146304"/>
+          </a:xfrm>
+          <a:prstGeom prst="ellipse">
+            <a:avLst/>
+          </a:prstGeom>
+          <a:solidFill>
+            <a:srgbClr val="F28BA0"/>
+          </a:solidFill>
+          <a:ln w="12700">
+            <a:solidFill>
+              <a:srgbClr val="F28BA0"/>
+            </a:solidFill>
+          </a:ln>
+          <a:effectLst/>
+        </p:spPr>
+        <p:txBody>
+          <a:bodyPr rtlCol="0" anchor="ctr"/>
+          <a:lstStyle/>
+          <a:p>
+            <a:pPr algn="ctr"/>
+          </a:p>
+        </p:txBody>
+      </p:sp>
+      <p:sp>
+        <p:nvSpPr>
+          <p:cNvPr id="41" name="C1-E19 text 39" descr="sci-ppt:o039"/>
           <p:cNvSpPr txBox="1"/>
           <p:nvPr/>
         </p:nvSpPr>
         <p:spPr>
           <a:xfrm>
-            <a:off x="3203261" y="2205990"/>
-            <a:ext cx="2377440" cy="223900"/>
-          </a:xfrm>
-          <a:prstGeom prst="rect">
-            <a:avLst/>
-          </a:prstGeom>
-          <a:noFill/>
-          <a:effectLst/>
-        </p:spPr>
-        <p:txBody>
-          <a:bodyPr wrap="none" lIns="18288" rIns="18288" tIns="18288" bIns="18288" anchor="t">
-            <a:spAutoFit/>
-          </a:bodyPr>
-          <a:lstStyle/>
-          <a:p>
-            <a:pPr algn="l">
-              <a:spcAft>
-                <a:spcPts val="0"/>
-              </a:spcAft>
-            </a:pPr>
-            <a:r>
-              <a:rPr sz="1150" b="0" i="0">
-                <a:solidFill>
-                  <a:srgbClr val="F2B880"/>
-                </a:solidFill>
-                <a:latin typeface="Arial"/>
-              </a:rPr>
-              <a:t>R = Rₘₐₓ/2 at 2.48 µs</a:t>
-            </a:r>
-          </a:p>
-        </p:txBody>
-      </p:sp>
-      <p:sp>
-        <p:nvSpPr>
-          <p:cNvPr id="32" name="C1-E19 text 30" descr="sci-ppt:o030"/>
-          <p:cNvSpPr txBox="1"/>
-          <p:nvPr/>
-        </p:nvSpPr>
-        <p:spPr>
-          <a:xfrm>
-            <a:off x="4446263" y="1451610"/>
-            <a:ext cx="1645920" cy="231648"/>
+            <a:off x="3864555" y="2133600"/>
+            <a:ext cx="2011680" cy="231648"/>
           </a:xfrm>
           <a:prstGeom prst="rect">
             <a:avLst/>
@@ -4451,715 +4736,21 @@
                 </a:solidFill>
                 <a:latin typeface="Arial"/>
               </a:rPr>
-              <a:t>t_c = 2.744 µs</a:t>
-            </a:r>
-          </a:p>
-        </p:txBody>
-      </p:sp>
-      <p:cxnSp>
-        <p:nvCxnSpPr>
-          <p:cNvPr id="33" name="C1-E19 line 31" descr="sci-ppt:o031"/>
-          <p:cNvCxnSpPr/>
-          <p:nvPr/>
-        </p:nvCxnSpPr>
-        <p:spPr>
-          <a:xfrm>
-            <a:off x="914400" y="5577840"/>
-            <a:ext cx="5760720" cy="0"/>
-          </a:xfrm>
-          <a:prstGeom prst="line">
-            <a:avLst/>
-          </a:prstGeom>
-          <a:ln w="19050">
-            <a:solidFill>
-              <a:srgbClr val="B4C7D2"/>
-            </a:solidFill>
-          </a:ln>
-          <a:effectLst/>
-        </p:spPr>
-      </p:cxnSp>
-      <p:cxnSp>
-        <p:nvCxnSpPr>
-          <p:cNvPr id="34" name="C1-E19 line 32" descr="sci-ppt:o032"/>
-          <p:cNvCxnSpPr/>
-          <p:nvPr/>
-        </p:nvCxnSpPr>
-        <p:spPr>
-          <a:xfrm>
-            <a:off x="914400" y="3840480"/>
-            <a:ext cx="0" cy="1737360"/>
-          </a:xfrm>
-          <a:prstGeom prst="line">
-            <a:avLst/>
-          </a:prstGeom>
-          <a:ln w="19050">
-            <a:solidFill>
-              <a:srgbClr val="B4C7D2"/>
-            </a:solidFill>
-          </a:ln>
-          <a:effectLst/>
-        </p:spPr>
-      </p:cxnSp>
-      <p:cxnSp>
-        <p:nvCxnSpPr>
-          <p:cNvPr id="35" name="C1-E19 line 33" descr="sci-ppt:o033"/>
-          <p:cNvCxnSpPr/>
-          <p:nvPr/>
-        </p:nvCxnSpPr>
-        <p:spPr>
-          <a:xfrm>
-            <a:off x="914400" y="5577840"/>
-            <a:ext cx="0" cy="64008"/>
-          </a:xfrm>
-          <a:prstGeom prst="line">
-            <a:avLst/>
-          </a:prstGeom>
-          <a:ln w="12700">
-            <a:solidFill>
-              <a:srgbClr val="B4C7D2"/>
-            </a:solidFill>
-          </a:ln>
-          <a:effectLst/>
-        </p:spPr>
-      </p:cxnSp>
-      <p:cxnSp>
-        <p:nvCxnSpPr>
-          <p:cNvPr id="36" name="C1-E19 line 34" descr="sci-ppt:o034"/>
-          <p:cNvCxnSpPr/>
-          <p:nvPr/>
-        </p:nvCxnSpPr>
-        <p:spPr>
-          <a:xfrm>
-            <a:off x="914400" y="3840480"/>
-            <a:ext cx="0" cy="1737360"/>
-          </a:xfrm>
-          <a:prstGeom prst="line">
-            <a:avLst/>
-          </a:prstGeom>
-          <a:ln w="7620">
-            <a:solidFill>
-              <a:srgbClr val="2E4756"/>
-            </a:solidFill>
-          </a:ln>
-          <a:effectLst/>
-        </p:spPr>
-      </p:cxnSp>
-      <p:sp>
-        <p:nvSpPr>
-          <p:cNvPr id="37" name="C1-E19 text 35" descr="sci-ppt:o035"/>
+              <a:t>x_M = 0.143487</a:t>
+            </a:r>
+          </a:p>
+        </p:txBody>
+      </p:sp>
+      <p:sp>
+        <p:nvSpPr>
+          <p:cNvPr id="42" name="C1-E19 text 40" descr="sci-ppt:o040"/>
           <p:cNvSpPr txBox="1"/>
           <p:nvPr/>
         </p:nvSpPr>
         <p:spPr>
           <a:xfrm>
-            <a:off x="457200" y="5660136"/>
-            <a:ext cx="914400" cy="208407"/>
-          </a:xfrm>
-          <a:prstGeom prst="rect">
-            <a:avLst/>
-          </a:prstGeom>
-          <a:noFill/>
-          <a:effectLst/>
-        </p:spPr>
-        <p:txBody>
-          <a:bodyPr wrap="none" lIns="18288" rIns="18288" tIns="18288" bIns="18288" anchor="t">
-            <a:spAutoFit/>
-          </a:bodyPr>
-          <a:lstStyle/>
-          <a:p>
-            <a:pPr algn="ctr">
-              <a:spcAft>
-                <a:spcPts val="0"/>
-              </a:spcAft>
-            </a:pPr>
-            <a:r>
-              <a:rPr sz="1050" b="0" i="0">
-                <a:solidFill>
-                  <a:srgbClr val="B4C7D2"/>
-                </a:solidFill>
-                <a:latin typeface="Arial"/>
-              </a:rPr>
-              <a:t>0</a:t>
-            </a:r>
-          </a:p>
-        </p:txBody>
-      </p:sp>
-      <p:cxnSp>
-        <p:nvCxnSpPr>
-          <p:cNvPr id="38" name="C1-E19 line 36" descr="sci-ppt:o036"/>
-          <p:cNvCxnSpPr/>
-          <p:nvPr/>
-        </p:nvCxnSpPr>
-        <p:spPr>
-          <a:xfrm>
-            <a:off x="2834639" y="5577840"/>
-            <a:ext cx="0" cy="64008"/>
-          </a:xfrm>
-          <a:prstGeom prst="line">
-            <a:avLst/>
-          </a:prstGeom>
-          <a:ln w="12700">
-            <a:solidFill>
-              <a:srgbClr val="B4C7D2"/>
-            </a:solidFill>
-          </a:ln>
-          <a:effectLst/>
-        </p:spPr>
-      </p:cxnSp>
-      <p:cxnSp>
-        <p:nvCxnSpPr>
-          <p:cNvPr id="39" name="C1-E19 line 37" descr="sci-ppt:o037"/>
-          <p:cNvCxnSpPr/>
-          <p:nvPr/>
-        </p:nvCxnSpPr>
-        <p:spPr>
-          <a:xfrm>
-            <a:off x="2834639" y="3840480"/>
-            <a:ext cx="0" cy="1737360"/>
-          </a:xfrm>
-          <a:prstGeom prst="line">
-            <a:avLst/>
-          </a:prstGeom>
-          <a:ln w="7620">
-            <a:solidFill>
-              <a:srgbClr val="2E4756"/>
-            </a:solidFill>
-          </a:ln>
-          <a:effectLst/>
-        </p:spPr>
-      </p:cxnSp>
-      <p:sp>
-        <p:nvSpPr>
-          <p:cNvPr id="40" name="C1-E19 text 38" descr="sci-ppt:o038"/>
-          <p:cNvSpPr txBox="1"/>
-          <p:nvPr/>
-        </p:nvSpPr>
-        <p:spPr>
-          <a:xfrm>
-            <a:off x="2377439" y="5660136"/>
-            <a:ext cx="914400" cy="208407"/>
-          </a:xfrm>
-          <a:prstGeom prst="rect">
-            <a:avLst/>
-          </a:prstGeom>
-          <a:noFill/>
-          <a:effectLst/>
-        </p:spPr>
-        <p:txBody>
-          <a:bodyPr wrap="none" lIns="18288" rIns="18288" tIns="18288" bIns="18288" anchor="t">
-            <a:spAutoFit/>
-          </a:bodyPr>
-          <a:lstStyle/>
-          <a:p>
-            <a:pPr algn="ctr">
-              <a:spcAft>
-                <a:spcPts val="0"/>
-              </a:spcAft>
-            </a:pPr>
-            <a:r>
-              <a:rPr sz="1050" b="0" i="0">
-                <a:solidFill>
-                  <a:srgbClr val="B4C7D2"/>
-                </a:solidFill>
-                <a:latin typeface="Arial"/>
-              </a:rPr>
-              <a:t>1</a:t>
-            </a:r>
-          </a:p>
-        </p:txBody>
-      </p:sp>
-      <p:cxnSp>
-        <p:nvCxnSpPr>
-          <p:cNvPr id="41" name="C1-E19 line 39" descr="sci-ppt:o039"/>
-          <p:cNvCxnSpPr/>
-          <p:nvPr/>
-        </p:nvCxnSpPr>
-        <p:spPr>
-          <a:xfrm>
-            <a:off x="4754879" y="5577840"/>
-            <a:ext cx="0" cy="64008"/>
-          </a:xfrm>
-          <a:prstGeom prst="line">
-            <a:avLst/>
-          </a:prstGeom>
-          <a:ln w="12700">
-            <a:solidFill>
-              <a:srgbClr val="B4C7D2"/>
-            </a:solidFill>
-          </a:ln>
-          <a:effectLst/>
-        </p:spPr>
-      </p:cxnSp>
-      <p:cxnSp>
-        <p:nvCxnSpPr>
-          <p:cNvPr id="42" name="C1-E19 line 40" descr="sci-ppt:o040"/>
-          <p:cNvCxnSpPr/>
-          <p:nvPr/>
-        </p:nvCxnSpPr>
-        <p:spPr>
-          <a:xfrm>
-            <a:off x="4754879" y="3840480"/>
-            <a:ext cx="0" cy="1737360"/>
-          </a:xfrm>
-          <a:prstGeom prst="line">
-            <a:avLst/>
-          </a:prstGeom>
-          <a:ln w="7620">
-            <a:solidFill>
-              <a:srgbClr val="2E4756"/>
-            </a:solidFill>
-          </a:ln>
-          <a:effectLst/>
-        </p:spPr>
-      </p:cxnSp>
-      <p:sp>
-        <p:nvSpPr>
-          <p:cNvPr id="43" name="C1-E19 text 41" descr="sci-ppt:o041"/>
-          <p:cNvSpPr txBox="1"/>
-          <p:nvPr/>
-        </p:nvSpPr>
-        <p:spPr>
-          <a:xfrm>
-            <a:off x="4297679" y="5660136"/>
-            <a:ext cx="914400" cy="208407"/>
-          </a:xfrm>
-          <a:prstGeom prst="rect">
-            <a:avLst/>
-          </a:prstGeom>
-          <a:noFill/>
-          <a:effectLst/>
-        </p:spPr>
-        <p:txBody>
-          <a:bodyPr wrap="none" lIns="18288" rIns="18288" tIns="18288" bIns="18288" anchor="t">
-            <a:spAutoFit/>
-          </a:bodyPr>
-          <a:lstStyle/>
-          <a:p>
-            <a:pPr algn="ctr">
-              <a:spcAft>
-                <a:spcPts val="0"/>
-              </a:spcAft>
-            </a:pPr>
-            <a:r>
-              <a:rPr sz="1050" b="0" i="0">
-                <a:solidFill>
-                  <a:srgbClr val="B4C7D2"/>
-                </a:solidFill>
-                <a:latin typeface="Arial"/>
-              </a:rPr>
-              <a:t>2</a:t>
-            </a:r>
-          </a:p>
-        </p:txBody>
-      </p:sp>
-      <p:cxnSp>
-        <p:nvCxnSpPr>
-          <p:cNvPr id="44" name="C1-E19 line 42" descr="sci-ppt:o042"/>
-          <p:cNvCxnSpPr/>
-          <p:nvPr/>
-        </p:nvCxnSpPr>
-        <p:spPr>
-          <a:xfrm>
-            <a:off x="6675120" y="5577840"/>
-            <a:ext cx="0" cy="64008"/>
-          </a:xfrm>
-          <a:prstGeom prst="line">
-            <a:avLst/>
-          </a:prstGeom>
-          <a:ln w="12700">
-            <a:solidFill>
-              <a:srgbClr val="B4C7D2"/>
-            </a:solidFill>
-          </a:ln>
-          <a:effectLst/>
-        </p:spPr>
-      </p:cxnSp>
-      <p:cxnSp>
-        <p:nvCxnSpPr>
-          <p:cNvPr id="45" name="C1-E19 line 43" descr="sci-ppt:o043"/>
-          <p:cNvCxnSpPr/>
-          <p:nvPr/>
-        </p:nvCxnSpPr>
-        <p:spPr>
-          <a:xfrm>
-            <a:off x="6675120" y="3840480"/>
-            <a:ext cx="0" cy="1737360"/>
-          </a:xfrm>
-          <a:prstGeom prst="line">
-            <a:avLst/>
-          </a:prstGeom>
-          <a:ln w="7620">
-            <a:solidFill>
-              <a:srgbClr val="2E4756"/>
-            </a:solidFill>
-          </a:ln>
-          <a:effectLst/>
-        </p:spPr>
-      </p:cxnSp>
-      <p:sp>
-        <p:nvSpPr>
-          <p:cNvPr id="46" name="C1-E19 text 44" descr="sci-ppt:o044"/>
-          <p:cNvSpPr txBox="1"/>
-          <p:nvPr/>
-        </p:nvSpPr>
-        <p:spPr>
-          <a:xfrm>
-            <a:off x="6217920" y="5660136"/>
-            <a:ext cx="914400" cy="208407"/>
-          </a:xfrm>
-          <a:prstGeom prst="rect">
-            <a:avLst/>
-          </a:prstGeom>
-          <a:noFill/>
-          <a:effectLst/>
-        </p:spPr>
-        <p:txBody>
-          <a:bodyPr wrap="none" lIns="18288" rIns="18288" tIns="18288" bIns="18288" anchor="t">
-            <a:spAutoFit/>
-          </a:bodyPr>
-          <a:lstStyle/>
-          <a:p>
-            <a:pPr algn="ctr">
-              <a:spcAft>
-                <a:spcPts val="0"/>
-              </a:spcAft>
-            </a:pPr>
-            <a:r>
-              <a:rPr sz="1050" b="0" i="0">
-                <a:solidFill>
-                  <a:srgbClr val="B4C7D2"/>
-                </a:solidFill>
-                <a:latin typeface="Arial"/>
-              </a:rPr>
-              <a:t>3</a:t>
-            </a:r>
-          </a:p>
-        </p:txBody>
-      </p:sp>
-      <p:cxnSp>
-        <p:nvCxnSpPr>
-          <p:cNvPr id="47" name="C1-E19 line 45" descr="sci-ppt:o045"/>
-          <p:cNvCxnSpPr/>
-          <p:nvPr/>
-        </p:nvCxnSpPr>
-        <p:spPr>
-          <a:xfrm>
-            <a:off x="850392" y="5577840"/>
-            <a:ext cx="64008" cy="0"/>
-          </a:xfrm>
-          <a:prstGeom prst="line">
-            <a:avLst/>
-          </a:prstGeom>
-          <a:ln w="12700">
-            <a:solidFill>
-              <a:srgbClr val="B4C7D2"/>
-            </a:solidFill>
-          </a:ln>
-          <a:effectLst/>
-        </p:spPr>
-      </p:cxnSp>
-      <p:cxnSp>
-        <p:nvCxnSpPr>
-          <p:cNvPr id="48" name="C1-E19 line 46" descr="sci-ppt:o046"/>
-          <p:cNvCxnSpPr/>
-          <p:nvPr/>
-        </p:nvCxnSpPr>
-        <p:spPr>
-          <a:xfrm>
-            <a:off x="850392" y="5043267"/>
-            <a:ext cx="64008" cy="0"/>
-          </a:xfrm>
-          <a:prstGeom prst="line">
-            <a:avLst/>
-          </a:prstGeom>
-          <a:ln w="12700">
-            <a:solidFill>
-              <a:srgbClr val="B4C7D2"/>
-            </a:solidFill>
-          </a:ln>
-          <a:effectLst/>
-        </p:spPr>
-      </p:cxnSp>
-      <p:cxnSp>
-        <p:nvCxnSpPr>
-          <p:cNvPr id="49" name="C1-E19 line 47" descr="sci-ppt:o047"/>
-          <p:cNvCxnSpPr/>
-          <p:nvPr/>
-        </p:nvCxnSpPr>
-        <p:spPr>
-          <a:xfrm>
-            <a:off x="914400" y="5043267"/>
-            <a:ext cx="5760720" cy="0"/>
-          </a:xfrm>
-          <a:prstGeom prst="line">
-            <a:avLst/>
-          </a:prstGeom>
-          <a:ln w="7620">
-            <a:solidFill>
-              <a:srgbClr val="2E4756"/>
-            </a:solidFill>
-          </a:ln>
-          <a:effectLst/>
-        </p:spPr>
-      </p:cxnSp>
-      <p:sp>
-        <p:nvSpPr>
-          <p:cNvPr id="50" name="C1-E19 text 48" descr="sci-ppt:o048"/>
-          <p:cNvSpPr txBox="1"/>
-          <p:nvPr/>
-        </p:nvSpPr>
-        <p:spPr>
-          <a:xfrm>
-            <a:off x="45720" y="4960971"/>
-            <a:ext cx="777240" cy="208407"/>
-          </a:xfrm>
-          <a:prstGeom prst="rect">
-            <a:avLst/>
-          </a:prstGeom>
-          <a:noFill/>
-          <a:effectLst/>
-        </p:spPr>
-        <p:txBody>
-          <a:bodyPr wrap="none" lIns="18288" rIns="18288" tIns="18288" bIns="18288" anchor="t">
-            <a:spAutoFit/>
-          </a:bodyPr>
-          <a:lstStyle/>
-          <a:p>
-            <a:pPr algn="r">
-              <a:spcAft>
-                <a:spcPts val="0"/>
-              </a:spcAft>
-            </a:pPr>
-            <a:r>
-              <a:rPr sz="1050" b="0" i="0">
-                <a:solidFill>
-                  <a:srgbClr val="B4C7D2"/>
-                </a:solidFill>
-                <a:latin typeface="Arial"/>
-              </a:rPr>
-              <a:t>4</a:t>
-            </a:r>
-          </a:p>
-        </p:txBody>
-      </p:sp>
-      <p:cxnSp>
-        <p:nvCxnSpPr>
-          <p:cNvPr id="51" name="C1-E19 line 49" descr="sci-ppt:o049"/>
-          <p:cNvCxnSpPr/>
-          <p:nvPr/>
-        </p:nvCxnSpPr>
-        <p:spPr>
-          <a:xfrm>
-            <a:off x="850392" y="4508695"/>
-            <a:ext cx="64008" cy="0"/>
-          </a:xfrm>
-          <a:prstGeom prst="line">
-            <a:avLst/>
-          </a:prstGeom>
-          <a:ln w="12700">
-            <a:solidFill>
-              <a:srgbClr val="B4C7D2"/>
-            </a:solidFill>
-          </a:ln>
-          <a:effectLst/>
-        </p:spPr>
-      </p:cxnSp>
-      <p:cxnSp>
-        <p:nvCxnSpPr>
-          <p:cNvPr id="52" name="C1-E19 line 50" descr="sci-ppt:o050"/>
-          <p:cNvCxnSpPr/>
-          <p:nvPr/>
-        </p:nvCxnSpPr>
-        <p:spPr>
-          <a:xfrm>
-            <a:off x="914400" y="4508695"/>
-            <a:ext cx="5760720" cy="0"/>
-          </a:xfrm>
-          <a:prstGeom prst="line">
-            <a:avLst/>
-          </a:prstGeom>
-          <a:ln w="7620">
-            <a:solidFill>
-              <a:srgbClr val="2E4756"/>
-            </a:solidFill>
-          </a:ln>
-          <a:effectLst/>
-        </p:spPr>
-      </p:cxnSp>
-      <p:sp>
-        <p:nvSpPr>
-          <p:cNvPr id="53" name="C1-E19 text 51" descr="sci-ppt:o051"/>
-          <p:cNvSpPr txBox="1"/>
-          <p:nvPr/>
-        </p:nvSpPr>
-        <p:spPr>
-          <a:xfrm>
-            <a:off x="45720" y="4426399"/>
-            <a:ext cx="777240" cy="208407"/>
-          </a:xfrm>
-          <a:prstGeom prst="rect">
-            <a:avLst/>
-          </a:prstGeom>
-          <a:noFill/>
-          <a:effectLst/>
-        </p:spPr>
-        <p:txBody>
-          <a:bodyPr wrap="none" lIns="18288" rIns="18288" tIns="18288" bIns="18288" anchor="t">
-            <a:spAutoFit/>
-          </a:bodyPr>
-          <a:lstStyle/>
-          <a:p>
-            <a:pPr algn="r">
-              <a:spcAft>
-                <a:spcPts val="0"/>
-              </a:spcAft>
-            </a:pPr>
-            <a:r>
-              <a:rPr sz="1050" b="0" i="0">
-                <a:solidFill>
-                  <a:srgbClr val="B4C7D2"/>
-                </a:solidFill>
-                <a:latin typeface="Arial"/>
-              </a:rPr>
-              <a:t>8</a:t>
-            </a:r>
-          </a:p>
-        </p:txBody>
-      </p:sp>
-      <p:cxnSp>
-        <p:nvCxnSpPr>
-          <p:cNvPr id="54" name="C1-E19 line 52" descr="sci-ppt:o052"/>
-          <p:cNvCxnSpPr/>
-          <p:nvPr/>
-        </p:nvCxnSpPr>
-        <p:spPr>
-          <a:xfrm>
-            <a:off x="850392" y="3974123"/>
-            <a:ext cx="64008" cy="0"/>
-          </a:xfrm>
-          <a:prstGeom prst="line">
-            <a:avLst/>
-          </a:prstGeom>
-          <a:ln w="12700">
-            <a:solidFill>
-              <a:srgbClr val="B4C7D2"/>
-            </a:solidFill>
-          </a:ln>
-          <a:effectLst/>
-        </p:spPr>
-      </p:cxnSp>
-      <p:cxnSp>
-        <p:nvCxnSpPr>
-          <p:cNvPr id="55" name="C1-E19 line 53" descr="sci-ppt:o053"/>
-          <p:cNvCxnSpPr/>
-          <p:nvPr/>
-        </p:nvCxnSpPr>
-        <p:spPr>
-          <a:xfrm>
-            <a:off x="914400" y="3974123"/>
-            <a:ext cx="5760720" cy="0"/>
-          </a:xfrm>
-          <a:prstGeom prst="line">
-            <a:avLst/>
-          </a:prstGeom>
-          <a:ln w="7620">
-            <a:solidFill>
-              <a:srgbClr val="2E4756"/>
-            </a:solidFill>
-          </a:ln>
-          <a:effectLst/>
-        </p:spPr>
-      </p:cxnSp>
-      <p:sp>
-        <p:nvSpPr>
-          <p:cNvPr id="56" name="C1-E19 text 54" descr="sci-ppt:o054"/>
-          <p:cNvSpPr txBox="1"/>
-          <p:nvPr/>
-        </p:nvSpPr>
-        <p:spPr>
-          <a:xfrm>
-            <a:off x="45720" y="3891827"/>
-            <a:ext cx="777240" cy="208407"/>
-          </a:xfrm>
-          <a:prstGeom prst="rect">
-            <a:avLst/>
-          </a:prstGeom>
-          <a:noFill/>
-          <a:effectLst/>
-        </p:spPr>
-        <p:txBody>
-          <a:bodyPr wrap="none" lIns="18288" rIns="18288" tIns="18288" bIns="18288" anchor="t">
-            <a:spAutoFit/>
-          </a:bodyPr>
-          <a:lstStyle/>
-          <a:p>
-            <a:pPr algn="r">
-              <a:spcAft>
-                <a:spcPts val="0"/>
-              </a:spcAft>
-            </a:pPr>
-            <a:r>
-              <a:rPr sz="1050" b="0" i="0">
-                <a:solidFill>
-                  <a:srgbClr val="B4C7D2"/>
-                </a:solidFill>
-                <a:latin typeface="Arial"/>
-              </a:rPr>
-              <a:t>12</a:t>
-            </a:r>
-          </a:p>
-        </p:txBody>
-      </p:sp>
-      <p:sp>
-        <p:nvSpPr>
-          <p:cNvPr id="57" name="C1-E19 text 55" descr="sci-ppt:o055"/>
-          <p:cNvSpPr txBox="1"/>
-          <p:nvPr/>
-        </p:nvSpPr>
-        <p:spPr>
-          <a:xfrm>
-            <a:off x="914400" y="5861303"/>
-            <a:ext cx="5760720" cy="231648"/>
-          </a:xfrm>
-          <a:prstGeom prst="rect">
-            <a:avLst/>
-          </a:prstGeom>
-          <a:noFill/>
-          <a:effectLst/>
-        </p:spPr>
-        <p:txBody>
-          <a:bodyPr wrap="none" lIns="18288" rIns="18288" tIns="18288" bIns="18288" anchor="t">
-            <a:spAutoFit/>
-          </a:bodyPr>
-          <a:lstStyle/>
-          <a:p>
-            <a:pPr algn="ctr">
-              <a:spcAft>
-                <a:spcPts val="0"/>
-              </a:spcAft>
-            </a:pPr>
-            <a:r>
-              <a:rPr sz="1200" b="0" i="0">
-                <a:solidFill>
-                  <a:srgbClr val="E7F0F3"/>
-                </a:solidFill>
-                <a:latin typeface="Arial"/>
-              </a:rPr>
-              <a:t>t  (µs)</a:t>
-            </a:r>
-          </a:p>
-        </p:txBody>
-      </p:sp>
-      <p:sp>
-        <p:nvSpPr>
-          <p:cNvPr id="58" name="C1-E19 text 56" descr="sci-ppt:o056"/>
-          <p:cNvSpPr txBox="1"/>
-          <p:nvPr/>
-        </p:nvSpPr>
-        <p:spPr>
-          <a:xfrm>
-            <a:off x="365760" y="3493008"/>
-            <a:ext cx="5760720" cy="231648"/>
+            <a:off x="1113460" y="3837968"/>
+            <a:ext cx="2011680" cy="417576"/>
           </a:xfrm>
           <a:prstGeom prst="rect">
             <a:avLst/>
@@ -5181,551 +4772,13 @@
             <a:r>
               <a:rPr sz="1200" b="0" i="0">
                 <a:solidFill>
-                  <a:srgbClr val="E7F0F3"/>
+                  <a:srgbClr val="F28BA0"/>
                 </a:solidFill>
                 <a:latin typeface="Arial"/>
               </a:rPr>
-              <a:t>Kₗ  (nJ)</a:t>
-            </a:r>
-          </a:p>
-        </p:txBody>
-      </p:sp>
-      <p:sp>
-        <p:nvSpPr>
-          <p:cNvPr id="59" name="C1-E19 polygon 57" descr="sci-ppt:o057"/>
-          <p:cNvSpPr/>
-          <p:nvPr/>
-        </p:nvSpPr>
-        <p:spPr>
-          <a:xfrm>
-            <a:off x="914400" y="4066372"/>
-            <a:ext cx="5269223" cy="1511014"/>
-          </a:xfrm>
-          <a:custGeom>
-            <a:avLst/>
-            <a:gdLst/>
-            <a:ahLst/>
-            <a:cxnLst/>
-            <a:rect l="l" t="t" r="r" b="b"/>
-            <a:pathLst>
-              <a:path w="5269223" h="1511014">
-                <a:moveTo>
-                  <a:pt x="0" y="1511014"/>
-                </a:moveTo>
-                <a:lnTo>
-                  <a:pt x="54396" y="1511014"/>
-                </a:lnTo>
-                <a:lnTo>
-                  <a:pt x="108789" y="1510659"/>
-                </a:lnTo>
-                <a:lnTo>
-                  <a:pt x="163171" y="1509649"/>
-                </a:lnTo>
-                <a:lnTo>
-                  <a:pt x="217539" y="1508235"/>
-                </a:lnTo>
-                <a:lnTo>
-                  <a:pt x="271887" y="1506419"/>
-                </a:lnTo>
-                <a:lnTo>
-                  <a:pt x="326212" y="1504201"/>
-                </a:lnTo>
-                <a:lnTo>
-                  <a:pt x="380507" y="1501583"/>
-                </a:lnTo>
-                <a:lnTo>
-                  <a:pt x="434768" y="1498566"/>
-                </a:lnTo>
-                <a:lnTo>
-                  <a:pt x="488990" y="1495151"/>
-                </a:lnTo>
-                <a:lnTo>
-                  <a:pt x="543169" y="1491341"/>
-                </a:lnTo>
-                <a:lnTo>
-                  <a:pt x="597299" y="1487138"/>
-                </a:lnTo>
-                <a:lnTo>
-                  <a:pt x="651375" y="1482543"/>
-                </a:lnTo>
-                <a:lnTo>
-                  <a:pt x="705393" y="1477559"/>
-                </a:lnTo>
-                <a:lnTo>
-                  <a:pt x="759348" y="1472189"/>
-                </a:lnTo>
-                <a:lnTo>
-                  <a:pt x="813235" y="1466436"/>
-                </a:lnTo>
-                <a:lnTo>
-                  <a:pt x="867049" y="1460302"/>
-                </a:lnTo>
-                <a:lnTo>
-                  <a:pt x="920785" y="1453792"/>
-                </a:lnTo>
-                <a:lnTo>
-                  <a:pt x="974438" y="1446909"/>
-                </a:lnTo>
-                <a:lnTo>
-                  <a:pt x="1028004" y="1439655"/>
-                </a:lnTo>
-                <a:lnTo>
-                  <a:pt x="1081476" y="1432036"/>
-                </a:lnTo>
-                <a:lnTo>
-                  <a:pt x="1134852" y="1424055"/>
-                </a:lnTo>
-                <a:lnTo>
-                  <a:pt x="1188124" y="1415717"/>
-                </a:lnTo>
-                <a:lnTo>
-                  <a:pt x="1241289" y="1407026"/>
-                </a:lnTo>
-                <a:lnTo>
-                  <a:pt x="1294342" y="1397987"/>
-                </a:lnTo>
-                <a:lnTo>
-                  <a:pt x="1347278" y="1388604"/>
-                </a:lnTo>
-                <a:lnTo>
-                  <a:pt x="1400090" y="1378883"/>
-                </a:lnTo>
-                <a:lnTo>
-                  <a:pt x="1452776" y="1368829"/>
-                </a:lnTo>
-                <a:lnTo>
-                  <a:pt x="1505329" y="1358448"/>
-                </a:lnTo>
-                <a:lnTo>
-                  <a:pt x="1557745" y="1347744"/>
-                </a:lnTo>
-                <a:lnTo>
-                  <a:pt x="1610018" y="1336725"/>
-                </a:lnTo>
-                <a:lnTo>
-                  <a:pt x="1662144" y="1325395"/>
-                </a:lnTo>
-                <a:lnTo>
-                  <a:pt x="1714118" y="1313761"/>
-                </a:lnTo>
-                <a:lnTo>
-                  <a:pt x="1765933" y="1301829"/>
-                </a:lnTo>
-                <a:lnTo>
-                  <a:pt x="1817586" y="1289606"/>
-                </a:lnTo>
-                <a:lnTo>
-                  <a:pt x="1869072" y="1277098"/>
-                </a:lnTo>
-                <a:lnTo>
-                  <a:pt x="1920384" y="1264313"/>
-                </a:lnTo>
-                <a:lnTo>
-                  <a:pt x="1971519" y="1251256"/>
-                </a:lnTo>
-                <a:lnTo>
-                  <a:pt x="2022470" y="1237936"/>
-                </a:lnTo>
-                <a:lnTo>
-                  <a:pt x="2073234" y="1224359"/>
-                </a:lnTo>
-                <a:lnTo>
-                  <a:pt x="2123803" y="1210533"/>
-                </a:lnTo>
-                <a:lnTo>
-                  <a:pt x="2174174" y="1196466"/>
-                </a:lnTo>
-                <a:lnTo>
-                  <a:pt x="2224342" y="1182165"/>
-                </a:lnTo>
-                <a:lnTo>
-                  <a:pt x="2274300" y="1167638"/>
-                </a:lnTo>
-                <a:lnTo>
-                  <a:pt x="2324044" y="1152892"/>
-                </a:lnTo>
-                <a:lnTo>
-                  <a:pt x="2373568" y="1137937"/>
-                </a:lnTo>
-                <a:lnTo>
-                  <a:pt x="2422868" y="1122780"/>
-                </a:lnTo>
-                <a:lnTo>
-                  <a:pt x="2471937" y="1107429"/>
-                </a:lnTo>
-                <a:lnTo>
-                  <a:pt x="2520771" y="1091894"/>
-                </a:lnTo>
-                <a:lnTo>
-                  <a:pt x="2569365" y="1076182"/>
-                </a:lnTo>
-                <a:lnTo>
-                  <a:pt x="2617712" y="1060302"/>
-                </a:lnTo>
-                <a:lnTo>
-                  <a:pt x="2665808" y="1044263"/>
-                </a:lnTo>
-                <a:lnTo>
-                  <a:pt x="2713646" y="1028074"/>
-                </a:lnTo>
-                <a:lnTo>
-                  <a:pt x="2761223" y="1011744"/>
-                </a:lnTo>
-                <a:lnTo>
-                  <a:pt x="2808532" y="995282"/>
-                </a:lnTo>
-                <a:lnTo>
-                  <a:pt x="2855568" y="978696"/>
-                </a:lnTo>
-                <a:lnTo>
-                  <a:pt x="2902325" y="961997"/>
-                </a:lnTo>
-                <a:lnTo>
-                  <a:pt x="2948798" y="945193"/>
-                </a:lnTo>
-                <a:lnTo>
-                  <a:pt x="2994981" y="928293"/>
-                </a:lnTo>
-                <a:lnTo>
-                  <a:pt x="3040869" y="911308"/>
-                </a:lnTo>
-                <a:lnTo>
-                  <a:pt x="3086456" y="894246"/>
-                </a:lnTo>
-                <a:lnTo>
-                  <a:pt x="3131737" y="877117"/>
-                </a:lnTo>
-                <a:lnTo>
-                  <a:pt x="3176706" y="859930"/>
-                </a:lnTo>
-                <a:lnTo>
-                  <a:pt x="3221357" y="842696"/>
-                </a:lnTo>
-                <a:lnTo>
-                  <a:pt x="3265685" y="825423"/>
-                </a:lnTo>
-                <a:lnTo>
-                  <a:pt x="3309685" y="808122"/>
-                </a:lnTo>
-                <a:lnTo>
-                  <a:pt x="3353349" y="790801"/>
-                </a:lnTo>
-                <a:lnTo>
-                  <a:pt x="3396673" y="773472"/>
-                </a:lnTo>
-                <a:lnTo>
-                  <a:pt x="3439651" y="756142"/>
-                </a:lnTo>
-                <a:lnTo>
-                  <a:pt x="3482277" y="738822"/>
-                </a:lnTo>
-                <a:lnTo>
-                  <a:pt x="3524546" y="721522"/>
-                </a:lnTo>
-                <a:lnTo>
-                  <a:pt x="3566451" y="704251"/>
-                </a:lnTo>
-                <a:lnTo>
-                  <a:pt x="3607987" y="687018"/>
-                </a:lnTo>
-                <a:lnTo>
-                  <a:pt x="3649147" y="669834"/>
-                </a:lnTo>
-                <a:lnTo>
-                  <a:pt x="3689927" y="652708"/>
-                </a:lnTo>
-                <a:lnTo>
-                  <a:pt x="3730319" y="635650"/>
-                </a:lnTo>
-                <a:lnTo>
-                  <a:pt x="3770319" y="618668"/>
-                </a:lnTo>
-                <a:lnTo>
-                  <a:pt x="3809920" y="601772"/>
-                </a:lnTo>
-                <a:lnTo>
-                  <a:pt x="3849116" y="584973"/>
-                </a:lnTo>
-                <a:lnTo>
-                  <a:pt x="3887901" y="568278"/>
-                </a:lnTo>
-                <a:lnTo>
-                  <a:pt x="3926270" y="551698"/>
-                </a:lnTo>
-                <a:lnTo>
-                  <a:pt x="3964216" y="535240"/>
-                </a:lnTo>
-                <a:lnTo>
-                  <a:pt x="4001733" y="518915"/>
-                </a:lnTo>
-                <a:lnTo>
-                  <a:pt x="4038815" y="502732"/>
-                </a:lnTo>
-                <a:lnTo>
-                  <a:pt x="4075457" y="486698"/>
-                </a:lnTo>
-                <a:lnTo>
-                  <a:pt x="4111651" y="470823"/>
-                </a:lnTo>
-                <a:lnTo>
-                  <a:pt x="4147393" y="455116"/>
-                </a:lnTo>
-                <a:lnTo>
-                  <a:pt x="4182675" y="439584"/>
-                </a:lnTo>
-                <a:lnTo>
-                  <a:pt x="4217492" y="424236"/>
-                </a:lnTo>
-                <a:lnTo>
-                  <a:pt x="4251838" y="409081"/>
-                </a:lnTo>
-                <a:lnTo>
-                  <a:pt x="4285707" y="394126"/>
-                </a:lnTo>
-                <a:lnTo>
-                  <a:pt x="4319092" y="379379"/>
-                </a:lnTo>
-                <a:lnTo>
-                  <a:pt x="4351987" y="364847"/>
-                </a:lnTo>
-                <a:lnTo>
-                  <a:pt x="4384387" y="350539"/>
-                </a:lnTo>
-                <a:lnTo>
-                  <a:pt x="4416285" y="336462"/>
-                </a:lnTo>
-                <a:lnTo>
-                  <a:pt x="4447675" y="322622"/>
-                </a:lnTo>
-                <a:lnTo>
-                  <a:pt x="4478551" y="309026"/>
-                </a:lnTo>
-                <a:lnTo>
-                  <a:pt x="4508908" y="295682"/>
-                </a:lnTo>
-                <a:lnTo>
-                  <a:pt x="4538738" y="282595"/>
-                </a:lnTo>
-                <a:lnTo>
-                  <a:pt x="4568037" y="269772"/>
-                </a:lnTo>
-                <a:lnTo>
-                  <a:pt x="4596798" y="257219"/>
-                </a:lnTo>
-                <a:lnTo>
-                  <a:pt x="4625015" y="244941"/>
-                </a:lnTo>
-                <a:lnTo>
-                  <a:pt x="4652682" y="232944"/>
-                </a:lnTo>
-                <a:lnTo>
-                  <a:pt x="4679794" y="221233"/>
-                </a:lnTo>
-                <a:lnTo>
-                  <a:pt x="4706345" y="209813"/>
-                </a:lnTo>
-                <a:lnTo>
-                  <a:pt x="4732329" y="198688"/>
-                </a:lnTo>
-                <a:lnTo>
-                  <a:pt x="4757741" y="187863"/>
-                </a:lnTo>
-                <a:lnTo>
-                  <a:pt x="4782574" y="177341"/>
-                </a:lnTo>
-                <a:lnTo>
-                  <a:pt x="4806824" y="167127"/>
-                </a:lnTo>
-                <a:lnTo>
-                  <a:pt x="4830485" y="157223"/>
-                </a:lnTo>
-                <a:lnTo>
-                  <a:pt x="4853553" y="147632"/>
-                </a:lnTo>
-                <a:lnTo>
-                  <a:pt x="4876021" y="138358"/>
-                </a:lnTo>
-                <a:lnTo>
-                  <a:pt x="4897885" y="129401"/>
-                </a:lnTo>
-                <a:lnTo>
-                  <a:pt x="4919140" y="120765"/>
-                </a:lnTo>
-                <a:lnTo>
-                  <a:pt x="4939781" y="112451"/>
-                </a:lnTo>
-                <a:lnTo>
-                  <a:pt x="4959805" y="104459"/>
-                </a:lnTo>
-                <a:lnTo>
-                  <a:pt x="4979206" y="96790"/>
-                </a:lnTo>
-                <a:lnTo>
-                  <a:pt x="4997981" y="89444"/>
-                </a:lnTo>
-                <a:lnTo>
-                  <a:pt x="5016125" y="82422"/>
-                </a:lnTo>
-                <a:lnTo>
-                  <a:pt x="5033636" y="75722"/>
-                </a:lnTo>
-                <a:lnTo>
-                  <a:pt x="5050510" y="69344"/>
-                </a:lnTo>
-                <a:lnTo>
-                  <a:pt x="5066745" y="63286"/>
-                </a:lnTo>
-                <a:lnTo>
-                  <a:pt x="5082336" y="57545"/>
-                </a:lnTo>
-                <a:lnTo>
-                  <a:pt x="5097283" y="52120"/>
-                </a:lnTo>
-                <a:lnTo>
-                  <a:pt x="5111583" y="47007"/>
-                </a:lnTo>
-                <a:lnTo>
-                  <a:pt x="5125235" y="42202"/>
-                </a:lnTo>
-                <a:lnTo>
-                  <a:pt x="5138239" y="37702"/>
-                </a:lnTo>
-                <a:lnTo>
-                  <a:pt x="5150592" y="33502"/>
-                </a:lnTo>
-                <a:lnTo>
-                  <a:pt x="5162297" y="29597"/>
-                </a:lnTo>
-                <a:lnTo>
-                  <a:pt x="5173354" y="25980"/>
-                </a:lnTo>
-                <a:lnTo>
-                  <a:pt x="5183763" y="22647"/>
-                </a:lnTo>
-                <a:lnTo>
-                  <a:pt x="5193528" y="19589"/>
-                </a:lnTo>
-                <a:lnTo>
-                  <a:pt x="5202652" y="16799"/>
-                </a:lnTo>
-                <a:lnTo>
-                  <a:pt x="5211138" y="14270"/>
-                </a:lnTo>
-                <a:lnTo>
-                  <a:pt x="5218991" y="11992"/>
-                </a:lnTo>
-                <a:lnTo>
-                  <a:pt x="5226218" y="9956"/>
-                </a:lnTo>
-                <a:lnTo>
-                  <a:pt x="5232826" y="8152"/>
-                </a:lnTo>
-                <a:lnTo>
-                  <a:pt x="5238823" y="6570"/>
-                </a:lnTo>
-                <a:lnTo>
-                  <a:pt x="5244219" y="5198"/>
-                </a:lnTo>
-                <a:lnTo>
-                  <a:pt x="5249027" y="4023"/>
-                </a:lnTo>
-                <a:lnTo>
-                  <a:pt x="5253260" y="3034"/>
-                </a:lnTo>
-                <a:lnTo>
-                  <a:pt x="5256934" y="2217"/>
-                </a:lnTo>
-                <a:lnTo>
-                  <a:pt x="5260067" y="1558"/>
-                </a:lnTo>
-                <a:lnTo>
-                  <a:pt x="5262680" y="1041"/>
-                </a:lnTo>
-                <a:lnTo>
-                  <a:pt x="5264799" y="651"/>
-                </a:lnTo>
-                <a:lnTo>
-                  <a:pt x="5266451" y="371"/>
-                </a:lnTo>
-                <a:lnTo>
-                  <a:pt x="5267671" y="185"/>
-                </a:lnTo>
-                <a:lnTo>
-                  <a:pt x="5268498" y="74"/>
-                </a:lnTo>
-                <a:lnTo>
-                  <a:pt x="5268984" y="19"/>
-                </a:lnTo>
-                <a:lnTo>
-                  <a:pt x="5269192" y="2"/>
-                </a:lnTo>
-                <a:lnTo>
-                  <a:pt x="5269223" y="0"/>
-                </a:lnTo>
-              </a:path>
-            </a:pathLst>
-          </a:custGeom>
-          <a:noFill/>
-          <a:ln w="38100">
-            <a:solidFill>
-              <a:srgbClr val="8EDBD4"/>
-            </a:solidFill>
-          </a:ln>
-          <a:effectLst/>
-        </p:spPr>
-        <p:txBody>
-          <a:bodyPr rtlCol="0" anchor="ctr"/>
-          <a:lstStyle/>
-          <a:p>
-            <a:pPr algn="ctr"/>
-          </a:p>
-        </p:txBody>
-      </p:sp>
-      <p:cxnSp>
-        <p:nvCxnSpPr>
-          <p:cNvPr id="60" name="C1-E19 line 58" descr="sci-ppt:o058"/>
-          <p:cNvCxnSpPr/>
-          <p:nvPr/>
-        </p:nvCxnSpPr>
-        <p:spPr>
-          <a:xfrm>
-            <a:off x="914400" y="4066372"/>
-            <a:ext cx="5760720" cy="0"/>
-          </a:xfrm>
-          <a:prstGeom prst="line">
-            <a:avLst/>
-          </a:prstGeom>
-          <a:ln w="16510">
-            <a:solidFill>
-              <a:srgbClr val="F2B880"/>
-            </a:solidFill>
-            <a:prstDash val="dash"/>
-          </a:ln>
-          <a:effectLst/>
-        </p:spPr>
-      </p:cxnSp>
-      <p:sp>
-        <p:nvSpPr>
-          <p:cNvPr id="61" name="C1-E19 text 59" descr="sci-ppt:o059"/>
-          <p:cNvSpPr txBox="1"/>
-          <p:nvPr/>
-        </p:nvSpPr>
-        <p:spPr>
-          <a:xfrm>
-            <a:off x="1179576" y="3773764"/>
-            <a:ext cx="2194560" cy="231648"/>
-          </a:xfrm>
-          <a:prstGeom prst="rect">
-            <a:avLst/>
-          </a:prstGeom>
-          <a:noFill/>
-          <a:effectLst/>
-        </p:spPr>
-        <p:txBody>
-          <a:bodyPr wrap="none" lIns="18288" rIns="18288" tIns="18288" bIns="18288" anchor="t">
-            <a:spAutoFit/>
-          </a:bodyPr>
-          <a:lstStyle/>
+              <a:t>incompressible model</a:t>
+            </a:r>
+          </a:p>
           <a:p>
             <a:pPr algn="l">
               <a:spcAft>
@@ -5735,97 +4788,25 @@
             <a:r>
               <a:rPr sz="1200" b="0" i="0">
                 <a:solidFill>
-                  <a:srgbClr val="F2B880"/>
+                  <a:srgbClr val="F28BA0"/>
                 </a:solidFill>
                 <a:latin typeface="Arial"/>
               </a:rPr>
-              <a:t>E_B = 11.3097 nJ</a:t>
-            </a:r>
-          </a:p>
-        </p:txBody>
-      </p:sp>
-      <p:sp>
-        <p:nvSpPr>
-          <p:cNvPr id="62" name="C1-E19 ellipse 60" descr="sci-ppt:o060"/>
+              <a:t>not trusted here</a:t>
+            </a:r>
+          </a:p>
+        </p:txBody>
+      </p:sp>
+      <p:sp>
+        <p:nvSpPr>
+          <p:cNvPr id="43" name="C1-E19 round_rect 41" descr="sci-ppt:o041"/>
           <p:cNvSpPr/>
           <p:nvPr/>
         </p:nvSpPr>
         <p:spPr>
           <a:xfrm>
-            <a:off x="5598989" y="4182153"/>
-            <a:ext cx="146304" cy="146304"/>
-          </a:xfrm>
-          <a:prstGeom prst="ellipse">
-            <a:avLst/>
-          </a:prstGeom>
-          <a:solidFill>
-            <a:srgbClr val="F2B880"/>
-          </a:solidFill>
-          <a:ln w="12700">
-            <a:solidFill>
-              <a:srgbClr val="F2B880"/>
-            </a:solidFill>
-          </a:ln>
-          <a:effectLst/>
-        </p:spPr>
-        <p:txBody>
-          <a:bodyPr rtlCol="0" anchor="ctr"/>
-          <a:lstStyle/>
-          <a:p>
-            <a:pPr algn="ctr"/>
-          </a:p>
-        </p:txBody>
-      </p:sp>
-      <p:sp>
-        <p:nvSpPr>
-          <p:cNvPr id="63" name="C1-E19 text 61" descr="sci-ppt:o061"/>
-          <p:cNvSpPr txBox="1"/>
-          <p:nvPr/>
-        </p:nvSpPr>
-        <p:spPr>
-          <a:xfrm>
-            <a:off x="3386141" y="4365033"/>
-            <a:ext cx="2194560" cy="223900"/>
-          </a:xfrm>
-          <a:prstGeom prst="rect">
-            <a:avLst/>
-          </a:prstGeom>
-          <a:noFill/>
-          <a:effectLst/>
-        </p:spPr>
-        <p:txBody>
-          <a:bodyPr wrap="none" lIns="18288" rIns="18288" tIns="18288" bIns="18288" anchor="t">
-            <a:spAutoFit/>
-          </a:bodyPr>
-          <a:lstStyle/>
-          <a:p>
-            <a:pPr algn="l">
-              <a:spcAft>
-                <a:spcPts val="0"/>
-              </a:spcAft>
-            </a:pPr>
-            <a:r>
-              <a:rPr sz="1150" b="0" i="0">
-                <a:solidFill>
-                  <a:srgbClr val="F2B880"/>
-                </a:solidFill>
-                <a:latin typeface="Arial"/>
-              </a:rPr>
-              <a:t>Kₗ = 7/8 E_B = 9.896 nJ</a:t>
-            </a:r>
-          </a:p>
-        </p:txBody>
-      </p:sp>
-      <p:sp>
-        <p:nvSpPr>
-          <p:cNvPr id="64" name="C1-E19 round_rect 62" descr="sci-ppt:o062"/>
-          <p:cNvSpPr/>
-          <p:nvPr/>
-        </p:nvSpPr>
-        <p:spPr>
-          <a:xfrm>
-            <a:off x="7040880" y="1280160"/>
-            <a:ext cx="4800600" cy="4526280"/>
+            <a:off x="7315200" y="1371600"/>
+            <a:ext cx="4526280" cy="3657600"/>
           </a:xfrm>
           <a:prstGeom prst="roundRect">
             <a:avLst/>
@@ -5850,14 +4831,14 @@
       </p:sp>
       <p:sp>
         <p:nvSpPr>
-          <p:cNvPr id="65" name="C1-E19 text 63" descr="sci-ppt:o063"/>
+          <p:cNvPr id="44" name="C1-E19 text 42" descr="sci-ppt:o042"/>
           <p:cNvSpPr txBox="1"/>
           <p:nvPr/>
         </p:nvSpPr>
         <p:spPr>
           <a:xfrm>
-            <a:off x="7150608" y="1335024"/>
-            <a:ext cx="4581144" cy="254889"/>
+            <a:off x="7424927" y="1426464"/>
+            <a:ext cx="4306824" cy="254889"/>
           </a:xfrm>
           <a:prstGeom prst="rect">
             <a:avLst/>
@@ -5883,21 +4864,21 @@
                 </a:solidFill>
                 <a:latin typeface="Arial"/>
               </a:rPr>
-              <a:t>The declared numbers</a:t>
-            </a:r>
-          </a:p>
-        </p:txBody>
-      </p:sp>
-      <p:sp>
-        <p:nvSpPr>
-          <p:cNvPr id="66" name="C1-E19 text 64" descr="sci-ppt:o064"/>
+              <a:t>A diagnostic, not a limit</a:t>
+            </a:r>
+          </a:p>
+        </p:txBody>
+      </p:sp>
+      <p:sp>
+        <p:nvSpPr>
+          <p:cNvPr id="45" name="C1-E19 text 43" descr="sci-ppt:o043"/>
           <p:cNvSpPr txBox="1"/>
           <p:nvPr/>
         </p:nvSpPr>
         <p:spPr>
           <a:xfrm>
-            <a:off x="7223760" y="1783080"/>
-            <a:ext cx="4480560" cy="247142"/>
+            <a:off x="7452360" y="1828800"/>
+            <a:ext cx="4297680" cy="247142"/>
           </a:xfrm>
           <a:prstGeom prst="rect">
             <a:avLst/>
@@ -5919,25 +4900,25 @@
             <a:r>
               <a:rPr sz="1300" b="1" i="0">
                 <a:solidFill>
-                  <a:srgbClr val="F2B880"/>
+                  <a:srgbClr val="E7F0F3"/>
                 </a:solidFill>
                 <a:latin typeface="Arial"/>
               </a:rPr>
-              <a:t>Collapse time</a:t>
-            </a:r>
-          </a:p>
-        </p:txBody>
-      </p:sp>
-      <p:sp>
-        <p:nvSpPr>
-          <p:cNvPr id="67" name="C1-E19 text 65" descr="sci-ppt:o065"/>
+              <a:t>x_M = [ 1 + 3ρc²M*² / (2Δp_c) ]^(−1/3)</a:t>
+            </a:r>
+          </a:p>
+        </p:txBody>
+      </p:sp>
+      <p:sp>
+        <p:nvSpPr>
+          <p:cNvPr id="46" name="C1-E19 text 44" descr="sci-ppt:o044"/>
           <p:cNvSpPr txBox="1"/>
           <p:nvPr/>
         </p:nvSpPr>
         <p:spPr>
           <a:xfrm>
-            <a:off x="7315200" y="2030221"/>
-            <a:ext cx="4389120" cy="231648"/>
+            <a:off x="7653528" y="2423160"/>
+            <a:ext cx="4096512" cy="433070"/>
           </a:xfrm>
           <a:prstGeom prst="rect">
             <a:avLst/>
@@ -5957,39 +4938,15 @@
               </a:spcAft>
             </a:pPr>
             <a:r>
-              <a:rPr sz="1200" b="0" i="0">
+              <a:rPr sz="1250" b="0" i="0">
                 <a:solidFill>
                   <a:srgbClr val="E7F0F3"/>
                 </a:solidFill>
                 <a:latin typeface="Arial"/>
               </a:rPr>
-              <a:t>t_c = 0.9147 × 30 µm × √(1000/10⁵) = 2.7440 µs</a:t>
-            </a:r>
-          </a:p>
-        </p:txBody>
-      </p:sp>
-      <p:sp>
-        <p:nvSpPr>
-          <p:cNvPr id="68" name="C1-E19 text 66" descr="sci-ppt:o066"/>
-          <p:cNvSpPr txBox="1"/>
-          <p:nvPr/>
-        </p:nvSpPr>
-        <p:spPr>
-          <a:xfrm>
-            <a:off x="7223760" y="2426462"/>
-            <a:ext cx="4480560" cy="247142"/>
-          </a:xfrm>
-          <a:prstGeom prst="rect">
-            <a:avLst/>
-          </a:prstGeom>
-          <a:noFill/>
-          <a:effectLst/>
-        </p:spPr>
-        <p:txBody>
-          <a:bodyPr wrap="none" lIns="18288" rIns="18288" tIns="18288" bIns="18288" anchor="t">
-            <a:spAutoFit/>
-          </a:bodyPr>
-          <a:lstStyle/>
+              <a:t>With c = 1500 m/s and M* = 0.1 the ideal</a:t>
+            </a:r>
+          </a:p>
           <a:p>
             <a:pPr algn="l">
               <a:spcAft>
@@ -5997,27 +4954,59 @@
               </a:spcAft>
             </a:pPr>
             <a:r>
-              <a:rPr sz="1300" b="1" i="0">
+              <a:rPr sz="1250" b="0" i="0">
                 <a:solidFill>
-                  <a:srgbClr val="F2B880"/>
+                  <a:srgbClr val="E7F0F3"/>
                 </a:solidFill>
                 <a:latin typeface="Arial"/>
               </a:rPr>
-              <a:t>Work scale</a:t>
-            </a:r>
-          </a:p>
-        </p:txBody>
-      </p:sp>
-      <p:sp>
-        <p:nvSpPr>
-          <p:cNvPr id="69" name="C1-E19 text 67" descr="sci-ppt:o067"/>
+              <a:t>collapse reaches M* at R = 0.143 Rₘₐₓ.</a:t>
+            </a:r>
+          </a:p>
+        </p:txBody>
+      </p:sp>
+      <p:sp>
+        <p:nvSpPr>
+          <p:cNvPr id="47" name="C1-E19 ellipse 45" descr="sci-ppt:o045"/>
+          <p:cNvSpPr/>
+          <p:nvPr/>
+        </p:nvSpPr>
+        <p:spPr>
+          <a:xfrm>
+            <a:off x="7484364" y="2480437"/>
+            <a:ext cx="82296" cy="82296"/>
+          </a:xfrm>
+          <a:prstGeom prst="ellipse">
+            <a:avLst/>
+          </a:prstGeom>
+          <a:solidFill>
+            <a:srgbClr val="8EDBD4"/>
+          </a:solidFill>
+          <a:ln w="12700">
+            <a:solidFill>
+              <a:srgbClr val="8EDBD4"/>
+            </a:solidFill>
+          </a:ln>
+          <a:effectLst/>
+        </p:spPr>
+        <p:txBody>
+          <a:bodyPr rtlCol="0" anchor="ctr"/>
+          <a:lstStyle/>
+          <a:p>
+            <a:pPr algn="ctr"/>
+          </a:p>
+        </p:txBody>
+      </p:sp>
+      <p:sp>
+        <p:nvSpPr>
+          <p:cNvPr id="48" name="C1-E19 text 46" descr="sci-ppt:o046"/>
           <p:cNvSpPr txBox="1"/>
           <p:nvPr/>
         </p:nvSpPr>
         <p:spPr>
           <a:xfrm>
-            <a:off x="7315200" y="2673604"/>
-            <a:ext cx="4389120" cy="231648"/>
+            <a:off x="7653528" y="2901949"/>
+            <a:ext cx="4096512" cy="433070"/>
           </a:xfrm>
           <a:prstGeom prst="rect">
             <a:avLst/>
@@ -6037,39 +5026,15 @@
               </a:spcAft>
             </a:pPr>
             <a:r>
-              <a:rPr sz="1200" b="0" i="0">
+              <a:rPr sz="1250" b="0" i="0">
                 <a:solidFill>
                   <a:srgbClr val="E7F0F3"/>
                 </a:solidFill>
                 <a:latin typeface="Arial"/>
               </a:rPr>
-              <a:t>E_B = (4π/3)(10⁵)(30 µm)³ = 11.3097 nJ</a:t>
-            </a:r>
-          </a:p>
-        </p:txBody>
-      </p:sp>
-      <p:sp>
-        <p:nvSpPr>
-          <p:cNvPr id="70" name="C1-E19 text 68" descr="sci-ppt:o068"/>
-          <p:cNvSpPr txBox="1"/>
-          <p:nvPr/>
-        </p:nvSpPr>
-        <p:spPr>
-          <a:xfrm>
-            <a:off x="7223760" y="3069844"/>
-            <a:ext cx="4480560" cy="247142"/>
-          </a:xfrm>
-          <a:prstGeom prst="rect">
-            <a:avLst/>
-          </a:prstGeom>
-          <a:noFill/>
-          <a:effectLst/>
-        </p:spPr>
-        <p:txBody>
-          <a:bodyPr wrap="none" lIns="18288" rIns="18288" tIns="18288" bIns="18288" anchor="t">
-            <a:spAutoFit/>
-          </a:bodyPr>
-          <a:lstStyle/>
+              <a:t>Inside that radius the speed is large enough</a:t>
+            </a:r>
+          </a:p>
           <a:p>
             <a:pPr algn="l">
               <a:spcAft>
@@ -6077,27 +5042,59 @@
               </a:spcAft>
             </a:pPr>
             <a:r>
-              <a:rPr sz="1300" b="1" i="0">
+              <a:rPr sz="1250" b="0" i="0">
                 <a:solidFill>
-                  <a:srgbClr val="F2B880"/>
+                  <a:srgbClr val="E7F0F3"/>
                 </a:solidFill>
                 <a:latin typeface="Arial"/>
               </a:rPr>
-              <a:t>Half-radius speed</a:t>
-            </a:r>
-          </a:p>
-        </p:txBody>
-      </p:sp>
-      <p:sp>
-        <p:nvSpPr>
-          <p:cNvPr id="71" name="C1-E19 text 69" descr="sci-ppt:o069"/>
+              <a:t>that liquid compressibility must be added.</a:t>
+            </a:r>
+          </a:p>
+        </p:txBody>
+      </p:sp>
+      <p:sp>
+        <p:nvSpPr>
+          <p:cNvPr id="49" name="C1-E19 ellipse 47" descr="sci-ppt:o047"/>
+          <p:cNvSpPr/>
+          <p:nvPr/>
+        </p:nvSpPr>
+        <p:spPr>
+          <a:xfrm>
+            <a:off x="7484364" y="2959226"/>
+            <a:ext cx="82296" cy="82296"/>
+          </a:xfrm>
+          <a:prstGeom prst="ellipse">
+            <a:avLst/>
+          </a:prstGeom>
+          <a:solidFill>
+            <a:srgbClr val="8EDBD4"/>
+          </a:solidFill>
+          <a:ln w="12700">
+            <a:solidFill>
+              <a:srgbClr val="8EDBD4"/>
+            </a:solidFill>
+          </a:ln>
+          <a:effectLst/>
+        </p:spPr>
+        <p:txBody>
+          <a:bodyPr rtlCol="0" anchor="ctr"/>
+          <a:lstStyle/>
+          <a:p>
+            <a:pPr algn="ctr"/>
+          </a:p>
+        </p:txBody>
+      </p:sp>
+      <p:sp>
+        <p:nvSpPr>
+          <p:cNvPr id="50" name="C1-E19 text 48" descr="sci-ppt:o048"/>
           <p:cNvSpPr txBox="1"/>
           <p:nvPr/>
         </p:nvSpPr>
         <p:spPr>
           <a:xfrm>
-            <a:off x="7315200" y="3316986"/>
-            <a:ext cx="4389120" cy="231648"/>
+            <a:off x="7653528" y="3380739"/>
+            <a:ext cx="4096512" cy="433070"/>
           </a:xfrm>
           <a:prstGeom prst="rect">
             <a:avLst/>
@@ -6117,39 +5114,15 @@
               </a:spcAft>
             </a:pPr>
             <a:r>
-              <a:rPr sz="1200" b="0" i="0">
+              <a:rPr sz="1250" b="0" i="0">
                 <a:solidFill>
                   <a:srgbClr val="E7F0F3"/>
                 </a:solidFill>
                 <a:latin typeface="Arial"/>
               </a:rPr>
-              <a:t>Ṙ = −√[(2×10⁵/(3×1000))(8 − 1)] = −21.6025 m/s</a:t>
-            </a:r>
-          </a:p>
-        </p:txBody>
-      </p:sp>
-      <p:sp>
-        <p:nvSpPr>
-          <p:cNvPr id="72" name="C1-E19 text 70" descr="sci-ppt:o070"/>
-          <p:cNvSpPr txBox="1"/>
-          <p:nvPr/>
-        </p:nvSpPr>
-        <p:spPr>
-          <a:xfrm>
-            <a:off x="7223760" y="3713226"/>
-            <a:ext cx="4480560" cy="247142"/>
-          </a:xfrm>
-          <a:prstGeom prst="rect">
-            <a:avLst/>
-          </a:prstGeom>
-          <a:noFill/>
-          <a:effectLst/>
-        </p:spPr>
-        <p:txBody>
-          <a:bodyPr wrap="none" lIns="18288" rIns="18288" tIns="18288" bIns="18288" anchor="t">
-            <a:spAutoFit/>
-          </a:bodyPr>
-          <a:lstStyle/>
+              <a:t>The ideal trajectory itself is not a physical</a:t>
+            </a:r>
+          </a:p>
           <a:p>
             <a:pPr algn="l">
               <a:spcAft>
@@ -6157,27 +5130,59 @@
               </a:spcAft>
             </a:pPr>
             <a:r>
-              <a:rPr sz="1300" b="1" i="0">
+              <a:rPr sz="1250" b="0" i="0">
                 <a:solidFill>
-                  <a:srgbClr val="F2B880"/>
+                  <a:srgbClr val="E7F0F3"/>
                 </a:solidFill>
                 <a:latin typeface="Arial"/>
               </a:rPr>
-              <a:t>Half-radius energy</a:t>
-            </a:r>
-          </a:p>
-        </p:txBody>
-      </p:sp>
-      <p:sp>
-        <p:nvSpPr>
-          <p:cNvPr id="73" name="C1-E19 text 71" descr="sci-ppt:o071"/>
+              <a:t>prediction.</a:t>
+            </a:r>
+          </a:p>
+        </p:txBody>
+      </p:sp>
+      <p:sp>
+        <p:nvSpPr>
+          <p:cNvPr id="51" name="C1-E19 ellipse 49" descr="sci-ppt:o049"/>
+          <p:cNvSpPr/>
+          <p:nvPr/>
+        </p:nvSpPr>
+        <p:spPr>
+          <a:xfrm>
+            <a:off x="7484364" y="3438016"/>
+            <a:ext cx="82296" cy="82296"/>
+          </a:xfrm>
+          <a:prstGeom prst="ellipse">
+            <a:avLst/>
+          </a:prstGeom>
+          <a:solidFill>
+            <a:srgbClr val="8EDBD4"/>
+          </a:solidFill>
+          <a:ln w="12700">
+            <a:solidFill>
+              <a:srgbClr val="8EDBD4"/>
+            </a:solidFill>
+          </a:ln>
+          <a:effectLst/>
+        </p:spPr>
+        <p:txBody>
+          <a:bodyPr rtlCol="0" anchor="ctr"/>
+          <a:lstStyle/>
+          <a:p>
+            <a:pPr algn="ctr"/>
+          </a:p>
+        </p:txBody>
+      </p:sp>
+      <p:sp>
+        <p:nvSpPr>
+          <p:cNvPr id="52" name="C1-E19 text 50" descr="sci-ppt:o050"/>
           <p:cNvSpPr txBox="1"/>
           <p:nvPr/>
         </p:nvSpPr>
         <p:spPr>
           <a:xfrm>
-            <a:off x="7315200" y="3960368"/>
-            <a:ext cx="4389120" cy="231648"/>
+            <a:off x="914400" y="5733288"/>
+            <a:ext cx="10972800" cy="247142"/>
           </a:xfrm>
           <a:prstGeom prst="rect">
             <a:avLst/>
@@ -6197,76 +5202,20 @@
               </a:spcAft>
             </a:pPr>
             <a:r>
-              <a:rPr sz="1200" b="0" i="0">
+              <a:rPr sz="1300" b="0" i="0">
                 <a:solidFill>
                   <a:srgbClr val="E7F0F3"/>
                 </a:solidFill>
                 <a:latin typeface="Arial"/>
               </a:rPr>
-              <a:t>Kₗ = (7/8) E_B = 9.8960 nJ</a:t>
-            </a:r>
-          </a:p>
-        </p:txBody>
-      </p:sp>
-      <p:sp>
-        <p:nvSpPr>
-          <p:cNvPr id="74" name="C1-E19 text 72" descr="sci-ppt:o072"/>
-          <p:cNvSpPr txBox="1"/>
-          <p:nvPr/>
-        </p:nvSpPr>
-        <p:spPr>
-          <a:xfrm>
-            <a:off x="7223760" y="4402327"/>
-            <a:ext cx="4480560" cy="402081"/>
-          </a:xfrm>
-          <a:prstGeom prst="rect">
-            <a:avLst/>
-          </a:prstGeom>
-          <a:noFill/>
-          <a:effectLst/>
-        </p:spPr>
-        <p:txBody>
-          <a:bodyPr wrap="none" lIns="18288" rIns="18288" tIns="18288" bIns="18288" anchor="t">
-            <a:spAutoFit/>
-          </a:bodyPr>
-          <a:lstStyle/>
-          <a:p>
-            <a:pPr algn="l">
-              <a:spcAft>
-                <a:spcPts val="0"/>
-              </a:spcAft>
-            </a:pPr>
-            <a:r>
-              <a:rPr sz="1150" b="0" i="0">
-                <a:solidFill>
-                  <a:srgbClr val="B4C7D2"/>
-                </a:solidFill>
-                <a:latin typeface="Arial"/>
-              </a:rPr>
-              <a:t>Inputs: ρ = 1000 kg/m³, Δp_c = 100 kPa, Rₘₐₓ = 30 µm. A</a:t>
-            </a:r>
-          </a:p>
-          <a:p>
-            <a:pPr algn="l">
-              <a:spcAft>
-                <a:spcPts val="0"/>
-              </a:spcAft>
-            </a:pPr>
-            <a:r>
-              <a:rPr sz="1150" b="0" i="0">
-                <a:solidFill>
-                  <a:srgbClr val="B4C7D2"/>
-                </a:solidFill>
-                <a:latin typeface="Arial"/>
-              </a:rPr>
-              <a:t>teaching case, not a measurement.</a:t>
-            </a:r>
-          </a:p>
-        </p:txBody>
-      </p:sp>
-      <p:sp>
-        <p:nvSpPr>
-          <p:cNvPr id="75" name="C1-E19 text 73" descr="sci-ppt:o073"/>
+              <a:t>Wall Mach number M_w = |Ṙ|/c grows as R shrinks, so the incompressible formulas lose validity near the end of the collapse.</a:t>
+            </a:r>
+          </a:p>
+        </p:txBody>
+      </p:sp>
+      <p:sp>
+        <p:nvSpPr>
+          <p:cNvPr id="53" name="C1-E19 text 51" descr="sci-ppt:o051"/>
           <p:cNvSpPr txBox="1"/>
           <p:nvPr/>
         </p:nvSpPr>
@@ -6299,7 +5248,7 @@
                 </a:solidFill>
                 <a:latin typeface="Arial"/>
               </a:rPr>
-              <a:t>All values from Eq. C1-E19 and the Rayleigh curve of Eq. C1-E16.</a:t>
+              <a:t>Curve from Eq. C1-E14 with c = 1500 m/s; threshold from Eq. C1-E19 (teaching inputs).</a:t>
             </a:r>
           </a:p>
         </p:txBody>
